--- a/圖片編輯.pptx
+++ b/圖片編輯.pptx
@@ -16,24 +16,25 @@
     <p:sldId id="264" r:id="rId10"/>
     <p:sldId id="265" r:id="rId11"/>
     <p:sldId id="266" r:id="rId12"/>
-    <p:sldId id="267" r:id="rId13"/>
-    <p:sldId id="268" r:id="rId14"/>
-    <p:sldId id="269" r:id="rId15"/>
-    <p:sldId id="270" r:id="rId16"/>
-    <p:sldId id="271" r:id="rId17"/>
-    <p:sldId id="272" r:id="rId18"/>
-    <p:sldId id="273" r:id="rId19"/>
-    <p:sldId id="274" r:id="rId20"/>
-    <p:sldId id="275" r:id="rId21"/>
-    <p:sldId id="276" r:id="rId22"/>
-    <p:sldId id="277" r:id="rId23"/>
-    <p:sldId id="278" r:id="rId24"/>
-    <p:sldId id="279" r:id="rId25"/>
-    <p:sldId id="280" r:id="rId26"/>
-    <p:sldId id="281" r:id="rId27"/>
-    <p:sldId id="282" r:id="rId28"/>
-    <p:sldId id="283" r:id="rId29"/>
-    <p:sldId id="284" r:id="rId30"/>
+    <p:sldId id="285" r:id="rId13"/>
+    <p:sldId id="267" r:id="rId14"/>
+    <p:sldId id="268" r:id="rId15"/>
+    <p:sldId id="269" r:id="rId16"/>
+    <p:sldId id="270" r:id="rId17"/>
+    <p:sldId id="271" r:id="rId18"/>
+    <p:sldId id="272" r:id="rId19"/>
+    <p:sldId id="273" r:id="rId20"/>
+    <p:sldId id="274" r:id="rId21"/>
+    <p:sldId id="275" r:id="rId22"/>
+    <p:sldId id="276" r:id="rId23"/>
+    <p:sldId id="277" r:id="rId24"/>
+    <p:sldId id="278" r:id="rId25"/>
+    <p:sldId id="279" r:id="rId26"/>
+    <p:sldId id="280" r:id="rId27"/>
+    <p:sldId id="281" r:id="rId28"/>
+    <p:sldId id="282" r:id="rId29"/>
+    <p:sldId id="283" r:id="rId30"/>
+    <p:sldId id="284" r:id="rId31"/>
   </p:sldIdLst>
   <p:sldSz cx="12192000" cy="6858000"/>
   <p:notesSz cx="6858000" cy="9144000"/>
@@ -132,6 +133,11 @@
       </a:defRPr>
     </a:lvl9pPr>
   </p:defaultTextStyle>
+  <p:extLst>
+    <p:ext uri="{EFAFB233-063F-42B5-8137-9DF3F51BA10A}">
+      <p15:sldGuideLst xmlns:p15="http://schemas.microsoft.com/office/powerpoint/2012/main"/>
+    </p:ext>
+  </p:extLst>
 </p:presentation>
 </file>
 
@@ -282,7 +288,7 @@
           <a:p>
             <a:fld id="{48983F5B-E8D6-411B-9A9A-0BF06BA5F6D6}" type="datetimeFigureOut">
               <a:rPr lang="zh-TW" altLang="en-US" smtClean="0"/>
-              <a:t>2026/4/16</a:t>
+              <a:t>2026/4/18</a:t>
             </a:fld>
             <a:endParaRPr lang="zh-TW" altLang="en-US"/>
           </a:p>
@@ -480,7 +486,7 @@
           <a:p>
             <a:fld id="{48983F5B-E8D6-411B-9A9A-0BF06BA5F6D6}" type="datetimeFigureOut">
               <a:rPr lang="zh-TW" altLang="en-US" smtClean="0"/>
-              <a:t>2026/4/16</a:t>
+              <a:t>2026/4/18</a:t>
             </a:fld>
             <a:endParaRPr lang="zh-TW" altLang="en-US"/>
           </a:p>
@@ -688,7 +694,7 @@
           <a:p>
             <a:fld id="{48983F5B-E8D6-411B-9A9A-0BF06BA5F6D6}" type="datetimeFigureOut">
               <a:rPr lang="zh-TW" altLang="en-US" smtClean="0"/>
-              <a:t>2026/4/16</a:t>
+              <a:t>2026/4/18</a:t>
             </a:fld>
             <a:endParaRPr lang="zh-TW" altLang="en-US"/>
           </a:p>
@@ -886,7 +892,7 @@
           <a:p>
             <a:fld id="{48983F5B-E8D6-411B-9A9A-0BF06BA5F6D6}" type="datetimeFigureOut">
               <a:rPr lang="zh-TW" altLang="en-US" smtClean="0"/>
-              <a:t>2026/4/16</a:t>
+              <a:t>2026/4/18</a:t>
             </a:fld>
             <a:endParaRPr lang="zh-TW" altLang="en-US"/>
           </a:p>
@@ -1161,7 +1167,7 @@
           <a:p>
             <a:fld id="{48983F5B-E8D6-411B-9A9A-0BF06BA5F6D6}" type="datetimeFigureOut">
               <a:rPr lang="zh-TW" altLang="en-US" smtClean="0"/>
-              <a:t>2026/4/16</a:t>
+              <a:t>2026/4/18</a:t>
             </a:fld>
             <a:endParaRPr lang="zh-TW" altLang="en-US"/>
           </a:p>
@@ -1426,7 +1432,7 @@
           <a:p>
             <a:fld id="{48983F5B-E8D6-411B-9A9A-0BF06BA5F6D6}" type="datetimeFigureOut">
               <a:rPr lang="zh-TW" altLang="en-US" smtClean="0"/>
-              <a:t>2026/4/16</a:t>
+              <a:t>2026/4/18</a:t>
             </a:fld>
             <a:endParaRPr lang="zh-TW" altLang="en-US"/>
           </a:p>
@@ -1838,7 +1844,7 @@
           <a:p>
             <a:fld id="{48983F5B-E8D6-411B-9A9A-0BF06BA5F6D6}" type="datetimeFigureOut">
               <a:rPr lang="zh-TW" altLang="en-US" smtClean="0"/>
-              <a:t>2026/4/16</a:t>
+              <a:t>2026/4/18</a:t>
             </a:fld>
             <a:endParaRPr lang="zh-TW" altLang="en-US"/>
           </a:p>
@@ -1979,7 +1985,7 @@
           <a:p>
             <a:fld id="{48983F5B-E8D6-411B-9A9A-0BF06BA5F6D6}" type="datetimeFigureOut">
               <a:rPr lang="zh-TW" altLang="en-US" smtClean="0"/>
-              <a:t>2026/4/16</a:t>
+              <a:t>2026/4/18</a:t>
             </a:fld>
             <a:endParaRPr lang="zh-TW" altLang="en-US"/>
           </a:p>
@@ -2092,7 +2098,7 @@
           <a:p>
             <a:fld id="{48983F5B-E8D6-411B-9A9A-0BF06BA5F6D6}" type="datetimeFigureOut">
               <a:rPr lang="zh-TW" altLang="en-US" smtClean="0"/>
-              <a:t>2026/4/16</a:t>
+              <a:t>2026/4/18</a:t>
             </a:fld>
             <a:endParaRPr lang="zh-TW" altLang="en-US"/>
           </a:p>
@@ -2403,7 +2409,7 @@
           <a:p>
             <a:fld id="{48983F5B-E8D6-411B-9A9A-0BF06BA5F6D6}" type="datetimeFigureOut">
               <a:rPr lang="zh-TW" altLang="en-US" smtClean="0"/>
-              <a:t>2026/4/16</a:t>
+              <a:t>2026/4/18</a:t>
             </a:fld>
             <a:endParaRPr lang="zh-TW" altLang="en-US"/>
           </a:p>
@@ -2691,7 +2697,7 @@
           <a:p>
             <a:fld id="{48983F5B-E8D6-411B-9A9A-0BF06BA5F6D6}" type="datetimeFigureOut">
               <a:rPr lang="zh-TW" altLang="en-US" smtClean="0"/>
-              <a:t>2026/4/16</a:t>
+              <a:t>2026/4/18</a:t>
             </a:fld>
             <a:endParaRPr lang="zh-TW" altLang="en-US"/>
           </a:p>
@@ -2932,7 +2938,7 @@
           <a:p>
             <a:fld id="{48983F5B-E8D6-411B-9A9A-0BF06BA5F6D6}" type="datetimeFigureOut">
               <a:rPr lang="zh-TW" altLang="en-US" smtClean="0"/>
-              <a:t>2026/4/16</a:t>
+              <a:t>2026/4/18</a:t>
             </a:fld>
             <a:endParaRPr lang="zh-TW" altLang="en-US"/>
           </a:p>
@@ -3713,7 +3719,7 @@
         <p:cNvPr id="1" name="">
           <a:extLst>
             <a:ext uri="{FF2B5EF4-FFF2-40B4-BE49-F238E27FC236}">
-              <a16:creationId xmlns:a16="http://schemas.microsoft.com/office/drawing/2014/main" id="{DDC3FB45-BE70-5730-AEFB-1256D8DEF525}"/>
+              <a16:creationId xmlns:a16="http://schemas.microsoft.com/office/drawing/2014/main" id="{4E135552-C4D8-7FF2-17AE-0F3ECD0A78D8}"/>
             </a:ext>
           </a:extLst>
         </p:cNvPr>
@@ -3733,7 +3739,7 @@
           <p:cNvPr id="4" name="矩形 3">
             <a:extLst>
               <a:ext uri="{FF2B5EF4-FFF2-40B4-BE49-F238E27FC236}">
-                <a16:creationId xmlns:a16="http://schemas.microsoft.com/office/drawing/2014/main" id="{29432B2C-D464-8803-E79A-5274A7E2F7C8}"/>
+                <a16:creationId xmlns:a16="http://schemas.microsoft.com/office/drawing/2014/main" id="{E0BDBC4A-8453-6028-845C-0A1AAA1B369F}"/>
               </a:ext>
             </a:extLst>
           </p:cNvPr>
@@ -3742,7 +3748,7 @@
         </p:nvSpPr>
         <p:spPr>
           <a:xfrm>
-            <a:off x="531591" y="472570"/>
+            <a:off x="6068332" y="638095"/>
             <a:ext cx="3250800" cy="3251200"/>
           </a:xfrm>
           <a:prstGeom prst="rect">
@@ -3780,10 +3786,10 @@
       </p:sp>
       <p:pic>
         <p:nvPicPr>
-          <p:cNvPr id="7172" name="Picture 4" descr="稀有咖啡杯 紅皮克敏">
-            <a:extLst>
-              <a:ext uri="{FF2B5EF4-FFF2-40B4-BE49-F238E27FC236}">
-                <a16:creationId xmlns:a16="http://schemas.microsoft.com/office/drawing/2014/main" id="{497302DA-4288-11AB-8E7F-48A733FEC692}"/>
+          <p:cNvPr id="5122" name="Picture 2">
+            <a:extLst>
+              <a:ext uri="{FF2B5EF4-FFF2-40B4-BE49-F238E27FC236}">
+                <a16:creationId xmlns:a16="http://schemas.microsoft.com/office/drawing/2014/main" id="{3CCFDF9E-7C5C-EC74-E653-5F69E19B6273}"/>
               </a:ext>
             </a:extLst>
           </p:cNvPr>
@@ -3807,30 +3813,30 @@
         </p:blipFill>
         <p:spPr bwMode="auto">
           <a:xfrm>
-            <a:off x="1095063" y="472770"/>
-            <a:ext cx="2123856" cy="3250800"/>
-          </a:xfrm>
-          <a:prstGeom prst="rect">
-            <a:avLst/>
-          </a:prstGeom>
-          <a:noFill/>
-          <a:extLst>
-            <a:ext uri="{909E8E84-426E-40DD-AFC4-6F175D3DCCD1}">
-              <a14:hiddenFill xmlns:a14="http://schemas.microsoft.com/office/drawing/2010/main">
-                <a:solidFill>
-                  <a:srgbClr val="FFFFFF"/>
-                </a:solidFill>
-              </a14:hiddenFill>
-            </a:ext>
-          </a:extLst>
-        </p:spPr>
-      </p:pic>
-      <p:pic>
-        <p:nvPicPr>
-          <p:cNvPr id="7174" name="Picture 6" descr="稀有廚師帽 紅皮克敏">
-            <a:extLst>
-              <a:ext uri="{FF2B5EF4-FFF2-40B4-BE49-F238E27FC236}">
-                <a16:creationId xmlns:a16="http://schemas.microsoft.com/office/drawing/2014/main" id="{F3FEEF94-E38B-447E-5C80-0209B71BB2BB}"/>
+            <a:off x="798837" y="2374331"/>
+            <a:ext cx="1404834" cy="3250800"/>
+          </a:xfrm>
+          <a:prstGeom prst="rect">
+            <a:avLst/>
+          </a:prstGeom>
+          <a:noFill/>
+          <a:extLst>
+            <a:ext uri="{909E8E84-426E-40DD-AFC4-6F175D3DCCD1}">
+              <a14:hiddenFill xmlns:a14="http://schemas.microsoft.com/office/drawing/2010/main">
+                <a:solidFill>
+                  <a:srgbClr val="FFFFFF"/>
+                </a:solidFill>
+              </a14:hiddenFill>
+            </a:ext>
+          </a:extLst>
+        </p:spPr>
+      </p:pic>
+      <p:pic>
+        <p:nvPicPr>
+          <p:cNvPr id="1026" name="Picture 2" descr="A Purple Pikmin from Pikmin 4.">
+            <a:extLst>
+              <a:ext uri="{FF2B5EF4-FFF2-40B4-BE49-F238E27FC236}">
+                <a16:creationId xmlns:a16="http://schemas.microsoft.com/office/drawing/2014/main" id="{287C8A06-1134-1A7B-9908-6AF5C0A6616A}"/>
               </a:ext>
             </a:extLst>
           </p:cNvPr>
@@ -3854,8 +3860,8 @@
         </p:blipFill>
         <p:spPr bwMode="auto">
           <a:xfrm>
-            <a:off x="5795963" y="2719388"/>
-            <a:ext cx="600075" cy="1419225"/>
+            <a:off x="6068332" y="638295"/>
+            <a:ext cx="3250800" cy="3250800"/>
           </a:xfrm>
           <a:prstGeom prst="rect">
             <a:avLst/>
@@ -3875,7 +3881,7 @@
     </p:spTree>
     <p:extLst>
       <p:ext uri="{BB962C8B-B14F-4D97-AF65-F5344CB8AC3E}">
-        <p14:creationId xmlns:p14="http://schemas.microsoft.com/office/powerpoint/2010/main" val="2171643745"/>
+        <p14:creationId xmlns:p14="http://schemas.microsoft.com/office/powerpoint/2010/main" val="1366565762"/>
       </p:ext>
     </p:extLst>
   </p:cSld>
@@ -3893,7 +3899,7 @@
         <p:cNvPr id="1" name="">
           <a:extLst>
             <a:ext uri="{FF2B5EF4-FFF2-40B4-BE49-F238E27FC236}">
-              <a16:creationId xmlns:a16="http://schemas.microsoft.com/office/drawing/2014/main" id="{CE49899C-104A-2B7F-6D05-7AEE216AB447}"/>
+              <a16:creationId xmlns:a16="http://schemas.microsoft.com/office/drawing/2014/main" id="{DDC3FB45-BE70-5730-AEFB-1256D8DEF525}"/>
             </a:ext>
           </a:extLst>
         </p:cNvPr>
@@ -3913,7 +3919,7 @@
           <p:cNvPr id="4" name="矩形 3">
             <a:extLst>
               <a:ext uri="{FF2B5EF4-FFF2-40B4-BE49-F238E27FC236}">
-                <a16:creationId xmlns:a16="http://schemas.microsoft.com/office/drawing/2014/main" id="{F614FB2E-6C99-B2EB-14D0-124CA862A15F}"/>
+                <a16:creationId xmlns:a16="http://schemas.microsoft.com/office/drawing/2014/main" id="{29432B2C-D464-8803-E79A-5274A7E2F7C8}"/>
               </a:ext>
             </a:extLst>
           </p:cNvPr>
@@ -3963,7 +3969,7 @@
           <p:cNvPr id="7172" name="Picture 4" descr="稀有咖啡杯 紅皮克敏">
             <a:extLst>
               <a:ext uri="{FF2B5EF4-FFF2-40B4-BE49-F238E27FC236}">
-                <a16:creationId xmlns:a16="http://schemas.microsoft.com/office/drawing/2014/main" id="{F1B0259E-4D59-4A3D-79E6-596BCB03E243}"/>
+                <a16:creationId xmlns:a16="http://schemas.microsoft.com/office/drawing/2014/main" id="{497302DA-4288-11AB-8E7F-48A733FEC692}"/>
               </a:ext>
             </a:extLst>
           </p:cNvPr>
@@ -3989,6 +3995,53 @@
           <a:xfrm>
             <a:off x="1095063" y="472770"/>
             <a:ext cx="2123856" cy="3250800"/>
+          </a:xfrm>
+          <a:prstGeom prst="rect">
+            <a:avLst/>
+          </a:prstGeom>
+          <a:noFill/>
+          <a:extLst>
+            <a:ext uri="{909E8E84-426E-40DD-AFC4-6F175D3DCCD1}">
+              <a14:hiddenFill xmlns:a14="http://schemas.microsoft.com/office/drawing/2010/main">
+                <a:solidFill>
+                  <a:srgbClr val="FFFFFF"/>
+                </a:solidFill>
+              </a14:hiddenFill>
+            </a:ext>
+          </a:extLst>
+        </p:spPr>
+      </p:pic>
+      <p:pic>
+        <p:nvPicPr>
+          <p:cNvPr id="7174" name="Picture 6" descr="稀有廚師帽 紅皮克敏">
+            <a:extLst>
+              <a:ext uri="{FF2B5EF4-FFF2-40B4-BE49-F238E27FC236}">
+                <a16:creationId xmlns:a16="http://schemas.microsoft.com/office/drawing/2014/main" id="{F3FEEF94-E38B-447E-5C80-0209B71BB2BB}"/>
+              </a:ext>
+            </a:extLst>
+          </p:cNvPr>
+          <p:cNvPicPr>
+            <a:picLocks noChangeAspect="1" noChangeArrowheads="1"/>
+          </p:cNvPicPr>
+          <p:nvPr/>
+        </p:nvPicPr>
+        <p:blipFill>
+          <a:blip r:embed="rId3">
+            <a:extLst>
+              <a:ext uri="{28A0092B-C50C-407E-A947-70E740481C1C}">
+                <a14:useLocalDpi xmlns:a14="http://schemas.microsoft.com/office/drawing/2010/main" val="0"/>
+              </a:ext>
+            </a:extLst>
+          </a:blip>
+          <a:srcRect/>
+          <a:stretch>
+            <a:fillRect/>
+          </a:stretch>
+        </p:blipFill>
+        <p:spPr bwMode="auto">
+          <a:xfrm>
+            <a:off x="5795963" y="2719388"/>
+            <a:ext cx="600075" cy="1419225"/>
           </a:xfrm>
           <a:prstGeom prst="rect">
             <a:avLst/>
@@ -4008,7 +4061,7 @@
     </p:spTree>
     <p:extLst>
       <p:ext uri="{BB962C8B-B14F-4D97-AF65-F5344CB8AC3E}">
-        <p14:creationId xmlns:p14="http://schemas.microsoft.com/office/powerpoint/2010/main" val="1010473057"/>
+        <p14:creationId xmlns:p14="http://schemas.microsoft.com/office/powerpoint/2010/main" val="2171643745"/>
       </p:ext>
     </p:extLst>
   </p:cSld>
@@ -4026,7 +4079,7 @@
         <p:cNvPr id="1" name="">
           <a:extLst>
             <a:ext uri="{FF2B5EF4-FFF2-40B4-BE49-F238E27FC236}">
-              <a16:creationId xmlns:a16="http://schemas.microsoft.com/office/drawing/2014/main" id="{6CFD5257-C803-2386-0350-2AAA9F84D012}"/>
+              <a16:creationId xmlns:a16="http://schemas.microsoft.com/office/drawing/2014/main" id="{CE49899C-104A-2B7F-6D05-7AEE216AB447}"/>
             </a:ext>
           </a:extLst>
         </p:cNvPr>
@@ -4046,7 +4099,7 @@
           <p:cNvPr id="4" name="矩形 3">
             <a:extLst>
               <a:ext uri="{FF2B5EF4-FFF2-40B4-BE49-F238E27FC236}">
-                <a16:creationId xmlns:a16="http://schemas.microsoft.com/office/drawing/2014/main" id="{585B3626-1663-1F61-CE4F-EF02D4707133}"/>
+                <a16:creationId xmlns:a16="http://schemas.microsoft.com/office/drawing/2014/main" id="{F614FB2E-6C99-B2EB-14D0-124CA862A15F}"/>
               </a:ext>
             </a:extLst>
           </p:cNvPr>
@@ -4096,7 +4149,7 @@
           <p:cNvPr id="7172" name="Picture 4" descr="稀有咖啡杯 紅皮克敏">
             <a:extLst>
               <a:ext uri="{FF2B5EF4-FFF2-40B4-BE49-F238E27FC236}">
-                <a16:creationId xmlns:a16="http://schemas.microsoft.com/office/drawing/2014/main" id="{220BD989-10AD-3261-6DB7-77AA33901E71}"/>
+                <a16:creationId xmlns:a16="http://schemas.microsoft.com/office/drawing/2014/main" id="{F1B0259E-4D59-4A3D-79E6-596BCB03E243}"/>
               </a:ext>
             </a:extLst>
           </p:cNvPr>
@@ -4122,100 +4175,6 @@
           <a:xfrm>
             <a:off x="1095063" y="472770"/>
             <a:ext cx="2123856" cy="3250800"/>
-          </a:xfrm>
-          <a:prstGeom prst="rect">
-            <a:avLst/>
-          </a:prstGeom>
-          <a:noFill/>
-          <a:extLst>
-            <a:ext uri="{909E8E84-426E-40DD-AFC4-6F175D3DCCD1}">
-              <a14:hiddenFill xmlns:a14="http://schemas.microsoft.com/office/drawing/2010/main">
-                <a:solidFill>
-                  <a:srgbClr val="FFFFFF"/>
-                </a:solidFill>
-              </a14:hiddenFill>
-            </a:ext>
-          </a:extLst>
-        </p:spPr>
-      </p:pic>
-      <p:pic>
-        <p:nvPicPr>
-          <p:cNvPr id="14338" name="Picture 2" descr="稀有廚師帽 藍皮克敏">
-            <a:extLst>
-              <a:ext uri="{FF2B5EF4-FFF2-40B4-BE49-F238E27FC236}">
-                <a16:creationId xmlns:a16="http://schemas.microsoft.com/office/drawing/2014/main" id="{A6940363-D09C-5654-83A1-7146F8435629}"/>
-              </a:ext>
-            </a:extLst>
-          </p:cNvPr>
-          <p:cNvPicPr>
-            <a:picLocks noChangeAspect="1" noChangeArrowheads="1"/>
-          </p:cNvPicPr>
-          <p:nvPr/>
-        </p:nvPicPr>
-        <p:blipFill>
-          <a:blip r:embed="rId3">
-            <a:extLst>
-              <a:ext uri="{28A0092B-C50C-407E-A947-70E740481C1C}">
-                <a14:useLocalDpi xmlns:a14="http://schemas.microsoft.com/office/drawing/2010/main" val="0"/>
-              </a:ext>
-            </a:extLst>
-          </a:blip>
-          <a:srcRect/>
-          <a:stretch>
-            <a:fillRect/>
-          </a:stretch>
-        </p:blipFill>
-        <p:spPr bwMode="auto">
-          <a:xfrm>
-            <a:off x="5805488" y="2719388"/>
-            <a:ext cx="581025" cy="1419225"/>
-          </a:xfrm>
-          <a:prstGeom prst="rect">
-            <a:avLst/>
-          </a:prstGeom>
-          <a:noFill/>
-          <a:extLst>
-            <a:ext uri="{909E8E84-426E-40DD-AFC4-6F175D3DCCD1}">
-              <a14:hiddenFill xmlns:a14="http://schemas.microsoft.com/office/drawing/2010/main">
-                <a:solidFill>
-                  <a:srgbClr val="FFFFFF"/>
-                </a:solidFill>
-              </a14:hiddenFill>
-            </a:ext>
-          </a:extLst>
-        </p:spPr>
-      </p:pic>
-      <p:pic>
-        <p:nvPicPr>
-          <p:cNvPr id="14340" name="Picture 4" descr="廚師帽 藍皮克敏">
-            <a:extLst>
-              <a:ext uri="{FF2B5EF4-FFF2-40B4-BE49-F238E27FC236}">
-                <a16:creationId xmlns:a16="http://schemas.microsoft.com/office/drawing/2014/main" id="{D1D9B5CC-A768-8023-746C-9EA53B09E744}"/>
-              </a:ext>
-            </a:extLst>
-          </p:cNvPr>
-          <p:cNvPicPr>
-            <a:picLocks noChangeAspect="1" noChangeArrowheads="1"/>
-          </p:cNvPicPr>
-          <p:nvPr/>
-        </p:nvPicPr>
-        <p:blipFill>
-          <a:blip r:embed="rId4">
-            <a:extLst>
-              <a:ext uri="{28A0092B-C50C-407E-A947-70E740481C1C}">
-                <a14:useLocalDpi xmlns:a14="http://schemas.microsoft.com/office/drawing/2010/main" val="0"/>
-              </a:ext>
-            </a:extLst>
-          </a:blip>
-          <a:srcRect/>
-          <a:stretch>
-            <a:fillRect/>
-          </a:stretch>
-        </p:blipFill>
-        <p:spPr bwMode="auto">
-          <a:xfrm>
-            <a:off x="7700963" y="2771776"/>
-            <a:ext cx="581025" cy="1419225"/>
           </a:xfrm>
           <a:prstGeom prst="rect">
             <a:avLst/>
@@ -4235,7 +4194,7 @@
     </p:spTree>
     <p:extLst>
       <p:ext uri="{BB962C8B-B14F-4D97-AF65-F5344CB8AC3E}">
-        <p14:creationId xmlns:p14="http://schemas.microsoft.com/office/powerpoint/2010/main" val="2451860752"/>
+        <p14:creationId xmlns:p14="http://schemas.microsoft.com/office/powerpoint/2010/main" val="1010473057"/>
       </p:ext>
     </p:extLst>
   </p:cSld>
@@ -4253,7 +4212,7 @@
         <p:cNvPr id="1" name="">
           <a:extLst>
             <a:ext uri="{FF2B5EF4-FFF2-40B4-BE49-F238E27FC236}">
-              <a16:creationId xmlns:a16="http://schemas.microsoft.com/office/drawing/2014/main" id="{657869DE-8A4A-9C54-31CB-1D74BFD3D4C5}"/>
+              <a16:creationId xmlns:a16="http://schemas.microsoft.com/office/drawing/2014/main" id="{6CFD5257-C803-2386-0350-2AAA9F84D012}"/>
             </a:ext>
           </a:extLst>
         </p:cNvPr>
@@ -4273,7 +4232,7 @@
           <p:cNvPr id="4" name="矩形 3">
             <a:extLst>
               <a:ext uri="{FF2B5EF4-FFF2-40B4-BE49-F238E27FC236}">
-                <a16:creationId xmlns:a16="http://schemas.microsoft.com/office/drawing/2014/main" id="{277D15C1-8A97-CDEC-79F0-0A4C4BA64A09}"/>
+                <a16:creationId xmlns:a16="http://schemas.microsoft.com/office/drawing/2014/main" id="{585B3626-1663-1F61-CE4F-EF02D4707133}"/>
               </a:ext>
             </a:extLst>
           </p:cNvPr>
@@ -4323,7 +4282,7 @@
           <p:cNvPr id="7172" name="Picture 4" descr="稀有咖啡杯 紅皮克敏">
             <a:extLst>
               <a:ext uri="{FF2B5EF4-FFF2-40B4-BE49-F238E27FC236}">
-                <a16:creationId xmlns:a16="http://schemas.microsoft.com/office/drawing/2014/main" id="{828FC30A-A3E2-8B1E-765C-0D556CA40886}"/>
+                <a16:creationId xmlns:a16="http://schemas.microsoft.com/office/drawing/2014/main" id="{220BD989-10AD-3261-6DB7-77AA33901E71}"/>
               </a:ext>
             </a:extLst>
           </p:cNvPr>
@@ -4370,7 +4329,7 @@
           <p:cNvPr id="14338" name="Picture 2" descr="稀有廚師帽 藍皮克敏">
             <a:extLst>
               <a:ext uri="{FF2B5EF4-FFF2-40B4-BE49-F238E27FC236}">
-                <a16:creationId xmlns:a16="http://schemas.microsoft.com/office/drawing/2014/main" id="{60723DE6-AAC4-96B4-48D7-4289FA78B234}"/>
+                <a16:creationId xmlns:a16="http://schemas.microsoft.com/office/drawing/2014/main" id="{A6940363-D09C-5654-83A1-7146F8435629}"/>
               </a:ext>
             </a:extLst>
           </p:cNvPr>
@@ -4394,30 +4353,30 @@
         </p:blipFill>
         <p:spPr bwMode="auto">
           <a:xfrm>
-            <a:off x="5805487" y="2719387"/>
-            <a:ext cx="1330864" cy="3250800"/>
-          </a:xfrm>
-          <a:prstGeom prst="rect">
-            <a:avLst/>
-          </a:prstGeom>
-          <a:noFill/>
-          <a:extLst>
-            <a:ext uri="{909E8E84-426E-40DD-AFC4-6F175D3DCCD1}">
-              <a14:hiddenFill xmlns:a14="http://schemas.microsoft.com/office/drawing/2010/main">
-                <a:solidFill>
-                  <a:srgbClr val="FFFFFF"/>
-                </a:solidFill>
-              </a14:hiddenFill>
-            </a:ext>
-          </a:extLst>
-        </p:spPr>
-      </p:pic>
-      <p:pic>
-        <p:nvPicPr>
-          <p:cNvPr id="15362" name="Picture 2" descr="稀有廚師帽 紫皮克敏">
-            <a:extLst>
-              <a:ext uri="{FF2B5EF4-FFF2-40B4-BE49-F238E27FC236}">
-                <a16:creationId xmlns:a16="http://schemas.microsoft.com/office/drawing/2014/main" id="{A0A60588-309C-3466-616C-2106BADFBF59}"/>
+            <a:off x="5805488" y="2719388"/>
+            <a:ext cx="581025" cy="1419225"/>
+          </a:xfrm>
+          <a:prstGeom prst="rect">
+            <a:avLst/>
+          </a:prstGeom>
+          <a:noFill/>
+          <a:extLst>
+            <a:ext uri="{909E8E84-426E-40DD-AFC4-6F175D3DCCD1}">
+              <a14:hiddenFill xmlns:a14="http://schemas.microsoft.com/office/drawing/2010/main">
+                <a:solidFill>
+                  <a:srgbClr val="FFFFFF"/>
+                </a:solidFill>
+              </a14:hiddenFill>
+            </a:ext>
+          </a:extLst>
+        </p:spPr>
+      </p:pic>
+      <p:pic>
+        <p:nvPicPr>
+          <p:cNvPr id="14340" name="Picture 4" descr="廚師帽 藍皮克敏">
+            <a:extLst>
+              <a:ext uri="{FF2B5EF4-FFF2-40B4-BE49-F238E27FC236}">
+                <a16:creationId xmlns:a16="http://schemas.microsoft.com/office/drawing/2014/main" id="{D1D9B5CC-A768-8023-746C-9EA53B09E744}"/>
               </a:ext>
             </a:extLst>
           </p:cNvPr>
@@ -4441,478 +4400,8 @@
         </p:blipFill>
         <p:spPr bwMode="auto">
           <a:xfrm>
-            <a:off x="4845843" y="4369594"/>
-            <a:ext cx="1112690" cy="3250800"/>
-          </a:xfrm>
-          <a:prstGeom prst="rect">
-            <a:avLst/>
-          </a:prstGeom>
-          <a:noFill/>
-          <a:extLst>
-            <a:ext uri="{909E8E84-426E-40DD-AFC4-6F175D3DCCD1}">
-              <a14:hiddenFill xmlns:a14="http://schemas.microsoft.com/office/drawing/2010/main">
-                <a:solidFill>
-                  <a:srgbClr val="FFFFFF"/>
-                </a:solidFill>
-              </a14:hiddenFill>
-            </a:ext>
-          </a:extLst>
-        </p:spPr>
-      </p:pic>
-      <p:pic>
-        <p:nvPicPr>
-          <p:cNvPr id="15366" name="Picture 6" descr="稀有廚師帽 岩皮克敏">
-            <a:extLst>
-              <a:ext uri="{FF2B5EF4-FFF2-40B4-BE49-F238E27FC236}">
-                <a16:creationId xmlns:a16="http://schemas.microsoft.com/office/drawing/2014/main" id="{5406C42A-C7AF-BDFB-C9C6-AA7C64C7A23A}"/>
-              </a:ext>
-            </a:extLst>
-          </p:cNvPr>
-          <p:cNvPicPr>
-            <a:picLocks noChangeAspect="1" noChangeArrowheads="1"/>
-          </p:cNvPicPr>
-          <p:nvPr/>
-        </p:nvPicPr>
-        <p:blipFill>
-          <a:blip r:embed="rId5">
-            <a:extLst>
-              <a:ext uri="{28A0092B-C50C-407E-A947-70E740481C1C}">
-                <a14:useLocalDpi xmlns:a14="http://schemas.microsoft.com/office/drawing/2010/main" val="0"/>
-              </a:ext>
-            </a:extLst>
-          </a:blip>
-          <a:srcRect/>
-          <a:stretch>
-            <a:fillRect/>
-          </a:stretch>
-        </p:blipFill>
-        <p:spPr bwMode="auto">
-          <a:xfrm>
-            <a:off x="9439275" y="2032883"/>
-            <a:ext cx="1690416" cy="3250800"/>
-          </a:xfrm>
-          <a:prstGeom prst="rect">
-            <a:avLst/>
-          </a:prstGeom>
-          <a:noFill/>
-          <a:extLst>
-            <a:ext uri="{909E8E84-426E-40DD-AFC4-6F175D3DCCD1}">
-              <a14:hiddenFill xmlns:a14="http://schemas.microsoft.com/office/drawing/2010/main">
-                <a:solidFill>
-                  <a:srgbClr val="FFFFFF"/>
-                </a:solidFill>
-              </a14:hiddenFill>
-            </a:ext>
-          </a:extLst>
-        </p:spPr>
-      </p:pic>
-      <p:pic>
-        <p:nvPicPr>
-          <p:cNvPr id="15370" name="Picture 10" descr="稀有廚師帽 翼皮克敏">
-            <a:extLst>
-              <a:ext uri="{FF2B5EF4-FFF2-40B4-BE49-F238E27FC236}">
-                <a16:creationId xmlns:a16="http://schemas.microsoft.com/office/drawing/2014/main" id="{7CAA784F-3E4F-5413-08BD-02EC32E0F291}"/>
-              </a:ext>
-            </a:extLst>
-          </p:cNvPr>
-          <p:cNvPicPr>
-            <a:picLocks noChangeAspect="1" noChangeArrowheads="1"/>
-          </p:cNvPicPr>
-          <p:nvPr/>
-        </p:nvPicPr>
-        <p:blipFill>
-          <a:blip r:embed="rId6">
-            <a:extLst>
-              <a:ext uri="{28A0092B-C50C-407E-A947-70E740481C1C}">
-                <a14:useLocalDpi xmlns:a14="http://schemas.microsoft.com/office/drawing/2010/main" val="0"/>
-              </a:ext>
-            </a:extLst>
-          </a:blip>
-          <a:srcRect/>
-          <a:stretch>
-            <a:fillRect/>
-          </a:stretch>
-        </p:blipFill>
-        <p:spPr bwMode="auto">
-          <a:xfrm>
-            <a:off x="5903602" y="812006"/>
-            <a:ext cx="1361822" cy="3250800"/>
-          </a:xfrm>
-          <a:prstGeom prst="rect">
-            <a:avLst/>
-          </a:prstGeom>
-          <a:noFill/>
-          <a:extLst>
-            <a:ext uri="{909E8E84-426E-40DD-AFC4-6F175D3DCCD1}">
-              <a14:hiddenFill xmlns:a14="http://schemas.microsoft.com/office/drawing/2010/main">
-                <a:solidFill>
-                  <a:srgbClr val="FFFFFF"/>
-                </a:solidFill>
-              </a14:hiddenFill>
-            </a:ext>
-          </a:extLst>
-        </p:spPr>
-      </p:pic>
-      <p:pic>
-        <p:nvPicPr>
-          <p:cNvPr id="13314" name="Picture 2" descr="稀有廚師帽 黃皮克敏">
-            <a:extLst>
-              <a:ext uri="{FF2B5EF4-FFF2-40B4-BE49-F238E27FC236}">
-                <a16:creationId xmlns:a16="http://schemas.microsoft.com/office/drawing/2014/main" id="{B0BCAB0A-5288-617F-2661-718EB0E87C94}"/>
-              </a:ext>
-            </a:extLst>
-          </p:cNvPr>
-          <p:cNvPicPr>
-            <a:picLocks noChangeAspect="1" noChangeArrowheads="1"/>
-          </p:cNvPicPr>
-          <p:nvPr/>
-        </p:nvPicPr>
-        <p:blipFill>
-          <a:blip r:embed="rId7">
-            <a:extLst>
-              <a:ext uri="{28A0092B-C50C-407E-A947-70E740481C1C}">
-                <a14:useLocalDpi xmlns:a14="http://schemas.microsoft.com/office/drawing/2010/main" val="0"/>
-              </a:ext>
-            </a:extLst>
-          </a:blip>
-          <a:srcRect/>
-          <a:stretch>
-            <a:fillRect/>
-          </a:stretch>
-        </p:blipFill>
-        <p:spPr bwMode="auto">
-          <a:xfrm>
-            <a:off x="8666333" y="4457701"/>
-            <a:ext cx="1112690" cy="3250800"/>
-          </a:xfrm>
-          <a:prstGeom prst="rect">
-            <a:avLst/>
-          </a:prstGeom>
-          <a:noFill/>
-          <a:extLst>
-            <a:ext uri="{909E8E84-426E-40DD-AFC4-6F175D3DCCD1}">
-              <a14:hiddenFill xmlns:a14="http://schemas.microsoft.com/office/drawing/2010/main">
-                <a:solidFill>
-                  <a:srgbClr val="FFFFFF"/>
-                </a:solidFill>
-              </a14:hiddenFill>
-            </a:ext>
-          </a:extLst>
-        </p:spPr>
-      </p:pic>
-      <p:pic>
-        <p:nvPicPr>
-          <p:cNvPr id="13316" name="Picture 4" descr="稀有咖啡杯 黃皮克敏">
-            <a:extLst>
-              <a:ext uri="{FF2B5EF4-FFF2-40B4-BE49-F238E27FC236}">
-                <a16:creationId xmlns:a16="http://schemas.microsoft.com/office/drawing/2014/main" id="{356AD5B8-9335-9A18-1146-12D837B3F829}"/>
-              </a:ext>
-            </a:extLst>
-          </p:cNvPr>
-          <p:cNvPicPr>
-            <a:picLocks noChangeAspect="1" noChangeArrowheads="1"/>
-          </p:cNvPicPr>
-          <p:nvPr/>
-        </p:nvPicPr>
-        <p:blipFill>
-          <a:blip r:embed="rId8">
-            <a:extLst>
-              <a:ext uri="{28A0092B-C50C-407E-A947-70E740481C1C}">
-                <a14:useLocalDpi xmlns:a14="http://schemas.microsoft.com/office/drawing/2010/main" val="0"/>
-              </a:ext>
-            </a:extLst>
-          </a:blip>
-          <a:srcRect/>
-          <a:stretch>
-            <a:fillRect/>
-          </a:stretch>
-        </p:blipFill>
-        <p:spPr bwMode="auto">
-          <a:xfrm>
-            <a:off x="9439275" y="4781551"/>
-            <a:ext cx="2826783" cy="3250800"/>
-          </a:xfrm>
-          <a:prstGeom prst="rect">
-            <a:avLst/>
-          </a:prstGeom>
-          <a:noFill/>
-          <a:extLst>
-            <a:ext uri="{909E8E84-426E-40DD-AFC4-6F175D3DCCD1}">
-              <a14:hiddenFill xmlns:a14="http://schemas.microsoft.com/office/drawing/2010/main">
-                <a:solidFill>
-                  <a:srgbClr val="FFFFFF"/>
-                </a:solidFill>
-              </a14:hiddenFill>
-            </a:ext>
-          </a:extLst>
-        </p:spPr>
-      </p:pic>
-      <p:pic>
-        <p:nvPicPr>
-          <p:cNvPr id="15374" name="Picture 14" descr="稀有咖啡杯 藍皮克敏">
-            <a:extLst>
-              <a:ext uri="{FF2B5EF4-FFF2-40B4-BE49-F238E27FC236}">
-                <a16:creationId xmlns:a16="http://schemas.microsoft.com/office/drawing/2014/main" id="{30AF274E-CD63-4C8A-9DBA-5D7B58936062}"/>
-              </a:ext>
-            </a:extLst>
-          </p:cNvPr>
-          <p:cNvPicPr>
-            <a:picLocks noChangeAspect="1" noChangeArrowheads="1"/>
-          </p:cNvPicPr>
-          <p:nvPr/>
-        </p:nvPicPr>
-        <p:blipFill>
-          <a:blip r:embed="rId9">
-            <a:extLst>
-              <a:ext uri="{28A0092B-C50C-407E-A947-70E740481C1C}">
-                <a14:useLocalDpi xmlns:a14="http://schemas.microsoft.com/office/drawing/2010/main" val="0"/>
-              </a:ext>
-            </a:extLst>
-          </a:blip>
-          <a:srcRect/>
-          <a:stretch>
-            <a:fillRect/>
-          </a:stretch>
-        </p:blipFill>
-        <p:spPr bwMode="auto">
-          <a:xfrm>
-            <a:off x="6727514" y="3005137"/>
-            <a:ext cx="2731765" cy="3250800"/>
-          </a:xfrm>
-          <a:prstGeom prst="rect">
-            <a:avLst/>
-          </a:prstGeom>
-          <a:noFill/>
-          <a:extLst>
-            <a:ext uri="{909E8E84-426E-40DD-AFC4-6F175D3DCCD1}">
-              <a14:hiddenFill xmlns:a14="http://schemas.microsoft.com/office/drawing/2010/main">
-                <a:solidFill>
-                  <a:srgbClr val="FFFFFF"/>
-                </a:solidFill>
-              </a14:hiddenFill>
-            </a:ext>
-          </a:extLst>
-        </p:spPr>
-      </p:pic>
-      <p:pic>
-        <p:nvPicPr>
-          <p:cNvPr id="15376" name="Picture 16" descr="稀有咖啡杯 紫皮克敏">
-            <a:extLst>
-              <a:ext uri="{FF2B5EF4-FFF2-40B4-BE49-F238E27FC236}">
-                <a16:creationId xmlns:a16="http://schemas.microsoft.com/office/drawing/2014/main" id="{B1C1A7F7-72E1-C74F-DD43-C8E07CC8D635}"/>
-              </a:ext>
-            </a:extLst>
-          </p:cNvPr>
-          <p:cNvPicPr>
-            <a:picLocks noChangeAspect="1" noChangeArrowheads="1"/>
-          </p:cNvPicPr>
-          <p:nvPr/>
-        </p:nvPicPr>
-        <p:blipFill>
-          <a:blip r:embed="rId10">
-            <a:extLst>
-              <a:ext uri="{28A0092B-C50C-407E-A947-70E740481C1C}">
-                <a14:useLocalDpi xmlns:a14="http://schemas.microsoft.com/office/drawing/2010/main" val="0"/>
-              </a:ext>
-            </a:extLst>
-          </a:blip>
-          <a:srcRect/>
-          <a:stretch>
-            <a:fillRect/>
-          </a:stretch>
-        </p:blipFill>
-        <p:spPr bwMode="auto">
-          <a:xfrm>
-            <a:off x="5702869" y="4448177"/>
-            <a:ext cx="1993824" cy="3250800"/>
-          </a:xfrm>
-          <a:prstGeom prst="rect">
-            <a:avLst/>
-          </a:prstGeom>
-          <a:noFill/>
-          <a:extLst>
-            <a:ext uri="{909E8E84-426E-40DD-AFC4-6F175D3DCCD1}">
-              <a14:hiddenFill xmlns:a14="http://schemas.microsoft.com/office/drawing/2010/main">
-                <a:solidFill>
-                  <a:srgbClr val="FFFFFF"/>
-                </a:solidFill>
-              </a14:hiddenFill>
-            </a:ext>
-          </a:extLst>
-        </p:spPr>
-      </p:pic>
-      <p:pic>
-        <p:nvPicPr>
-          <p:cNvPr id="15378" name="Picture 18" descr="稀有咖啡杯 岩皮克敏">
-            <a:extLst>
-              <a:ext uri="{FF2B5EF4-FFF2-40B4-BE49-F238E27FC236}">
-                <a16:creationId xmlns:a16="http://schemas.microsoft.com/office/drawing/2014/main" id="{3701317D-2CBC-F76E-41FF-3CF61607CDA7}"/>
-              </a:ext>
-            </a:extLst>
-          </p:cNvPr>
-          <p:cNvPicPr>
-            <a:picLocks noChangeAspect="1" noChangeArrowheads="1"/>
-          </p:cNvPicPr>
-          <p:nvPr/>
-        </p:nvPicPr>
-        <p:blipFill>
-          <a:blip r:embed="rId11">
-            <a:extLst>
-              <a:ext uri="{28A0092B-C50C-407E-A947-70E740481C1C}">
-                <a14:useLocalDpi xmlns:a14="http://schemas.microsoft.com/office/drawing/2010/main" val="0"/>
-              </a:ext>
-            </a:extLst>
-          </a:blip>
-          <a:srcRect/>
-          <a:stretch>
-            <a:fillRect/>
-          </a:stretch>
-        </p:blipFill>
-        <p:spPr bwMode="auto">
-          <a:xfrm>
-            <a:off x="10403456" y="2000250"/>
-            <a:ext cx="2080512" cy="3250800"/>
-          </a:xfrm>
-          <a:prstGeom prst="rect">
-            <a:avLst/>
-          </a:prstGeom>
-          <a:noFill/>
-          <a:extLst>
-            <a:ext uri="{909E8E84-426E-40DD-AFC4-6F175D3DCCD1}">
-              <a14:hiddenFill xmlns:a14="http://schemas.microsoft.com/office/drawing/2010/main">
-                <a:solidFill>
-                  <a:srgbClr val="FFFFFF"/>
-                </a:solidFill>
-              </a14:hiddenFill>
-            </a:ext>
-          </a:extLst>
-        </p:spPr>
-      </p:pic>
-      <p:pic>
-        <p:nvPicPr>
-          <p:cNvPr id="15380" name="Picture 20" descr="稀有咖啡杯 翼皮克敏">
-            <a:extLst>
-              <a:ext uri="{FF2B5EF4-FFF2-40B4-BE49-F238E27FC236}">
-                <a16:creationId xmlns:a16="http://schemas.microsoft.com/office/drawing/2014/main" id="{BCD66833-FC32-9439-E5C5-7BC805FB0CA8}"/>
-              </a:ext>
-            </a:extLst>
-          </p:cNvPr>
-          <p:cNvPicPr>
-            <a:picLocks noChangeAspect="1" noChangeArrowheads="1"/>
-          </p:cNvPicPr>
-          <p:nvPr/>
-        </p:nvPicPr>
-        <p:blipFill>
-          <a:blip r:embed="rId12">
-            <a:extLst>
-              <a:ext uri="{28A0092B-C50C-407E-A947-70E740481C1C}">
-                <a14:useLocalDpi xmlns:a14="http://schemas.microsoft.com/office/drawing/2010/main" val="0"/>
-              </a:ext>
-            </a:extLst>
-          </a:blip>
-          <a:srcRect/>
-          <a:stretch>
-            <a:fillRect/>
-          </a:stretch>
-        </p:blipFill>
-        <p:spPr bwMode="auto">
-          <a:xfrm>
-            <a:off x="6960394" y="954880"/>
-            <a:ext cx="2444211" cy="3250800"/>
-          </a:xfrm>
-          <a:prstGeom prst="rect">
-            <a:avLst/>
-          </a:prstGeom>
-          <a:noFill/>
-          <a:extLst>
-            <a:ext uri="{909E8E84-426E-40DD-AFC4-6F175D3DCCD1}">
-              <a14:hiddenFill xmlns:a14="http://schemas.microsoft.com/office/drawing/2010/main">
-                <a:solidFill>
-                  <a:srgbClr val="FFFFFF"/>
-                </a:solidFill>
-              </a14:hiddenFill>
-            </a:ext>
-          </a:extLst>
-        </p:spPr>
-      </p:pic>
-      <p:pic>
-        <p:nvPicPr>
-          <p:cNvPr id="15382" name="Picture 22" descr="稀有廚師帽 冰皮克敏">
-            <a:extLst>
-              <a:ext uri="{FF2B5EF4-FFF2-40B4-BE49-F238E27FC236}">
-                <a16:creationId xmlns:a16="http://schemas.microsoft.com/office/drawing/2014/main" id="{2AE2A8A4-74C4-D33E-2199-1C0CB4982AC6}"/>
-              </a:ext>
-            </a:extLst>
-          </p:cNvPr>
-          <p:cNvPicPr>
-            <a:picLocks noChangeAspect="1" noChangeArrowheads="1"/>
-          </p:cNvPicPr>
-          <p:nvPr/>
-        </p:nvPicPr>
-        <p:blipFill>
-          <a:blip r:embed="rId13">
-            <a:extLst>
-              <a:ext uri="{28A0092B-C50C-407E-A947-70E740481C1C}">
-                <a14:useLocalDpi xmlns:a14="http://schemas.microsoft.com/office/drawing/2010/main" val="0"/>
-              </a:ext>
-            </a:extLst>
-          </a:blip>
-          <a:srcRect/>
-          <a:stretch>
-            <a:fillRect/>
-          </a:stretch>
-        </p:blipFill>
-        <p:spPr bwMode="auto">
-          <a:xfrm>
-            <a:off x="8968320" y="-123826"/>
-            <a:ext cx="1195361" cy="3250800"/>
-          </a:xfrm>
-          <a:prstGeom prst="rect">
-            <a:avLst/>
-          </a:prstGeom>
-          <a:noFill/>
-          <a:extLst>
-            <a:ext uri="{909E8E84-426E-40DD-AFC4-6F175D3DCCD1}">
-              <a14:hiddenFill xmlns:a14="http://schemas.microsoft.com/office/drawing/2010/main">
-                <a:solidFill>
-                  <a:srgbClr val="FFFFFF"/>
-                </a:solidFill>
-              </a14:hiddenFill>
-            </a:ext>
-          </a:extLst>
-        </p:spPr>
-      </p:pic>
-      <p:pic>
-        <p:nvPicPr>
-          <p:cNvPr id="15384" name="Picture 24" descr="泡菜 冰皮克敏">
-            <a:extLst>
-              <a:ext uri="{FF2B5EF4-FFF2-40B4-BE49-F238E27FC236}">
-                <a16:creationId xmlns:a16="http://schemas.microsoft.com/office/drawing/2014/main" id="{8D67365F-B05E-6E01-5974-4101BC01AFA6}"/>
-              </a:ext>
-            </a:extLst>
-          </p:cNvPr>
-          <p:cNvPicPr>
-            <a:picLocks noChangeAspect="1" noChangeArrowheads="1"/>
-          </p:cNvPicPr>
-          <p:nvPr/>
-        </p:nvPicPr>
-        <p:blipFill>
-          <a:blip r:embed="rId14">
-            <a:extLst>
-              <a:ext uri="{28A0092B-C50C-407E-A947-70E740481C1C}">
-                <a14:useLocalDpi xmlns:a14="http://schemas.microsoft.com/office/drawing/2010/main" val="0"/>
-              </a:ext>
-            </a:extLst>
-          </a:blip>
-          <a:srcRect/>
-          <a:stretch>
-            <a:fillRect/>
-          </a:stretch>
-        </p:blipFill>
-        <p:spPr bwMode="auto">
-          <a:xfrm>
-            <a:off x="10061189" y="250031"/>
-            <a:ext cx="2046262" cy="3250800"/>
+            <a:off x="7700963" y="2771776"/>
+            <a:ext cx="581025" cy="1419225"/>
           </a:xfrm>
           <a:prstGeom prst="rect">
             <a:avLst/>
@@ -4932,7 +4421,7 @@
     </p:spTree>
     <p:extLst>
       <p:ext uri="{BB962C8B-B14F-4D97-AF65-F5344CB8AC3E}">
-        <p14:creationId xmlns:p14="http://schemas.microsoft.com/office/powerpoint/2010/main" val="299760518"/>
+        <p14:creationId xmlns:p14="http://schemas.microsoft.com/office/powerpoint/2010/main" val="2451860752"/>
       </p:ext>
     </p:extLst>
   </p:cSld>
@@ -4950,7 +4439,7 @@
         <p:cNvPr id="1" name="">
           <a:extLst>
             <a:ext uri="{FF2B5EF4-FFF2-40B4-BE49-F238E27FC236}">
-              <a16:creationId xmlns:a16="http://schemas.microsoft.com/office/drawing/2014/main" id="{3B0830E7-4FC7-993F-37EB-9E79AC612DB4}"/>
+              <a16:creationId xmlns:a16="http://schemas.microsoft.com/office/drawing/2014/main" id="{657869DE-8A4A-9C54-31CB-1D74BFD3D4C5}"/>
             </a:ext>
           </a:extLst>
         </p:cNvPr>
@@ -4970,7 +4459,7 @@
           <p:cNvPr id="4" name="矩形 3">
             <a:extLst>
               <a:ext uri="{FF2B5EF4-FFF2-40B4-BE49-F238E27FC236}">
-                <a16:creationId xmlns:a16="http://schemas.microsoft.com/office/drawing/2014/main" id="{D1A1F036-C339-5BD0-8228-6FC2AFA052DD}"/>
+                <a16:creationId xmlns:a16="http://schemas.microsoft.com/office/drawing/2014/main" id="{277D15C1-8A97-CDEC-79F0-0A4C4BA64A09}"/>
               </a:ext>
             </a:extLst>
           </p:cNvPr>
@@ -4979,7 +4468,7 @@
         </p:nvSpPr>
         <p:spPr>
           <a:xfrm>
-            <a:off x="709032" y="374650"/>
+            <a:off x="531591" y="472570"/>
             <a:ext cx="3250800" cy="3251200"/>
           </a:xfrm>
           <a:prstGeom prst="rect">
@@ -5017,20 +4506,67 @@
       </p:sp>
       <p:pic>
         <p:nvPicPr>
+          <p:cNvPr id="7172" name="Picture 4" descr="稀有咖啡杯 紅皮克敏">
+            <a:extLst>
+              <a:ext uri="{FF2B5EF4-FFF2-40B4-BE49-F238E27FC236}">
+                <a16:creationId xmlns:a16="http://schemas.microsoft.com/office/drawing/2014/main" id="{828FC30A-A3E2-8B1E-765C-0D556CA40886}"/>
+              </a:ext>
+            </a:extLst>
+          </p:cNvPr>
+          <p:cNvPicPr>
+            <a:picLocks noChangeAspect="1" noChangeArrowheads="1"/>
+          </p:cNvPicPr>
+          <p:nvPr/>
+        </p:nvPicPr>
+        <p:blipFill>
+          <a:blip r:embed="rId2">
+            <a:extLst>
+              <a:ext uri="{28A0092B-C50C-407E-A947-70E740481C1C}">
+                <a14:useLocalDpi xmlns:a14="http://schemas.microsoft.com/office/drawing/2010/main" val="0"/>
+              </a:ext>
+            </a:extLst>
+          </a:blip>
+          <a:srcRect/>
+          <a:stretch>
+            <a:fillRect/>
+          </a:stretch>
+        </p:blipFill>
+        <p:spPr bwMode="auto">
+          <a:xfrm>
+            <a:off x="1095063" y="472770"/>
+            <a:ext cx="2123856" cy="3250800"/>
+          </a:xfrm>
+          <a:prstGeom prst="rect">
+            <a:avLst/>
+          </a:prstGeom>
+          <a:noFill/>
+          <a:extLst>
+            <a:ext uri="{909E8E84-426E-40DD-AFC4-6F175D3DCCD1}">
+              <a14:hiddenFill xmlns:a14="http://schemas.microsoft.com/office/drawing/2010/main">
+                <a:solidFill>
+                  <a:srgbClr val="FFFFFF"/>
+                </a:solidFill>
+              </a14:hiddenFill>
+            </a:ext>
+          </a:extLst>
+        </p:spPr>
+      </p:pic>
+      <p:pic>
+        <p:nvPicPr>
           <p:cNvPr id="14338" name="Picture 2" descr="稀有廚師帽 藍皮克敏">
             <a:extLst>
               <a:ext uri="{FF2B5EF4-FFF2-40B4-BE49-F238E27FC236}">
-                <a16:creationId xmlns:a16="http://schemas.microsoft.com/office/drawing/2014/main" id="{C4AD32B8-DA68-ACF8-C87A-2A4FAEDE495C}"/>
-              </a:ext>
-            </a:extLst>
-          </p:cNvPr>
-          <p:cNvPicPr>
-            <a:picLocks noChangeAspect="1" noChangeArrowheads="1"/>
-          </p:cNvPicPr>
-          <p:nvPr/>
-        </p:nvPicPr>
-        <p:blipFill>
-          <a:blip r:embed="rId2">
+                <a16:creationId xmlns:a16="http://schemas.microsoft.com/office/drawing/2014/main" id="{60723DE6-AAC4-96B4-48D7-4289FA78B234}"/>
+              </a:ext>
+            </a:extLst>
+          </p:cNvPr>
+          <p:cNvPicPr>
+            <a:picLocks noChangeAspect="1" noChangeArrowheads="1"/>
+          </p:cNvPicPr>
+          <p:nvPr/>
+        </p:nvPicPr>
+        <p:blipFill>
+          <a:blip r:embed="rId3">
             <a:extLst>
               <a:ext uri="{28A0092B-C50C-407E-A947-70E740481C1C}">
                 <a14:useLocalDpi xmlns:a14="http://schemas.microsoft.com/office/drawing/2010/main" val="0"/>
@@ -5067,31 +4603,31 @@
           <p:cNvPr id="15362" name="Picture 2" descr="稀有廚師帽 紫皮克敏">
             <a:extLst>
               <a:ext uri="{FF2B5EF4-FFF2-40B4-BE49-F238E27FC236}">
-                <a16:creationId xmlns:a16="http://schemas.microsoft.com/office/drawing/2014/main" id="{8544A571-B23E-4AEF-627E-0D571D53A811}"/>
-              </a:ext>
-            </a:extLst>
-          </p:cNvPr>
-          <p:cNvPicPr>
-            <a:picLocks noChangeAspect="1" noChangeArrowheads="1"/>
-          </p:cNvPicPr>
-          <p:nvPr/>
-        </p:nvPicPr>
-        <p:blipFill>
-          <a:blip r:embed="rId3">
-            <a:extLst>
-              <a:ext uri="{28A0092B-C50C-407E-A947-70E740481C1C}">
-                <a14:useLocalDpi xmlns:a14="http://schemas.microsoft.com/office/drawing/2010/main" val="0"/>
-              </a:ext>
-            </a:extLst>
-          </a:blip>
-          <a:srcRect/>
-          <a:stretch>
-            <a:fillRect/>
-          </a:stretch>
-        </p:blipFill>
-        <p:spPr bwMode="auto">
-          <a:xfrm>
-            <a:off x="1778087" y="374850"/>
+                <a16:creationId xmlns:a16="http://schemas.microsoft.com/office/drawing/2014/main" id="{A0A60588-309C-3466-616C-2106BADFBF59}"/>
+              </a:ext>
+            </a:extLst>
+          </p:cNvPr>
+          <p:cNvPicPr>
+            <a:picLocks noChangeAspect="1" noChangeArrowheads="1"/>
+          </p:cNvPicPr>
+          <p:nvPr/>
+        </p:nvPicPr>
+        <p:blipFill>
+          <a:blip r:embed="rId4">
+            <a:extLst>
+              <a:ext uri="{28A0092B-C50C-407E-A947-70E740481C1C}">
+                <a14:useLocalDpi xmlns:a14="http://schemas.microsoft.com/office/drawing/2010/main" val="0"/>
+              </a:ext>
+            </a:extLst>
+          </a:blip>
+          <a:srcRect/>
+          <a:stretch>
+            <a:fillRect/>
+          </a:stretch>
+        </p:blipFill>
+        <p:spPr bwMode="auto">
+          <a:xfrm>
+            <a:off x="4845843" y="4369594"/>
             <a:ext cx="1112690" cy="3250800"/>
           </a:xfrm>
           <a:prstGeom prst="rect">
@@ -5114,17 +4650,17 @@
           <p:cNvPr id="15366" name="Picture 6" descr="稀有廚師帽 岩皮克敏">
             <a:extLst>
               <a:ext uri="{FF2B5EF4-FFF2-40B4-BE49-F238E27FC236}">
-                <a16:creationId xmlns:a16="http://schemas.microsoft.com/office/drawing/2014/main" id="{20107129-BC79-8603-535C-E5D2F6393349}"/>
-              </a:ext>
-            </a:extLst>
-          </p:cNvPr>
-          <p:cNvPicPr>
-            <a:picLocks noChangeAspect="1" noChangeArrowheads="1"/>
-          </p:cNvPicPr>
-          <p:nvPr/>
-        </p:nvPicPr>
-        <p:blipFill>
-          <a:blip r:embed="rId4">
+                <a16:creationId xmlns:a16="http://schemas.microsoft.com/office/drawing/2014/main" id="{5406C42A-C7AF-BDFB-C9C6-AA7C64C7A23A}"/>
+              </a:ext>
+            </a:extLst>
+          </p:cNvPr>
+          <p:cNvPicPr>
+            <a:picLocks noChangeAspect="1" noChangeArrowheads="1"/>
+          </p:cNvPicPr>
+          <p:nvPr/>
+        </p:nvPicPr>
+        <p:blipFill>
+          <a:blip r:embed="rId5">
             <a:extLst>
               <a:ext uri="{28A0092B-C50C-407E-A947-70E740481C1C}">
                 <a14:useLocalDpi xmlns:a14="http://schemas.microsoft.com/office/drawing/2010/main" val="0"/>
@@ -5161,17 +4697,17 @@
           <p:cNvPr id="15370" name="Picture 10" descr="稀有廚師帽 翼皮克敏">
             <a:extLst>
               <a:ext uri="{FF2B5EF4-FFF2-40B4-BE49-F238E27FC236}">
-                <a16:creationId xmlns:a16="http://schemas.microsoft.com/office/drawing/2014/main" id="{1E0B2111-71FC-8035-4F6A-5093D6472A5D}"/>
-              </a:ext>
-            </a:extLst>
-          </p:cNvPr>
-          <p:cNvPicPr>
-            <a:picLocks noChangeAspect="1" noChangeArrowheads="1"/>
-          </p:cNvPicPr>
-          <p:nvPr/>
-        </p:nvPicPr>
-        <p:blipFill>
-          <a:blip r:embed="rId5">
+                <a16:creationId xmlns:a16="http://schemas.microsoft.com/office/drawing/2014/main" id="{7CAA784F-3E4F-5413-08BD-02EC32E0F291}"/>
+              </a:ext>
+            </a:extLst>
+          </p:cNvPr>
+          <p:cNvPicPr>
+            <a:picLocks noChangeAspect="1" noChangeArrowheads="1"/>
+          </p:cNvPicPr>
+          <p:nvPr/>
+        </p:nvPicPr>
+        <p:blipFill>
+          <a:blip r:embed="rId6">
             <a:extLst>
               <a:ext uri="{28A0092B-C50C-407E-A947-70E740481C1C}">
                 <a14:useLocalDpi xmlns:a14="http://schemas.microsoft.com/office/drawing/2010/main" val="0"/>
@@ -5208,17 +4744,17 @@
           <p:cNvPr id="13314" name="Picture 2" descr="稀有廚師帽 黃皮克敏">
             <a:extLst>
               <a:ext uri="{FF2B5EF4-FFF2-40B4-BE49-F238E27FC236}">
-                <a16:creationId xmlns:a16="http://schemas.microsoft.com/office/drawing/2014/main" id="{DC651925-4460-2EC7-2B9F-9B7899662325}"/>
-              </a:ext>
-            </a:extLst>
-          </p:cNvPr>
-          <p:cNvPicPr>
-            <a:picLocks noChangeAspect="1" noChangeArrowheads="1"/>
-          </p:cNvPicPr>
-          <p:nvPr/>
-        </p:nvPicPr>
-        <p:blipFill>
-          <a:blip r:embed="rId6">
+                <a16:creationId xmlns:a16="http://schemas.microsoft.com/office/drawing/2014/main" id="{B0BCAB0A-5288-617F-2661-718EB0E87C94}"/>
+              </a:ext>
+            </a:extLst>
+          </p:cNvPr>
+          <p:cNvPicPr>
+            <a:picLocks noChangeAspect="1" noChangeArrowheads="1"/>
+          </p:cNvPicPr>
+          <p:nvPr/>
+        </p:nvPicPr>
+        <p:blipFill>
+          <a:blip r:embed="rId7">
             <a:extLst>
               <a:ext uri="{28A0092B-C50C-407E-A947-70E740481C1C}">
                 <a14:useLocalDpi xmlns:a14="http://schemas.microsoft.com/office/drawing/2010/main" val="0"/>
@@ -5255,17 +4791,17 @@
           <p:cNvPr id="13316" name="Picture 4" descr="稀有咖啡杯 黃皮克敏">
             <a:extLst>
               <a:ext uri="{FF2B5EF4-FFF2-40B4-BE49-F238E27FC236}">
-                <a16:creationId xmlns:a16="http://schemas.microsoft.com/office/drawing/2014/main" id="{4084D874-D997-E488-FF7A-A4B07C938CA4}"/>
-              </a:ext>
-            </a:extLst>
-          </p:cNvPr>
-          <p:cNvPicPr>
-            <a:picLocks noChangeAspect="1" noChangeArrowheads="1"/>
-          </p:cNvPicPr>
-          <p:nvPr/>
-        </p:nvPicPr>
-        <p:blipFill>
-          <a:blip r:embed="rId7">
+                <a16:creationId xmlns:a16="http://schemas.microsoft.com/office/drawing/2014/main" id="{356AD5B8-9335-9A18-1146-12D837B3F829}"/>
+              </a:ext>
+            </a:extLst>
+          </p:cNvPr>
+          <p:cNvPicPr>
+            <a:picLocks noChangeAspect="1" noChangeArrowheads="1"/>
+          </p:cNvPicPr>
+          <p:nvPr/>
+        </p:nvPicPr>
+        <p:blipFill>
+          <a:blip r:embed="rId8">
             <a:extLst>
               <a:ext uri="{28A0092B-C50C-407E-A947-70E740481C1C}">
                 <a14:useLocalDpi xmlns:a14="http://schemas.microsoft.com/office/drawing/2010/main" val="0"/>
@@ -5302,17 +4838,17 @@
           <p:cNvPr id="15374" name="Picture 14" descr="稀有咖啡杯 藍皮克敏">
             <a:extLst>
               <a:ext uri="{FF2B5EF4-FFF2-40B4-BE49-F238E27FC236}">
-                <a16:creationId xmlns:a16="http://schemas.microsoft.com/office/drawing/2014/main" id="{D3C996F9-EB29-1F59-8960-CE60FFE134E9}"/>
-              </a:ext>
-            </a:extLst>
-          </p:cNvPr>
-          <p:cNvPicPr>
-            <a:picLocks noChangeAspect="1" noChangeArrowheads="1"/>
-          </p:cNvPicPr>
-          <p:nvPr/>
-        </p:nvPicPr>
-        <p:blipFill>
-          <a:blip r:embed="rId8">
+                <a16:creationId xmlns:a16="http://schemas.microsoft.com/office/drawing/2014/main" id="{30AF274E-CD63-4C8A-9DBA-5D7B58936062}"/>
+              </a:ext>
+            </a:extLst>
+          </p:cNvPr>
+          <p:cNvPicPr>
+            <a:picLocks noChangeAspect="1" noChangeArrowheads="1"/>
+          </p:cNvPicPr>
+          <p:nvPr/>
+        </p:nvPicPr>
+        <p:blipFill>
+          <a:blip r:embed="rId9">
             <a:extLst>
               <a:ext uri="{28A0092B-C50C-407E-A947-70E740481C1C}">
                 <a14:useLocalDpi xmlns:a14="http://schemas.microsoft.com/office/drawing/2010/main" val="0"/>
@@ -5349,17 +4885,17 @@
           <p:cNvPr id="15376" name="Picture 16" descr="稀有咖啡杯 紫皮克敏">
             <a:extLst>
               <a:ext uri="{FF2B5EF4-FFF2-40B4-BE49-F238E27FC236}">
-                <a16:creationId xmlns:a16="http://schemas.microsoft.com/office/drawing/2014/main" id="{39AFC728-FC10-1EF9-EFC4-20A88502E96D}"/>
-              </a:ext>
-            </a:extLst>
-          </p:cNvPr>
-          <p:cNvPicPr>
-            <a:picLocks noChangeAspect="1" noChangeArrowheads="1"/>
-          </p:cNvPicPr>
-          <p:nvPr/>
-        </p:nvPicPr>
-        <p:blipFill>
-          <a:blip r:embed="rId9">
+                <a16:creationId xmlns:a16="http://schemas.microsoft.com/office/drawing/2014/main" id="{B1C1A7F7-72E1-C74F-DD43-C8E07CC8D635}"/>
+              </a:ext>
+            </a:extLst>
+          </p:cNvPr>
+          <p:cNvPicPr>
+            <a:picLocks noChangeAspect="1" noChangeArrowheads="1"/>
+          </p:cNvPicPr>
+          <p:nvPr/>
+        </p:nvPicPr>
+        <p:blipFill>
+          <a:blip r:embed="rId10">
             <a:extLst>
               <a:ext uri="{28A0092B-C50C-407E-A947-70E740481C1C}">
                 <a14:useLocalDpi xmlns:a14="http://schemas.microsoft.com/office/drawing/2010/main" val="0"/>
@@ -5396,17 +4932,17 @@
           <p:cNvPr id="15378" name="Picture 18" descr="稀有咖啡杯 岩皮克敏">
             <a:extLst>
               <a:ext uri="{FF2B5EF4-FFF2-40B4-BE49-F238E27FC236}">
-                <a16:creationId xmlns:a16="http://schemas.microsoft.com/office/drawing/2014/main" id="{51F4A319-D983-5296-F31C-CA43901E705C}"/>
-              </a:ext>
-            </a:extLst>
-          </p:cNvPr>
-          <p:cNvPicPr>
-            <a:picLocks noChangeAspect="1" noChangeArrowheads="1"/>
-          </p:cNvPicPr>
-          <p:nvPr/>
-        </p:nvPicPr>
-        <p:blipFill>
-          <a:blip r:embed="rId10">
+                <a16:creationId xmlns:a16="http://schemas.microsoft.com/office/drawing/2014/main" id="{3701317D-2CBC-F76E-41FF-3CF61607CDA7}"/>
+              </a:ext>
+            </a:extLst>
+          </p:cNvPr>
+          <p:cNvPicPr>
+            <a:picLocks noChangeAspect="1" noChangeArrowheads="1"/>
+          </p:cNvPicPr>
+          <p:nvPr/>
+        </p:nvPicPr>
+        <p:blipFill>
+          <a:blip r:embed="rId11">
             <a:extLst>
               <a:ext uri="{28A0092B-C50C-407E-A947-70E740481C1C}">
                 <a14:useLocalDpi xmlns:a14="http://schemas.microsoft.com/office/drawing/2010/main" val="0"/>
@@ -5443,17 +4979,17 @@
           <p:cNvPr id="15380" name="Picture 20" descr="稀有咖啡杯 翼皮克敏">
             <a:extLst>
               <a:ext uri="{FF2B5EF4-FFF2-40B4-BE49-F238E27FC236}">
-                <a16:creationId xmlns:a16="http://schemas.microsoft.com/office/drawing/2014/main" id="{B3303B53-7406-9D37-A990-89608F8860D2}"/>
-              </a:ext>
-            </a:extLst>
-          </p:cNvPr>
-          <p:cNvPicPr>
-            <a:picLocks noChangeAspect="1" noChangeArrowheads="1"/>
-          </p:cNvPicPr>
-          <p:nvPr/>
-        </p:nvPicPr>
-        <p:blipFill>
-          <a:blip r:embed="rId11">
+                <a16:creationId xmlns:a16="http://schemas.microsoft.com/office/drawing/2014/main" id="{BCD66833-FC32-9439-E5C5-7BC805FB0CA8}"/>
+              </a:ext>
+            </a:extLst>
+          </p:cNvPr>
+          <p:cNvPicPr>
+            <a:picLocks noChangeAspect="1" noChangeArrowheads="1"/>
+          </p:cNvPicPr>
+          <p:nvPr/>
+        </p:nvPicPr>
+        <p:blipFill>
+          <a:blip r:embed="rId12">
             <a:extLst>
               <a:ext uri="{28A0092B-C50C-407E-A947-70E740481C1C}">
                 <a14:useLocalDpi xmlns:a14="http://schemas.microsoft.com/office/drawing/2010/main" val="0"/>
@@ -5490,17 +5026,17 @@
           <p:cNvPr id="15382" name="Picture 22" descr="稀有廚師帽 冰皮克敏">
             <a:extLst>
               <a:ext uri="{FF2B5EF4-FFF2-40B4-BE49-F238E27FC236}">
-                <a16:creationId xmlns:a16="http://schemas.microsoft.com/office/drawing/2014/main" id="{A4336402-9E36-AC6F-083B-61EB2C7A0EE4}"/>
-              </a:ext>
-            </a:extLst>
-          </p:cNvPr>
-          <p:cNvPicPr>
-            <a:picLocks noChangeAspect="1" noChangeArrowheads="1"/>
-          </p:cNvPicPr>
-          <p:nvPr/>
-        </p:nvPicPr>
-        <p:blipFill>
-          <a:blip r:embed="rId12">
+                <a16:creationId xmlns:a16="http://schemas.microsoft.com/office/drawing/2014/main" id="{2AE2A8A4-74C4-D33E-2199-1C0CB4982AC6}"/>
+              </a:ext>
+            </a:extLst>
+          </p:cNvPr>
+          <p:cNvPicPr>
+            <a:picLocks noChangeAspect="1" noChangeArrowheads="1"/>
+          </p:cNvPicPr>
+          <p:nvPr/>
+        </p:nvPicPr>
+        <p:blipFill>
+          <a:blip r:embed="rId13">
             <a:extLst>
               <a:ext uri="{28A0092B-C50C-407E-A947-70E740481C1C}">
                 <a14:useLocalDpi xmlns:a14="http://schemas.microsoft.com/office/drawing/2010/main" val="0"/>
@@ -5537,17 +5073,17 @@
           <p:cNvPr id="15384" name="Picture 24" descr="泡菜 冰皮克敏">
             <a:extLst>
               <a:ext uri="{FF2B5EF4-FFF2-40B4-BE49-F238E27FC236}">
-                <a16:creationId xmlns:a16="http://schemas.microsoft.com/office/drawing/2014/main" id="{7515BD40-70FB-6668-887E-8667608354B1}"/>
-              </a:ext>
-            </a:extLst>
-          </p:cNvPr>
-          <p:cNvPicPr>
-            <a:picLocks noChangeAspect="1" noChangeArrowheads="1"/>
-          </p:cNvPicPr>
-          <p:nvPr/>
-        </p:nvPicPr>
-        <p:blipFill>
-          <a:blip r:embed="rId13">
+                <a16:creationId xmlns:a16="http://schemas.microsoft.com/office/drawing/2014/main" id="{8D67365F-B05E-6E01-5974-4101BC01AFA6}"/>
+              </a:ext>
+            </a:extLst>
+          </p:cNvPr>
+          <p:cNvPicPr>
+            <a:picLocks noChangeAspect="1" noChangeArrowheads="1"/>
+          </p:cNvPicPr>
+          <p:nvPr/>
+        </p:nvPicPr>
+        <p:blipFill>
+          <a:blip r:embed="rId14">
             <a:extLst>
               <a:ext uri="{28A0092B-C50C-407E-A947-70E740481C1C}">
                 <a14:useLocalDpi xmlns:a14="http://schemas.microsoft.com/office/drawing/2010/main" val="0"/>
@@ -5582,7 +5118,7 @@
     </p:spTree>
     <p:extLst>
       <p:ext uri="{BB962C8B-B14F-4D97-AF65-F5344CB8AC3E}">
-        <p14:creationId xmlns:p14="http://schemas.microsoft.com/office/powerpoint/2010/main" val="2701066417"/>
+        <p14:creationId xmlns:p14="http://schemas.microsoft.com/office/powerpoint/2010/main" val="299760518"/>
       </p:ext>
     </p:extLst>
   </p:cSld>
@@ -5600,7 +5136,7 @@
         <p:cNvPr id="1" name="">
           <a:extLst>
             <a:ext uri="{FF2B5EF4-FFF2-40B4-BE49-F238E27FC236}">
-              <a16:creationId xmlns:a16="http://schemas.microsoft.com/office/drawing/2014/main" id="{9FBB1ACD-140B-400E-464E-8FBF2C15E2F1}"/>
+              <a16:creationId xmlns:a16="http://schemas.microsoft.com/office/drawing/2014/main" id="{3B0830E7-4FC7-993F-37EB-9E79AC612DB4}"/>
             </a:ext>
           </a:extLst>
         </p:cNvPr>
@@ -5620,7 +5156,7 @@
           <p:cNvPr id="4" name="矩形 3">
             <a:extLst>
               <a:ext uri="{FF2B5EF4-FFF2-40B4-BE49-F238E27FC236}">
-                <a16:creationId xmlns:a16="http://schemas.microsoft.com/office/drawing/2014/main" id="{77F3C29C-46C8-597F-A5D3-6D7A6C0F7D12}"/>
+                <a16:creationId xmlns:a16="http://schemas.microsoft.com/office/drawing/2014/main" id="{D1A1F036-C339-5BD0-8228-6FC2AFA052DD}"/>
               </a:ext>
             </a:extLst>
           </p:cNvPr>
@@ -5629,7 +5165,7 @@
         </p:nvSpPr>
         <p:spPr>
           <a:xfrm>
-            <a:off x="400891" y="525263"/>
+            <a:off x="709032" y="374650"/>
             <a:ext cx="3250800" cy="3251200"/>
           </a:xfrm>
           <a:prstGeom prst="rect">
@@ -5670,7 +5206,7 @@
           <p:cNvPr id="14338" name="Picture 2" descr="稀有廚師帽 藍皮克敏">
             <a:extLst>
               <a:ext uri="{FF2B5EF4-FFF2-40B4-BE49-F238E27FC236}">
-                <a16:creationId xmlns:a16="http://schemas.microsoft.com/office/drawing/2014/main" id="{585DB92F-EF87-BF8B-5CD8-DCF488B0B674}"/>
+                <a16:creationId xmlns:a16="http://schemas.microsoft.com/office/drawing/2014/main" id="{C4AD32B8-DA68-ACF8-C87A-2A4FAEDE495C}"/>
               </a:ext>
             </a:extLst>
           </p:cNvPr>
@@ -5714,20 +5250,67 @@
       </p:pic>
       <p:pic>
         <p:nvPicPr>
+          <p:cNvPr id="15362" name="Picture 2" descr="稀有廚師帽 紫皮克敏">
+            <a:extLst>
+              <a:ext uri="{FF2B5EF4-FFF2-40B4-BE49-F238E27FC236}">
+                <a16:creationId xmlns:a16="http://schemas.microsoft.com/office/drawing/2014/main" id="{8544A571-B23E-4AEF-627E-0D571D53A811}"/>
+              </a:ext>
+            </a:extLst>
+          </p:cNvPr>
+          <p:cNvPicPr>
+            <a:picLocks noChangeAspect="1" noChangeArrowheads="1"/>
+          </p:cNvPicPr>
+          <p:nvPr/>
+        </p:nvPicPr>
+        <p:blipFill>
+          <a:blip r:embed="rId3">
+            <a:extLst>
+              <a:ext uri="{28A0092B-C50C-407E-A947-70E740481C1C}">
+                <a14:useLocalDpi xmlns:a14="http://schemas.microsoft.com/office/drawing/2010/main" val="0"/>
+              </a:ext>
+            </a:extLst>
+          </a:blip>
+          <a:srcRect/>
+          <a:stretch>
+            <a:fillRect/>
+          </a:stretch>
+        </p:blipFill>
+        <p:spPr bwMode="auto">
+          <a:xfrm>
+            <a:off x="1778087" y="374850"/>
+            <a:ext cx="1112690" cy="3250800"/>
+          </a:xfrm>
+          <a:prstGeom prst="rect">
+            <a:avLst/>
+          </a:prstGeom>
+          <a:noFill/>
+          <a:extLst>
+            <a:ext uri="{909E8E84-426E-40DD-AFC4-6F175D3DCCD1}">
+              <a14:hiddenFill xmlns:a14="http://schemas.microsoft.com/office/drawing/2010/main">
+                <a:solidFill>
+                  <a:srgbClr val="FFFFFF"/>
+                </a:solidFill>
+              </a14:hiddenFill>
+            </a:ext>
+          </a:extLst>
+        </p:spPr>
+      </p:pic>
+      <p:pic>
+        <p:nvPicPr>
           <p:cNvPr id="15366" name="Picture 6" descr="稀有廚師帽 岩皮克敏">
             <a:extLst>
               <a:ext uri="{FF2B5EF4-FFF2-40B4-BE49-F238E27FC236}">
-                <a16:creationId xmlns:a16="http://schemas.microsoft.com/office/drawing/2014/main" id="{B7845D9D-0DB2-A430-AFD3-EB997E01DEFB}"/>
-              </a:ext>
-            </a:extLst>
-          </p:cNvPr>
-          <p:cNvPicPr>
-            <a:picLocks noChangeAspect="1" noChangeArrowheads="1"/>
-          </p:cNvPicPr>
-          <p:nvPr/>
-        </p:nvPicPr>
-        <p:blipFill>
-          <a:blip r:embed="rId3">
+                <a16:creationId xmlns:a16="http://schemas.microsoft.com/office/drawing/2014/main" id="{20107129-BC79-8603-535C-E5D2F6393349}"/>
+              </a:ext>
+            </a:extLst>
+          </p:cNvPr>
+          <p:cNvPicPr>
+            <a:picLocks noChangeAspect="1" noChangeArrowheads="1"/>
+          </p:cNvPicPr>
+          <p:nvPr/>
+        </p:nvPicPr>
+        <p:blipFill>
+          <a:blip r:embed="rId4">
             <a:extLst>
               <a:ext uri="{28A0092B-C50C-407E-A947-70E740481C1C}">
                 <a14:useLocalDpi xmlns:a14="http://schemas.microsoft.com/office/drawing/2010/main" val="0"/>
@@ -5764,17 +5347,17 @@
           <p:cNvPr id="15370" name="Picture 10" descr="稀有廚師帽 翼皮克敏">
             <a:extLst>
               <a:ext uri="{FF2B5EF4-FFF2-40B4-BE49-F238E27FC236}">
-                <a16:creationId xmlns:a16="http://schemas.microsoft.com/office/drawing/2014/main" id="{5544F812-F6A4-7F12-0B9F-3B65ED95440D}"/>
-              </a:ext>
-            </a:extLst>
-          </p:cNvPr>
-          <p:cNvPicPr>
-            <a:picLocks noChangeAspect="1" noChangeArrowheads="1"/>
-          </p:cNvPicPr>
-          <p:nvPr/>
-        </p:nvPicPr>
-        <p:blipFill>
-          <a:blip r:embed="rId4">
+                <a16:creationId xmlns:a16="http://schemas.microsoft.com/office/drawing/2014/main" id="{1E0B2111-71FC-8035-4F6A-5093D6472A5D}"/>
+              </a:ext>
+            </a:extLst>
+          </p:cNvPr>
+          <p:cNvPicPr>
+            <a:picLocks noChangeAspect="1" noChangeArrowheads="1"/>
+          </p:cNvPicPr>
+          <p:nvPr/>
+        </p:nvPicPr>
+        <p:blipFill>
+          <a:blip r:embed="rId5">
             <a:extLst>
               <a:ext uri="{28A0092B-C50C-407E-A947-70E740481C1C}">
                 <a14:useLocalDpi xmlns:a14="http://schemas.microsoft.com/office/drawing/2010/main" val="0"/>
@@ -5811,17 +5394,17 @@
           <p:cNvPr id="13314" name="Picture 2" descr="稀有廚師帽 黃皮克敏">
             <a:extLst>
               <a:ext uri="{FF2B5EF4-FFF2-40B4-BE49-F238E27FC236}">
-                <a16:creationId xmlns:a16="http://schemas.microsoft.com/office/drawing/2014/main" id="{4A2E6ADB-EF71-0F18-E9CC-A0DE957311E5}"/>
-              </a:ext>
-            </a:extLst>
-          </p:cNvPr>
-          <p:cNvPicPr>
-            <a:picLocks noChangeAspect="1" noChangeArrowheads="1"/>
-          </p:cNvPicPr>
-          <p:nvPr/>
-        </p:nvPicPr>
-        <p:blipFill>
-          <a:blip r:embed="rId5">
+                <a16:creationId xmlns:a16="http://schemas.microsoft.com/office/drawing/2014/main" id="{DC651925-4460-2EC7-2B9F-9B7899662325}"/>
+              </a:ext>
+            </a:extLst>
+          </p:cNvPr>
+          <p:cNvPicPr>
+            <a:picLocks noChangeAspect="1" noChangeArrowheads="1"/>
+          </p:cNvPicPr>
+          <p:nvPr/>
+        </p:nvPicPr>
+        <p:blipFill>
+          <a:blip r:embed="rId6">
             <a:extLst>
               <a:ext uri="{28A0092B-C50C-407E-A947-70E740481C1C}">
                 <a14:useLocalDpi xmlns:a14="http://schemas.microsoft.com/office/drawing/2010/main" val="0"/>
@@ -5858,17 +5441,17 @@
           <p:cNvPr id="13316" name="Picture 4" descr="稀有咖啡杯 黃皮克敏">
             <a:extLst>
               <a:ext uri="{FF2B5EF4-FFF2-40B4-BE49-F238E27FC236}">
-                <a16:creationId xmlns:a16="http://schemas.microsoft.com/office/drawing/2014/main" id="{0E112902-4EB0-61B2-B007-9779679AA735}"/>
-              </a:ext>
-            </a:extLst>
-          </p:cNvPr>
-          <p:cNvPicPr>
-            <a:picLocks noChangeAspect="1" noChangeArrowheads="1"/>
-          </p:cNvPicPr>
-          <p:nvPr/>
-        </p:nvPicPr>
-        <p:blipFill>
-          <a:blip r:embed="rId6">
+                <a16:creationId xmlns:a16="http://schemas.microsoft.com/office/drawing/2014/main" id="{4084D874-D997-E488-FF7A-A4B07C938CA4}"/>
+              </a:ext>
+            </a:extLst>
+          </p:cNvPr>
+          <p:cNvPicPr>
+            <a:picLocks noChangeAspect="1" noChangeArrowheads="1"/>
+          </p:cNvPicPr>
+          <p:nvPr/>
+        </p:nvPicPr>
+        <p:blipFill>
+          <a:blip r:embed="rId7">
             <a:extLst>
               <a:ext uri="{28A0092B-C50C-407E-A947-70E740481C1C}">
                 <a14:useLocalDpi xmlns:a14="http://schemas.microsoft.com/office/drawing/2010/main" val="0"/>
@@ -5905,17 +5488,17 @@
           <p:cNvPr id="15374" name="Picture 14" descr="稀有咖啡杯 藍皮克敏">
             <a:extLst>
               <a:ext uri="{FF2B5EF4-FFF2-40B4-BE49-F238E27FC236}">
-                <a16:creationId xmlns:a16="http://schemas.microsoft.com/office/drawing/2014/main" id="{A92584C7-9ABA-7BD5-1B44-F5933E400C99}"/>
-              </a:ext>
-            </a:extLst>
-          </p:cNvPr>
-          <p:cNvPicPr>
-            <a:picLocks noChangeAspect="1" noChangeArrowheads="1"/>
-          </p:cNvPicPr>
-          <p:nvPr/>
-        </p:nvPicPr>
-        <p:blipFill>
-          <a:blip r:embed="rId7">
+                <a16:creationId xmlns:a16="http://schemas.microsoft.com/office/drawing/2014/main" id="{D3C996F9-EB29-1F59-8960-CE60FFE134E9}"/>
+              </a:ext>
+            </a:extLst>
+          </p:cNvPr>
+          <p:cNvPicPr>
+            <a:picLocks noChangeAspect="1" noChangeArrowheads="1"/>
+          </p:cNvPicPr>
+          <p:nvPr/>
+        </p:nvPicPr>
+        <p:blipFill>
+          <a:blip r:embed="rId8">
             <a:extLst>
               <a:ext uri="{28A0092B-C50C-407E-A947-70E740481C1C}">
                 <a14:useLocalDpi xmlns:a14="http://schemas.microsoft.com/office/drawing/2010/main" val="0"/>
@@ -5952,31 +5535,31 @@
           <p:cNvPr id="15376" name="Picture 16" descr="稀有咖啡杯 紫皮克敏">
             <a:extLst>
               <a:ext uri="{FF2B5EF4-FFF2-40B4-BE49-F238E27FC236}">
-                <a16:creationId xmlns:a16="http://schemas.microsoft.com/office/drawing/2014/main" id="{F44C94FC-F2FD-1ACD-7E7D-E5D27E5CAF9B}"/>
-              </a:ext>
-            </a:extLst>
-          </p:cNvPr>
-          <p:cNvPicPr>
-            <a:picLocks noChangeAspect="1" noChangeArrowheads="1"/>
-          </p:cNvPicPr>
-          <p:nvPr/>
-        </p:nvPicPr>
-        <p:blipFill>
-          <a:blip r:embed="rId8">
-            <a:extLst>
-              <a:ext uri="{28A0092B-C50C-407E-A947-70E740481C1C}">
-                <a14:useLocalDpi xmlns:a14="http://schemas.microsoft.com/office/drawing/2010/main" val="0"/>
-              </a:ext>
-            </a:extLst>
-          </a:blip>
-          <a:srcRect/>
-          <a:stretch>
-            <a:fillRect/>
-          </a:stretch>
-        </p:blipFill>
-        <p:spPr bwMode="auto">
-          <a:xfrm>
-            <a:off x="1029379" y="525463"/>
+                <a16:creationId xmlns:a16="http://schemas.microsoft.com/office/drawing/2014/main" id="{39AFC728-FC10-1EF9-EFC4-20A88502E96D}"/>
+              </a:ext>
+            </a:extLst>
+          </p:cNvPr>
+          <p:cNvPicPr>
+            <a:picLocks noChangeAspect="1" noChangeArrowheads="1"/>
+          </p:cNvPicPr>
+          <p:nvPr/>
+        </p:nvPicPr>
+        <p:blipFill>
+          <a:blip r:embed="rId9">
+            <a:extLst>
+              <a:ext uri="{28A0092B-C50C-407E-A947-70E740481C1C}">
+                <a14:useLocalDpi xmlns:a14="http://schemas.microsoft.com/office/drawing/2010/main" val="0"/>
+              </a:ext>
+            </a:extLst>
+          </a:blip>
+          <a:srcRect/>
+          <a:stretch>
+            <a:fillRect/>
+          </a:stretch>
+        </p:blipFill>
+        <p:spPr bwMode="auto">
+          <a:xfrm>
+            <a:off x="5702869" y="4448177"/>
             <a:ext cx="1993824" cy="3250800"/>
           </a:xfrm>
           <a:prstGeom prst="rect">
@@ -5999,17 +5582,17 @@
           <p:cNvPr id="15378" name="Picture 18" descr="稀有咖啡杯 岩皮克敏">
             <a:extLst>
               <a:ext uri="{FF2B5EF4-FFF2-40B4-BE49-F238E27FC236}">
-                <a16:creationId xmlns:a16="http://schemas.microsoft.com/office/drawing/2014/main" id="{9A0DC4DE-4124-686F-5819-1F82A77666B1}"/>
-              </a:ext>
-            </a:extLst>
-          </p:cNvPr>
-          <p:cNvPicPr>
-            <a:picLocks noChangeAspect="1" noChangeArrowheads="1"/>
-          </p:cNvPicPr>
-          <p:nvPr/>
-        </p:nvPicPr>
-        <p:blipFill>
-          <a:blip r:embed="rId9">
+                <a16:creationId xmlns:a16="http://schemas.microsoft.com/office/drawing/2014/main" id="{51F4A319-D983-5296-F31C-CA43901E705C}"/>
+              </a:ext>
+            </a:extLst>
+          </p:cNvPr>
+          <p:cNvPicPr>
+            <a:picLocks noChangeAspect="1" noChangeArrowheads="1"/>
+          </p:cNvPicPr>
+          <p:nvPr/>
+        </p:nvPicPr>
+        <p:blipFill>
+          <a:blip r:embed="rId10">
             <a:extLst>
               <a:ext uri="{28A0092B-C50C-407E-A947-70E740481C1C}">
                 <a14:useLocalDpi xmlns:a14="http://schemas.microsoft.com/office/drawing/2010/main" val="0"/>
@@ -6046,17 +5629,17 @@
           <p:cNvPr id="15380" name="Picture 20" descr="稀有咖啡杯 翼皮克敏">
             <a:extLst>
               <a:ext uri="{FF2B5EF4-FFF2-40B4-BE49-F238E27FC236}">
-                <a16:creationId xmlns:a16="http://schemas.microsoft.com/office/drawing/2014/main" id="{91CC75D0-C283-B567-335E-2D5C0FCE6885}"/>
-              </a:ext>
-            </a:extLst>
-          </p:cNvPr>
-          <p:cNvPicPr>
-            <a:picLocks noChangeAspect="1" noChangeArrowheads="1"/>
-          </p:cNvPicPr>
-          <p:nvPr/>
-        </p:nvPicPr>
-        <p:blipFill>
-          <a:blip r:embed="rId10">
+                <a16:creationId xmlns:a16="http://schemas.microsoft.com/office/drawing/2014/main" id="{B3303B53-7406-9D37-A990-89608F8860D2}"/>
+              </a:ext>
+            </a:extLst>
+          </p:cNvPr>
+          <p:cNvPicPr>
+            <a:picLocks noChangeAspect="1" noChangeArrowheads="1"/>
+          </p:cNvPicPr>
+          <p:nvPr/>
+        </p:nvPicPr>
+        <p:blipFill>
+          <a:blip r:embed="rId11">
             <a:extLst>
               <a:ext uri="{28A0092B-C50C-407E-A947-70E740481C1C}">
                 <a14:useLocalDpi xmlns:a14="http://schemas.microsoft.com/office/drawing/2010/main" val="0"/>
@@ -6093,17 +5676,17 @@
           <p:cNvPr id="15382" name="Picture 22" descr="稀有廚師帽 冰皮克敏">
             <a:extLst>
               <a:ext uri="{FF2B5EF4-FFF2-40B4-BE49-F238E27FC236}">
-                <a16:creationId xmlns:a16="http://schemas.microsoft.com/office/drawing/2014/main" id="{13517233-0602-D33D-9396-517A873CA58E}"/>
-              </a:ext>
-            </a:extLst>
-          </p:cNvPr>
-          <p:cNvPicPr>
-            <a:picLocks noChangeAspect="1" noChangeArrowheads="1"/>
-          </p:cNvPicPr>
-          <p:nvPr/>
-        </p:nvPicPr>
-        <p:blipFill>
-          <a:blip r:embed="rId11">
+                <a16:creationId xmlns:a16="http://schemas.microsoft.com/office/drawing/2014/main" id="{A4336402-9E36-AC6F-083B-61EB2C7A0EE4}"/>
+              </a:ext>
+            </a:extLst>
+          </p:cNvPr>
+          <p:cNvPicPr>
+            <a:picLocks noChangeAspect="1" noChangeArrowheads="1"/>
+          </p:cNvPicPr>
+          <p:nvPr/>
+        </p:nvPicPr>
+        <p:blipFill>
+          <a:blip r:embed="rId12">
             <a:extLst>
               <a:ext uri="{28A0092B-C50C-407E-A947-70E740481C1C}">
                 <a14:useLocalDpi xmlns:a14="http://schemas.microsoft.com/office/drawing/2010/main" val="0"/>
@@ -6140,17 +5723,17 @@
           <p:cNvPr id="15384" name="Picture 24" descr="泡菜 冰皮克敏">
             <a:extLst>
               <a:ext uri="{FF2B5EF4-FFF2-40B4-BE49-F238E27FC236}">
-                <a16:creationId xmlns:a16="http://schemas.microsoft.com/office/drawing/2014/main" id="{3763A148-E903-96E9-4F4F-3E817203097D}"/>
-              </a:ext>
-            </a:extLst>
-          </p:cNvPr>
-          <p:cNvPicPr>
-            <a:picLocks noChangeAspect="1" noChangeArrowheads="1"/>
-          </p:cNvPicPr>
-          <p:nvPr/>
-        </p:nvPicPr>
-        <p:blipFill>
-          <a:blip r:embed="rId12">
+                <a16:creationId xmlns:a16="http://schemas.microsoft.com/office/drawing/2014/main" id="{7515BD40-70FB-6668-887E-8667608354B1}"/>
+              </a:ext>
+            </a:extLst>
+          </p:cNvPr>
+          <p:cNvPicPr>
+            <a:picLocks noChangeAspect="1" noChangeArrowheads="1"/>
+          </p:cNvPicPr>
+          <p:nvPr/>
+        </p:nvPicPr>
+        <p:blipFill>
+          <a:blip r:embed="rId13">
             <a:extLst>
               <a:ext uri="{28A0092B-C50C-407E-A947-70E740481C1C}">
                 <a14:useLocalDpi xmlns:a14="http://schemas.microsoft.com/office/drawing/2010/main" val="0"/>
@@ -6185,7 +5768,7 @@
     </p:spTree>
     <p:extLst>
       <p:ext uri="{BB962C8B-B14F-4D97-AF65-F5344CB8AC3E}">
-        <p14:creationId xmlns:p14="http://schemas.microsoft.com/office/powerpoint/2010/main" val="2251233920"/>
+        <p14:creationId xmlns:p14="http://schemas.microsoft.com/office/powerpoint/2010/main" val="2701066417"/>
       </p:ext>
     </p:extLst>
   </p:cSld>
@@ -6203,7 +5786,7 @@
         <p:cNvPr id="1" name="">
           <a:extLst>
             <a:ext uri="{FF2B5EF4-FFF2-40B4-BE49-F238E27FC236}">
-              <a16:creationId xmlns:a16="http://schemas.microsoft.com/office/drawing/2014/main" id="{6F44AFBB-5F47-0B37-B869-E408183055C0}"/>
+              <a16:creationId xmlns:a16="http://schemas.microsoft.com/office/drawing/2014/main" id="{9FBB1ACD-140B-400E-464E-8FBF2C15E2F1}"/>
             </a:ext>
           </a:extLst>
         </p:cNvPr>
@@ -6223,7 +5806,7 @@
           <p:cNvPr id="4" name="矩形 3">
             <a:extLst>
               <a:ext uri="{FF2B5EF4-FFF2-40B4-BE49-F238E27FC236}">
-                <a16:creationId xmlns:a16="http://schemas.microsoft.com/office/drawing/2014/main" id="{A4694266-01C9-88B0-D1E3-B4D9F5659FFB}"/>
+                <a16:creationId xmlns:a16="http://schemas.microsoft.com/office/drawing/2014/main" id="{77F3C29C-46C8-597F-A5D3-6D7A6C0F7D12}"/>
               </a:ext>
             </a:extLst>
           </p:cNvPr>
@@ -6232,7 +5815,7 @@
         </p:nvSpPr>
         <p:spPr>
           <a:xfrm>
-            <a:off x="675023" y="729157"/>
+            <a:off x="400891" y="525263"/>
             <a:ext cx="3250800" cy="3251200"/>
           </a:xfrm>
           <a:prstGeom prst="rect">
@@ -6273,7 +5856,7 @@
           <p:cNvPr id="14338" name="Picture 2" descr="稀有廚師帽 藍皮克敏">
             <a:extLst>
               <a:ext uri="{FF2B5EF4-FFF2-40B4-BE49-F238E27FC236}">
-                <a16:creationId xmlns:a16="http://schemas.microsoft.com/office/drawing/2014/main" id="{25FA6046-DB67-C0D2-D57F-FC97F60C907F}"/>
+                <a16:creationId xmlns:a16="http://schemas.microsoft.com/office/drawing/2014/main" id="{585DB92F-EF87-BF8B-5CD8-DCF488B0B674}"/>
               </a:ext>
             </a:extLst>
           </p:cNvPr>
@@ -6320,7 +5903,7 @@
           <p:cNvPr id="15366" name="Picture 6" descr="稀有廚師帽 岩皮克敏">
             <a:extLst>
               <a:ext uri="{FF2B5EF4-FFF2-40B4-BE49-F238E27FC236}">
-                <a16:creationId xmlns:a16="http://schemas.microsoft.com/office/drawing/2014/main" id="{E61D7DFD-60A3-459B-FC6C-095B6B0147AE}"/>
+                <a16:creationId xmlns:a16="http://schemas.microsoft.com/office/drawing/2014/main" id="{B7845D9D-0DB2-A430-AFD3-EB997E01DEFB}"/>
               </a:ext>
             </a:extLst>
           </p:cNvPr>
@@ -6367,7 +5950,7 @@
           <p:cNvPr id="15370" name="Picture 10" descr="稀有廚師帽 翼皮克敏">
             <a:extLst>
               <a:ext uri="{FF2B5EF4-FFF2-40B4-BE49-F238E27FC236}">
-                <a16:creationId xmlns:a16="http://schemas.microsoft.com/office/drawing/2014/main" id="{B9E7D6FC-AD46-BF99-4BD9-B69070D3AB27}"/>
+                <a16:creationId xmlns:a16="http://schemas.microsoft.com/office/drawing/2014/main" id="{5544F812-F6A4-7F12-0B9F-3B65ED95440D}"/>
               </a:ext>
             </a:extLst>
           </p:cNvPr>
@@ -6414,7 +5997,7 @@
           <p:cNvPr id="13314" name="Picture 2" descr="稀有廚師帽 黃皮克敏">
             <a:extLst>
               <a:ext uri="{FF2B5EF4-FFF2-40B4-BE49-F238E27FC236}">
-                <a16:creationId xmlns:a16="http://schemas.microsoft.com/office/drawing/2014/main" id="{EB506BCD-21A8-393F-2B45-6D36FE22BD8A}"/>
+                <a16:creationId xmlns:a16="http://schemas.microsoft.com/office/drawing/2014/main" id="{4A2E6ADB-EF71-0F18-E9CC-A0DE957311E5}"/>
               </a:ext>
             </a:extLst>
           </p:cNvPr>
@@ -6461,7 +6044,7 @@
           <p:cNvPr id="13316" name="Picture 4" descr="稀有咖啡杯 黃皮克敏">
             <a:extLst>
               <a:ext uri="{FF2B5EF4-FFF2-40B4-BE49-F238E27FC236}">
-                <a16:creationId xmlns:a16="http://schemas.microsoft.com/office/drawing/2014/main" id="{A631F5E3-BE42-4ABF-FA57-F05D1BFB7CB4}"/>
+                <a16:creationId xmlns:a16="http://schemas.microsoft.com/office/drawing/2014/main" id="{0E112902-4EB0-61B2-B007-9779679AA735}"/>
               </a:ext>
             </a:extLst>
           </p:cNvPr>
@@ -6508,7 +6091,7 @@
           <p:cNvPr id="15374" name="Picture 14" descr="稀有咖啡杯 藍皮克敏">
             <a:extLst>
               <a:ext uri="{FF2B5EF4-FFF2-40B4-BE49-F238E27FC236}">
-                <a16:creationId xmlns:a16="http://schemas.microsoft.com/office/drawing/2014/main" id="{A2EA86D5-DC08-E910-DD5B-0C133C1D33DB}"/>
+                <a16:creationId xmlns:a16="http://schemas.microsoft.com/office/drawing/2014/main" id="{A92584C7-9ABA-7BD5-1B44-F5933E400C99}"/>
               </a:ext>
             </a:extLst>
           </p:cNvPr>
@@ -6532,7 +6115,7 @@
         </p:blipFill>
         <p:spPr bwMode="auto">
           <a:xfrm>
-            <a:off x="934541" y="729357"/>
+            <a:off x="6727514" y="3005137"/>
             <a:ext cx="2731765" cy="3250800"/>
           </a:xfrm>
           <a:prstGeom prst="rect">
@@ -6552,20 +6135,67 @@
       </p:pic>
       <p:pic>
         <p:nvPicPr>
+          <p:cNvPr id="15376" name="Picture 16" descr="稀有咖啡杯 紫皮克敏">
+            <a:extLst>
+              <a:ext uri="{FF2B5EF4-FFF2-40B4-BE49-F238E27FC236}">
+                <a16:creationId xmlns:a16="http://schemas.microsoft.com/office/drawing/2014/main" id="{F44C94FC-F2FD-1ACD-7E7D-E5D27E5CAF9B}"/>
+              </a:ext>
+            </a:extLst>
+          </p:cNvPr>
+          <p:cNvPicPr>
+            <a:picLocks noChangeAspect="1" noChangeArrowheads="1"/>
+          </p:cNvPicPr>
+          <p:nvPr/>
+        </p:nvPicPr>
+        <p:blipFill>
+          <a:blip r:embed="rId8">
+            <a:extLst>
+              <a:ext uri="{28A0092B-C50C-407E-A947-70E740481C1C}">
+                <a14:useLocalDpi xmlns:a14="http://schemas.microsoft.com/office/drawing/2010/main" val="0"/>
+              </a:ext>
+            </a:extLst>
+          </a:blip>
+          <a:srcRect/>
+          <a:stretch>
+            <a:fillRect/>
+          </a:stretch>
+        </p:blipFill>
+        <p:spPr bwMode="auto">
+          <a:xfrm>
+            <a:off x="1029379" y="525463"/>
+            <a:ext cx="1993824" cy="3250800"/>
+          </a:xfrm>
+          <a:prstGeom prst="rect">
+            <a:avLst/>
+          </a:prstGeom>
+          <a:noFill/>
+          <a:extLst>
+            <a:ext uri="{909E8E84-426E-40DD-AFC4-6F175D3DCCD1}">
+              <a14:hiddenFill xmlns:a14="http://schemas.microsoft.com/office/drawing/2010/main">
+                <a:solidFill>
+                  <a:srgbClr val="FFFFFF"/>
+                </a:solidFill>
+              </a14:hiddenFill>
+            </a:ext>
+          </a:extLst>
+        </p:spPr>
+      </p:pic>
+      <p:pic>
+        <p:nvPicPr>
           <p:cNvPr id="15378" name="Picture 18" descr="稀有咖啡杯 岩皮克敏">
             <a:extLst>
               <a:ext uri="{FF2B5EF4-FFF2-40B4-BE49-F238E27FC236}">
-                <a16:creationId xmlns:a16="http://schemas.microsoft.com/office/drawing/2014/main" id="{5FC00833-5AC2-6E58-BAB6-08C65E14551E}"/>
-              </a:ext>
-            </a:extLst>
-          </p:cNvPr>
-          <p:cNvPicPr>
-            <a:picLocks noChangeAspect="1" noChangeArrowheads="1"/>
-          </p:cNvPicPr>
-          <p:nvPr/>
-        </p:nvPicPr>
-        <p:blipFill>
-          <a:blip r:embed="rId8">
+                <a16:creationId xmlns:a16="http://schemas.microsoft.com/office/drawing/2014/main" id="{9A0DC4DE-4124-686F-5819-1F82A77666B1}"/>
+              </a:ext>
+            </a:extLst>
+          </p:cNvPr>
+          <p:cNvPicPr>
+            <a:picLocks noChangeAspect="1" noChangeArrowheads="1"/>
+          </p:cNvPicPr>
+          <p:nvPr/>
+        </p:nvPicPr>
+        <p:blipFill>
+          <a:blip r:embed="rId9">
             <a:extLst>
               <a:ext uri="{28A0092B-C50C-407E-A947-70E740481C1C}">
                 <a14:useLocalDpi xmlns:a14="http://schemas.microsoft.com/office/drawing/2010/main" val="0"/>
@@ -6602,17 +6232,17 @@
           <p:cNvPr id="15380" name="Picture 20" descr="稀有咖啡杯 翼皮克敏">
             <a:extLst>
               <a:ext uri="{FF2B5EF4-FFF2-40B4-BE49-F238E27FC236}">
-                <a16:creationId xmlns:a16="http://schemas.microsoft.com/office/drawing/2014/main" id="{6F7558A5-4AC9-1040-C135-5A985AA7B906}"/>
-              </a:ext>
-            </a:extLst>
-          </p:cNvPr>
-          <p:cNvPicPr>
-            <a:picLocks noChangeAspect="1" noChangeArrowheads="1"/>
-          </p:cNvPicPr>
-          <p:nvPr/>
-        </p:nvPicPr>
-        <p:blipFill>
-          <a:blip r:embed="rId9">
+                <a16:creationId xmlns:a16="http://schemas.microsoft.com/office/drawing/2014/main" id="{91CC75D0-C283-B567-335E-2D5C0FCE6885}"/>
+              </a:ext>
+            </a:extLst>
+          </p:cNvPr>
+          <p:cNvPicPr>
+            <a:picLocks noChangeAspect="1" noChangeArrowheads="1"/>
+          </p:cNvPicPr>
+          <p:nvPr/>
+        </p:nvPicPr>
+        <p:blipFill>
+          <a:blip r:embed="rId10">
             <a:extLst>
               <a:ext uri="{28A0092B-C50C-407E-A947-70E740481C1C}">
                 <a14:useLocalDpi xmlns:a14="http://schemas.microsoft.com/office/drawing/2010/main" val="0"/>
@@ -6649,17 +6279,17 @@
           <p:cNvPr id="15382" name="Picture 22" descr="稀有廚師帽 冰皮克敏">
             <a:extLst>
               <a:ext uri="{FF2B5EF4-FFF2-40B4-BE49-F238E27FC236}">
-                <a16:creationId xmlns:a16="http://schemas.microsoft.com/office/drawing/2014/main" id="{72C6E630-99B0-1BDF-B4D7-10ECFBB02D75}"/>
-              </a:ext>
-            </a:extLst>
-          </p:cNvPr>
-          <p:cNvPicPr>
-            <a:picLocks noChangeAspect="1" noChangeArrowheads="1"/>
-          </p:cNvPicPr>
-          <p:nvPr/>
-        </p:nvPicPr>
-        <p:blipFill>
-          <a:blip r:embed="rId10">
+                <a16:creationId xmlns:a16="http://schemas.microsoft.com/office/drawing/2014/main" id="{13517233-0602-D33D-9396-517A873CA58E}"/>
+              </a:ext>
+            </a:extLst>
+          </p:cNvPr>
+          <p:cNvPicPr>
+            <a:picLocks noChangeAspect="1" noChangeArrowheads="1"/>
+          </p:cNvPicPr>
+          <p:nvPr/>
+        </p:nvPicPr>
+        <p:blipFill>
+          <a:blip r:embed="rId11">
             <a:extLst>
               <a:ext uri="{28A0092B-C50C-407E-A947-70E740481C1C}">
                 <a14:useLocalDpi xmlns:a14="http://schemas.microsoft.com/office/drawing/2010/main" val="0"/>
@@ -6696,17 +6326,17 @@
           <p:cNvPr id="15384" name="Picture 24" descr="泡菜 冰皮克敏">
             <a:extLst>
               <a:ext uri="{FF2B5EF4-FFF2-40B4-BE49-F238E27FC236}">
-                <a16:creationId xmlns:a16="http://schemas.microsoft.com/office/drawing/2014/main" id="{25F01FFD-24E8-655A-BC57-42BA188D287C}"/>
-              </a:ext>
-            </a:extLst>
-          </p:cNvPr>
-          <p:cNvPicPr>
-            <a:picLocks noChangeAspect="1" noChangeArrowheads="1"/>
-          </p:cNvPicPr>
-          <p:nvPr/>
-        </p:nvPicPr>
-        <p:blipFill>
-          <a:blip r:embed="rId11">
+                <a16:creationId xmlns:a16="http://schemas.microsoft.com/office/drawing/2014/main" id="{3763A148-E903-96E9-4F4F-3E817203097D}"/>
+              </a:ext>
+            </a:extLst>
+          </p:cNvPr>
+          <p:cNvPicPr>
+            <a:picLocks noChangeAspect="1" noChangeArrowheads="1"/>
+          </p:cNvPicPr>
+          <p:nvPr/>
+        </p:nvPicPr>
+        <p:blipFill>
+          <a:blip r:embed="rId12">
             <a:extLst>
               <a:ext uri="{28A0092B-C50C-407E-A947-70E740481C1C}">
                 <a14:useLocalDpi xmlns:a14="http://schemas.microsoft.com/office/drawing/2010/main" val="0"/>
@@ -6741,7 +6371,7 @@
     </p:spTree>
     <p:extLst>
       <p:ext uri="{BB962C8B-B14F-4D97-AF65-F5344CB8AC3E}">
-        <p14:creationId xmlns:p14="http://schemas.microsoft.com/office/powerpoint/2010/main" val="1159637133"/>
+        <p14:creationId xmlns:p14="http://schemas.microsoft.com/office/powerpoint/2010/main" val="2251233920"/>
       </p:ext>
     </p:extLst>
   </p:cSld>
@@ -6759,7 +6389,7 @@
         <p:cNvPr id="1" name="">
           <a:extLst>
             <a:ext uri="{FF2B5EF4-FFF2-40B4-BE49-F238E27FC236}">
-              <a16:creationId xmlns:a16="http://schemas.microsoft.com/office/drawing/2014/main" id="{59EC3710-0994-4CB5-3F24-4EBEA2024E09}"/>
+              <a16:creationId xmlns:a16="http://schemas.microsoft.com/office/drawing/2014/main" id="{6F44AFBB-5F47-0B37-B869-E408183055C0}"/>
             </a:ext>
           </a:extLst>
         </p:cNvPr>
@@ -6779,7 +6409,7 @@
           <p:cNvPr id="4" name="矩形 3">
             <a:extLst>
               <a:ext uri="{FF2B5EF4-FFF2-40B4-BE49-F238E27FC236}">
-                <a16:creationId xmlns:a16="http://schemas.microsoft.com/office/drawing/2014/main" id="{CC485654-6053-95FD-03DA-5B3C2A0950BD}"/>
+                <a16:creationId xmlns:a16="http://schemas.microsoft.com/office/drawing/2014/main" id="{A4694266-01C9-88B0-D1E3-B4D9F5659FFB}"/>
               </a:ext>
             </a:extLst>
           </p:cNvPr>
@@ -6788,7 +6418,7 @@
         </p:nvSpPr>
         <p:spPr>
           <a:xfrm>
-            <a:off x="175954" y="918761"/>
+            <a:off x="675023" y="729157"/>
             <a:ext cx="3250800" cy="3251200"/>
           </a:xfrm>
           <a:prstGeom prst="rect">
@@ -6829,7 +6459,7 @@
           <p:cNvPr id="14338" name="Picture 2" descr="稀有廚師帽 藍皮克敏">
             <a:extLst>
               <a:ext uri="{FF2B5EF4-FFF2-40B4-BE49-F238E27FC236}">
-                <a16:creationId xmlns:a16="http://schemas.microsoft.com/office/drawing/2014/main" id="{B257D901-435F-8E1D-7277-F72B8BF4C322}"/>
+                <a16:creationId xmlns:a16="http://schemas.microsoft.com/office/drawing/2014/main" id="{25FA6046-DB67-C0D2-D57F-FC97F60C907F}"/>
               </a:ext>
             </a:extLst>
           </p:cNvPr>
@@ -6853,7 +6483,7 @@
         </p:blipFill>
         <p:spPr bwMode="auto">
           <a:xfrm>
-            <a:off x="1135922" y="918961"/>
+            <a:off x="5805487" y="2719387"/>
             <a:ext cx="1330864" cy="3250800"/>
           </a:xfrm>
           <a:prstGeom prst="rect">
@@ -6876,7 +6506,7 @@
           <p:cNvPr id="15366" name="Picture 6" descr="稀有廚師帽 岩皮克敏">
             <a:extLst>
               <a:ext uri="{FF2B5EF4-FFF2-40B4-BE49-F238E27FC236}">
-                <a16:creationId xmlns:a16="http://schemas.microsoft.com/office/drawing/2014/main" id="{B1479E3A-4A7C-447C-DACB-383E0CAADC6C}"/>
+                <a16:creationId xmlns:a16="http://schemas.microsoft.com/office/drawing/2014/main" id="{E61D7DFD-60A3-459B-FC6C-095B6B0147AE}"/>
               </a:ext>
             </a:extLst>
           </p:cNvPr>
@@ -6923,7 +6553,7 @@
           <p:cNvPr id="15370" name="Picture 10" descr="稀有廚師帽 翼皮克敏">
             <a:extLst>
               <a:ext uri="{FF2B5EF4-FFF2-40B4-BE49-F238E27FC236}">
-                <a16:creationId xmlns:a16="http://schemas.microsoft.com/office/drawing/2014/main" id="{5B9EF923-5ACD-9EFA-5585-40D573299303}"/>
+                <a16:creationId xmlns:a16="http://schemas.microsoft.com/office/drawing/2014/main" id="{B9E7D6FC-AD46-BF99-4BD9-B69070D3AB27}"/>
               </a:ext>
             </a:extLst>
           </p:cNvPr>
@@ -6970,7 +6600,7 @@
           <p:cNvPr id="13314" name="Picture 2" descr="稀有廚師帽 黃皮克敏">
             <a:extLst>
               <a:ext uri="{FF2B5EF4-FFF2-40B4-BE49-F238E27FC236}">
-                <a16:creationId xmlns:a16="http://schemas.microsoft.com/office/drawing/2014/main" id="{D3B57B02-18C7-DAC5-842F-DD3C864B5FF1}"/>
+                <a16:creationId xmlns:a16="http://schemas.microsoft.com/office/drawing/2014/main" id="{EB506BCD-21A8-393F-2B45-6D36FE22BD8A}"/>
               </a:ext>
             </a:extLst>
           </p:cNvPr>
@@ -7017,7 +6647,7 @@
           <p:cNvPr id="13316" name="Picture 4" descr="稀有咖啡杯 黃皮克敏">
             <a:extLst>
               <a:ext uri="{FF2B5EF4-FFF2-40B4-BE49-F238E27FC236}">
-                <a16:creationId xmlns:a16="http://schemas.microsoft.com/office/drawing/2014/main" id="{952C777C-1951-91CB-B7C0-9386296F144A}"/>
+                <a16:creationId xmlns:a16="http://schemas.microsoft.com/office/drawing/2014/main" id="{A631F5E3-BE42-4ABF-FA57-F05D1BFB7CB4}"/>
               </a:ext>
             </a:extLst>
           </p:cNvPr>
@@ -7061,20 +6691,67 @@
       </p:pic>
       <p:pic>
         <p:nvPicPr>
+          <p:cNvPr id="15374" name="Picture 14" descr="稀有咖啡杯 藍皮克敏">
+            <a:extLst>
+              <a:ext uri="{FF2B5EF4-FFF2-40B4-BE49-F238E27FC236}">
+                <a16:creationId xmlns:a16="http://schemas.microsoft.com/office/drawing/2014/main" id="{A2EA86D5-DC08-E910-DD5B-0C133C1D33DB}"/>
+              </a:ext>
+            </a:extLst>
+          </p:cNvPr>
+          <p:cNvPicPr>
+            <a:picLocks noChangeAspect="1" noChangeArrowheads="1"/>
+          </p:cNvPicPr>
+          <p:nvPr/>
+        </p:nvPicPr>
+        <p:blipFill>
+          <a:blip r:embed="rId7">
+            <a:extLst>
+              <a:ext uri="{28A0092B-C50C-407E-A947-70E740481C1C}">
+                <a14:useLocalDpi xmlns:a14="http://schemas.microsoft.com/office/drawing/2010/main" val="0"/>
+              </a:ext>
+            </a:extLst>
+          </a:blip>
+          <a:srcRect/>
+          <a:stretch>
+            <a:fillRect/>
+          </a:stretch>
+        </p:blipFill>
+        <p:spPr bwMode="auto">
+          <a:xfrm>
+            <a:off x="934541" y="729357"/>
+            <a:ext cx="2731765" cy="3250800"/>
+          </a:xfrm>
+          <a:prstGeom prst="rect">
+            <a:avLst/>
+          </a:prstGeom>
+          <a:noFill/>
+          <a:extLst>
+            <a:ext uri="{909E8E84-426E-40DD-AFC4-6F175D3DCCD1}">
+              <a14:hiddenFill xmlns:a14="http://schemas.microsoft.com/office/drawing/2010/main">
+                <a:solidFill>
+                  <a:srgbClr val="FFFFFF"/>
+                </a:solidFill>
+              </a14:hiddenFill>
+            </a:ext>
+          </a:extLst>
+        </p:spPr>
+      </p:pic>
+      <p:pic>
+        <p:nvPicPr>
           <p:cNvPr id="15378" name="Picture 18" descr="稀有咖啡杯 岩皮克敏">
             <a:extLst>
               <a:ext uri="{FF2B5EF4-FFF2-40B4-BE49-F238E27FC236}">
-                <a16:creationId xmlns:a16="http://schemas.microsoft.com/office/drawing/2014/main" id="{A090E786-521C-35BD-0431-66369F14926F}"/>
-              </a:ext>
-            </a:extLst>
-          </p:cNvPr>
-          <p:cNvPicPr>
-            <a:picLocks noChangeAspect="1" noChangeArrowheads="1"/>
-          </p:cNvPicPr>
-          <p:nvPr/>
-        </p:nvPicPr>
-        <p:blipFill>
-          <a:blip r:embed="rId7">
+                <a16:creationId xmlns:a16="http://schemas.microsoft.com/office/drawing/2014/main" id="{5FC00833-5AC2-6E58-BAB6-08C65E14551E}"/>
+              </a:ext>
+            </a:extLst>
+          </p:cNvPr>
+          <p:cNvPicPr>
+            <a:picLocks noChangeAspect="1" noChangeArrowheads="1"/>
+          </p:cNvPicPr>
+          <p:nvPr/>
+        </p:nvPicPr>
+        <p:blipFill>
+          <a:blip r:embed="rId8">
             <a:extLst>
               <a:ext uri="{28A0092B-C50C-407E-A947-70E740481C1C}">
                 <a14:useLocalDpi xmlns:a14="http://schemas.microsoft.com/office/drawing/2010/main" val="0"/>
@@ -7111,17 +6788,17 @@
           <p:cNvPr id="15380" name="Picture 20" descr="稀有咖啡杯 翼皮克敏">
             <a:extLst>
               <a:ext uri="{FF2B5EF4-FFF2-40B4-BE49-F238E27FC236}">
-                <a16:creationId xmlns:a16="http://schemas.microsoft.com/office/drawing/2014/main" id="{B438C942-C99E-36FB-6FD8-5F22A780A568}"/>
-              </a:ext>
-            </a:extLst>
-          </p:cNvPr>
-          <p:cNvPicPr>
-            <a:picLocks noChangeAspect="1" noChangeArrowheads="1"/>
-          </p:cNvPicPr>
-          <p:nvPr/>
-        </p:nvPicPr>
-        <p:blipFill>
-          <a:blip r:embed="rId8">
+                <a16:creationId xmlns:a16="http://schemas.microsoft.com/office/drawing/2014/main" id="{6F7558A5-4AC9-1040-C135-5A985AA7B906}"/>
+              </a:ext>
+            </a:extLst>
+          </p:cNvPr>
+          <p:cNvPicPr>
+            <a:picLocks noChangeAspect="1" noChangeArrowheads="1"/>
+          </p:cNvPicPr>
+          <p:nvPr/>
+        </p:nvPicPr>
+        <p:blipFill>
+          <a:blip r:embed="rId9">
             <a:extLst>
               <a:ext uri="{28A0092B-C50C-407E-A947-70E740481C1C}">
                 <a14:useLocalDpi xmlns:a14="http://schemas.microsoft.com/office/drawing/2010/main" val="0"/>
@@ -7158,17 +6835,17 @@
           <p:cNvPr id="15382" name="Picture 22" descr="稀有廚師帽 冰皮克敏">
             <a:extLst>
               <a:ext uri="{FF2B5EF4-FFF2-40B4-BE49-F238E27FC236}">
-                <a16:creationId xmlns:a16="http://schemas.microsoft.com/office/drawing/2014/main" id="{71AB7CE8-8447-6308-BC32-D13D8C4843F3}"/>
-              </a:ext>
-            </a:extLst>
-          </p:cNvPr>
-          <p:cNvPicPr>
-            <a:picLocks noChangeAspect="1" noChangeArrowheads="1"/>
-          </p:cNvPicPr>
-          <p:nvPr/>
-        </p:nvPicPr>
-        <p:blipFill>
-          <a:blip r:embed="rId9">
+                <a16:creationId xmlns:a16="http://schemas.microsoft.com/office/drawing/2014/main" id="{72C6E630-99B0-1BDF-B4D7-10ECFBB02D75}"/>
+              </a:ext>
+            </a:extLst>
+          </p:cNvPr>
+          <p:cNvPicPr>
+            <a:picLocks noChangeAspect="1" noChangeArrowheads="1"/>
+          </p:cNvPicPr>
+          <p:nvPr/>
+        </p:nvPicPr>
+        <p:blipFill>
+          <a:blip r:embed="rId10">
             <a:extLst>
               <a:ext uri="{28A0092B-C50C-407E-A947-70E740481C1C}">
                 <a14:useLocalDpi xmlns:a14="http://schemas.microsoft.com/office/drawing/2010/main" val="0"/>
@@ -7205,17 +6882,17 @@
           <p:cNvPr id="15384" name="Picture 24" descr="泡菜 冰皮克敏">
             <a:extLst>
               <a:ext uri="{FF2B5EF4-FFF2-40B4-BE49-F238E27FC236}">
-                <a16:creationId xmlns:a16="http://schemas.microsoft.com/office/drawing/2014/main" id="{47B35071-7D33-B5FF-D6C3-C456ACFFF262}"/>
-              </a:ext>
-            </a:extLst>
-          </p:cNvPr>
-          <p:cNvPicPr>
-            <a:picLocks noChangeAspect="1" noChangeArrowheads="1"/>
-          </p:cNvPicPr>
-          <p:nvPr/>
-        </p:nvPicPr>
-        <p:blipFill>
-          <a:blip r:embed="rId10">
+                <a16:creationId xmlns:a16="http://schemas.microsoft.com/office/drawing/2014/main" id="{25F01FFD-24E8-655A-BC57-42BA188D287C}"/>
+              </a:ext>
+            </a:extLst>
+          </p:cNvPr>
+          <p:cNvPicPr>
+            <a:picLocks noChangeAspect="1" noChangeArrowheads="1"/>
+          </p:cNvPicPr>
+          <p:nvPr/>
+        </p:nvPicPr>
+        <p:blipFill>
+          <a:blip r:embed="rId11">
             <a:extLst>
               <a:ext uri="{28A0092B-C50C-407E-A947-70E740481C1C}">
                 <a14:useLocalDpi xmlns:a14="http://schemas.microsoft.com/office/drawing/2010/main" val="0"/>
@@ -7250,7 +6927,7 @@
     </p:spTree>
     <p:extLst>
       <p:ext uri="{BB962C8B-B14F-4D97-AF65-F5344CB8AC3E}">
-        <p14:creationId xmlns:p14="http://schemas.microsoft.com/office/powerpoint/2010/main" val="884841526"/>
+        <p14:creationId xmlns:p14="http://schemas.microsoft.com/office/powerpoint/2010/main" val="1159637133"/>
       </p:ext>
     </p:extLst>
   </p:cSld>
@@ -7409,7 +7086,7 @@
         <p:cNvPr id="1" name="">
           <a:extLst>
             <a:ext uri="{FF2B5EF4-FFF2-40B4-BE49-F238E27FC236}">
-              <a16:creationId xmlns:a16="http://schemas.microsoft.com/office/drawing/2014/main" id="{8086FB6B-BCC9-36C8-27E5-90CF3E226A52}"/>
+              <a16:creationId xmlns:a16="http://schemas.microsoft.com/office/drawing/2014/main" id="{59EC3710-0994-4CB5-3F24-4EBEA2024E09}"/>
             </a:ext>
           </a:extLst>
         </p:cNvPr>
@@ -7429,7 +7106,7 @@
           <p:cNvPr id="4" name="矩形 3">
             <a:extLst>
               <a:ext uri="{FF2B5EF4-FFF2-40B4-BE49-F238E27FC236}">
-                <a16:creationId xmlns:a16="http://schemas.microsoft.com/office/drawing/2014/main" id="{10CBFA37-6D46-6728-5725-E51A0B398D71}"/>
+                <a16:creationId xmlns:a16="http://schemas.microsoft.com/office/drawing/2014/main" id="{CC485654-6053-95FD-03DA-5B3C2A0950BD}"/>
               </a:ext>
             </a:extLst>
           </p:cNvPr>
@@ -7438,7 +7115,7 @@
         </p:nvSpPr>
         <p:spPr>
           <a:xfrm>
-            <a:off x="680827" y="1029690"/>
+            <a:off x="175954" y="918761"/>
             <a:ext cx="3250800" cy="3251200"/>
           </a:xfrm>
           <a:prstGeom prst="rect">
@@ -7476,20 +7153,67 @@
       </p:sp>
       <p:pic>
         <p:nvPicPr>
+          <p:cNvPr id="14338" name="Picture 2" descr="稀有廚師帽 藍皮克敏">
+            <a:extLst>
+              <a:ext uri="{FF2B5EF4-FFF2-40B4-BE49-F238E27FC236}">
+                <a16:creationId xmlns:a16="http://schemas.microsoft.com/office/drawing/2014/main" id="{B257D901-435F-8E1D-7277-F72B8BF4C322}"/>
+              </a:ext>
+            </a:extLst>
+          </p:cNvPr>
+          <p:cNvPicPr>
+            <a:picLocks noChangeAspect="1" noChangeArrowheads="1"/>
+          </p:cNvPicPr>
+          <p:nvPr/>
+        </p:nvPicPr>
+        <p:blipFill>
+          <a:blip r:embed="rId2">
+            <a:extLst>
+              <a:ext uri="{28A0092B-C50C-407E-A947-70E740481C1C}">
+                <a14:useLocalDpi xmlns:a14="http://schemas.microsoft.com/office/drawing/2010/main" val="0"/>
+              </a:ext>
+            </a:extLst>
+          </a:blip>
+          <a:srcRect/>
+          <a:stretch>
+            <a:fillRect/>
+          </a:stretch>
+        </p:blipFill>
+        <p:spPr bwMode="auto">
+          <a:xfrm>
+            <a:off x="1135922" y="918961"/>
+            <a:ext cx="1330864" cy="3250800"/>
+          </a:xfrm>
+          <a:prstGeom prst="rect">
+            <a:avLst/>
+          </a:prstGeom>
+          <a:noFill/>
+          <a:extLst>
+            <a:ext uri="{909E8E84-426E-40DD-AFC4-6F175D3DCCD1}">
+              <a14:hiddenFill xmlns:a14="http://schemas.microsoft.com/office/drawing/2010/main">
+                <a:solidFill>
+                  <a:srgbClr val="FFFFFF"/>
+                </a:solidFill>
+              </a14:hiddenFill>
+            </a:ext>
+          </a:extLst>
+        </p:spPr>
+      </p:pic>
+      <p:pic>
+        <p:nvPicPr>
           <p:cNvPr id="15366" name="Picture 6" descr="稀有廚師帽 岩皮克敏">
             <a:extLst>
               <a:ext uri="{FF2B5EF4-FFF2-40B4-BE49-F238E27FC236}">
-                <a16:creationId xmlns:a16="http://schemas.microsoft.com/office/drawing/2014/main" id="{278A5075-C8EA-F262-BBC9-85880113964B}"/>
-              </a:ext>
-            </a:extLst>
-          </p:cNvPr>
-          <p:cNvPicPr>
-            <a:picLocks noChangeAspect="1" noChangeArrowheads="1"/>
-          </p:cNvPicPr>
-          <p:nvPr/>
-        </p:nvPicPr>
-        <p:blipFill>
-          <a:blip r:embed="rId2">
+                <a16:creationId xmlns:a16="http://schemas.microsoft.com/office/drawing/2014/main" id="{B1479E3A-4A7C-447C-DACB-383E0CAADC6C}"/>
+              </a:ext>
+            </a:extLst>
+          </p:cNvPr>
+          <p:cNvPicPr>
+            <a:picLocks noChangeAspect="1" noChangeArrowheads="1"/>
+          </p:cNvPicPr>
+          <p:nvPr/>
+        </p:nvPicPr>
+        <p:blipFill>
+          <a:blip r:embed="rId3">
             <a:extLst>
               <a:ext uri="{28A0092B-C50C-407E-A947-70E740481C1C}">
                 <a14:useLocalDpi xmlns:a14="http://schemas.microsoft.com/office/drawing/2010/main" val="0"/>
@@ -7526,31 +7250,31 @@
           <p:cNvPr id="15370" name="Picture 10" descr="稀有廚師帽 翼皮克敏">
             <a:extLst>
               <a:ext uri="{FF2B5EF4-FFF2-40B4-BE49-F238E27FC236}">
-                <a16:creationId xmlns:a16="http://schemas.microsoft.com/office/drawing/2014/main" id="{82DBB675-B2B1-E1D9-7DC2-F27B9A6C6331}"/>
-              </a:ext>
-            </a:extLst>
-          </p:cNvPr>
-          <p:cNvPicPr>
-            <a:picLocks noChangeAspect="1" noChangeArrowheads="1"/>
-          </p:cNvPicPr>
-          <p:nvPr/>
-        </p:nvPicPr>
-        <p:blipFill>
-          <a:blip r:embed="rId3">
-            <a:extLst>
-              <a:ext uri="{28A0092B-C50C-407E-A947-70E740481C1C}">
-                <a14:useLocalDpi xmlns:a14="http://schemas.microsoft.com/office/drawing/2010/main" val="0"/>
-              </a:ext>
-            </a:extLst>
-          </a:blip>
-          <a:srcRect/>
-          <a:stretch>
-            <a:fillRect/>
-          </a:stretch>
-        </p:blipFill>
-        <p:spPr bwMode="auto">
-          <a:xfrm>
-            <a:off x="1625316" y="1029890"/>
+                <a16:creationId xmlns:a16="http://schemas.microsoft.com/office/drawing/2014/main" id="{5B9EF923-5ACD-9EFA-5585-40D573299303}"/>
+              </a:ext>
+            </a:extLst>
+          </p:cNvPr>
+          <p:cNvPicPr>
+            <a:picLocks noChangeAspect="1" noChangeArrowheads="1"/>
+          </p:cNvPicPr>
+          <p:nvPr/>
+        </p:nvPicPr>
+        <p:blipFill>
+          <a:blip r:embed="rId4">
+            <a:extLst>
+              <a:ext uri="{28A0092B-C50C-407E-A947-70E740481C1C}">
+                <a14:useLocalDpi xmlns:a14="http://schemas.microsoft.com/office/drawing/2010/main" val="0"/>
+              </a:ext>
+            </a:extLst>
+          </a:blip>
+          <a:srcRect/>
+          <a:stretch>
+            <a:fillRect/>
+          </a:stretch>
+        </p:blipFill>
+        <p:spPr bwMode="auto">
+          <a:xfrm>
+            <a:off x="5903602" y="812006"/>
             <a:ext cx="1361822" cy="3250800"/>
           </a:xfrm>
           <a:prstGeom prst="rect">
@@ -7573,17 +7297,17 @@
           <p:cNvPr id="13314" name="Picture 2" descr="稀有廚師帽 黃皮克敏">
             <a:extLst>
               <a:ext uri="{FF2B5EF4-FFF2-40B4-BE49-F238E27FC236}">
-                <a16:creationId xmlns:a16="http://schemas.microsoft.com/office/drawing/2014/main" id="{41E9300B-0917-4972-6646-B7DBE5FD5327}"/>
-              </a:ext>
-            </a:extLst>
-          </p:cNvPr>
-          <p:cNvPicPr>
-            <a:picLocks noChangeAspect="1" noChangeArrowheads="1"/>
-          </p:cNvPicPr>
-          <p:nvPr/>
-        </p:nvPicPr>
-        <p:blipFill>
-          <a:blip r:embed="rId4">
+                <a16:creationId xmlns:a16="http://schemas.microsoft.com/office/drawing/2014/main" id="{D3B57B02-18C7-DAC5-842F-DD3C864B5FF1}"/>
+              </a:ext>
+            </a:extLst>
+          </p:cNvPr>
+          <p:cNvPicPr>
+            <a:picLocks noChangeAspect="1" noChangeArrowheads="1"/>
+          </p:cNvPicPr>
+          <p:nvPr/>
+        </p:nvPicPr>
+        <p:blipFill>
+          <a:blip r:embed="rId5">
             <a:extLst>
               <a:ext uri="{28A0092B-C50C-407E-A947-70E740481C1C}">
                 <a14:useLocalDpi xmlns:a14="http://schemas.microsoft.com/office/drawing/2010/main" val="0"/>
@@ -7620,17 +7344,17 @@
           <p:cNvPr id="13316" name="Picture 4" descr="稀有咖啡杯 黃皮克敏">
             <a:extLst>
               <a:ext uri="{FF2B5EF4-FFF2-40B4-BE49-F238E27FC236}">
-                <a16:creationId xmlns:a16="http://schemas.microsoft.com/office/drawing/2014/main" id="{E3F858A0-8AA7-D9D7-4EC5-B5E88797EFBE}"/>
-              </a:ext>
-            </a:extLst>
-          </p:cNvPr>
-          <p:cNvPicPr>
-            <a:picLocks noChangeAspect="1" noChangeArrowheads="1"/>
-          </p:cNvPicPr>
-          <p:nvPr/>
-        </p:nvPicPr>
-        <p:blipFill>
-          <a:blip r:embed="rId5">
+                <a16:creationId xmlns:a16="http://schemas.microsoft.com/office/drawing/2014/main" id="{952C777C-1951-91CB-B7C0-9386296F144A}"/>
+              </a:ext>
+            </a:extLst>
+          </p:cNvPr>
+          <p:cNvPicPr>
+            <a:picLocks noChangeAspect="1" noChangeArrowheads="1"/>
+          </p:cNvPicPr>
+          <p:nvPr/>
+        </p:nvPicPr>
+        <p:blipFill>
+          <a:blip r:embed="rId6">
             <a:extLst>
               <a:ext uri="{28A0092B-C50C-407E-A947-70E740481C1C}">
                 <a14:useLocalDpi xmlns:a14="http://schemas.microsoft.com/office/drawing/2010/main" val="0"/>
@@ -7667,17 +7391,17 @@
           <p:cNvPr id="15378" name="Picture 18" descr="稀有咖啡杯 岩皮克敏">
             <a:extLst>
               <a:ext uri="{FF2B5EF4-FFF2-40B4-BE49-F238E27FC236}">
-                <a16:creationId xmlns:a16="http://schemas.microsoft.com/office/drawing/2014/main" id="{B79E6A80-0CDC-6379-CE7C-DBDB0B8ABB00}"/>
-              </a:ext>
-            </a:extLst>
-          </p:cNvPr>
-          <p:cNvPicPr>
-            <a:picLocks noChangeAspect="1" noChangeArrowheads="1"/>
-          </p:cNvPicPr>
-          <p:nvPr/>
-        </p:nvPicPr>
-        <p:blipFill>
-          <a:blip r:embed="rId6">
+                <a16:creationId xmlns:a16="http://schemas.microsoft.com/office/drawing/2014/main" id="{A090E786-521C-35BD-0431-66369F14926F}"/>
+              </a:ext>
+            </a:extLst>
+          </p:cNvPr>
+          <p:cNvPicPr>
+            <a:picLocks noChangeAspect="1" noChangeArrowheads="1"/>
+          </p:cNvPicPr>
+          <p:nvPr/>
+        </p:nvPicPr>
+        <p:blipFill>
+          <a:blip r:embed="rId7">
             <a:extLst>
               <a:ext uri="{28A0092B-C50C-407E-A947-70E740481C1C}">
                 <a14:useLocalDpi xmlns:a14="http://schemas.microsoft.com/office/drawing/2010/main" val="0"/>
@@ -7714,17 +7438,17 @@
           <p:cNvPr id="15380" name="Picture 20" descr="稀有咖啡杯 翼皮克敏">
             <a:extLst>
               <a:ext uri="{FF2B5EF4-FFF2-40B4-BE49-F238E27FC236}">
-                <a16:creationId xmlns:a16="http://schemas.microsoft.com/office/drawing/2014/main" id="{EF2A188A-DC95-31F7-C13E-944C17AEFCE3}"/>
-              </a:ext>
-            </a:extLst>
-          </p:cNvPr>
-          <p:cNvPicPr>
-            <a:picLocks noChangeAspect="1" noChangeArrowheads="1"/>
-          </p:cNvPicPr>
-          <p:nvPr/>
-        </p:nvPicPr>
-        <p:blipFill>
-          <a:blip r:embed="rId7">
+                <a16:creationId xmlns:a16="http://schemas.microsoft.com/office/drawing/2014/main" id="{B438C942-C99E-36FB-6FD8-5F22A780A568}"/>
+              </a:ext>
+            </a:extLst>
+          </p:cNvPr>
+          <p:cNvPicPr>
+            <a:picLocks noChangeAspect="1" noChangeArrowheads="1"/>
+          </p:cNvPicPr>
+          <p:nvPr/>
+        </p:nvPicPr>
+        <p:blipFill>
+          <a:blip r:embed="rId8">
             <a:extLst>
               <a:ext uri="{28A0092B-C50C-407E-A947-70E740481C1C}">
                 <a14:useLocalDpi xmlns:a14="http://schemas.microsoft.com/office/drawing/2010/main" val="0"/>
@@ -7761,17 +7485,17 @@
           <p:cNvPr id="15382" name="Picture 22" descr="稀有廚師帽 冰皮克敏">
             <a:extLst>
               <a:ext uri="{FF2B5EF4-FFF2-40B4-BE49-F238E27FC236}">
-                <a16:creationId xmlns:a16="http://schemas.microsoft.com/office/drawing/2014/main" id="{90AD14F1-D8E0-9EA9-92CB-4664643BCE61}"/>
-              </a:ext>
-            </a:extLst>
-          </p:cNvPr>
-          <p:cNvPicPr>
-            <a:picLocks noChangeAspect="1" noChangeArrowheads="1"/>
-          </p:cNvPicPr>
-          <p:nvPr/>
-        </p:nvPicPr>
-        <p:blipFill>
-          <a:blip r:embed="rId8">
+                <a16:creationId xmlns:a16="http://schemas.microsoft.com/office/drawing/2014/main" id="{71AB7CE8-8447-6308-BC32-D13D8C4843F3}"/>
+              </a:ext>
+            </a:extLst>
+          </p:cNvPr>
+          <p:cNvPicPr>
+            <a:picLocks noChangeAspect="1" noChangeArrowheads="1"/>
+          </p:cNvPicPr>
+          <p:nvPr/>
+        </p:nvPicPr>
+        <p:blipFill>
+          <a:blip r:embed="rId9">
             <a:extLst>
               <a:ext uri="{28A0092B-C50C-407E-A947-70E740481C1C}">
                 <a14:useLocalDpi xmlns:a14="http://schemas.microsoft.com/office/drawing/2010/main" val="0"/>
@@ -7808,17 +7532,17 @@
           <p:cNvPr id="15384" name="Picture 24" descr="泡菜 冰皮克敏">
             <a:extLst>
               <a:ext uri="{FF2B5EF4-FFF2-40B4-BE49-F238E27FC236}">
-                <a16:creationId xmlns:a16="http://schemas.microsoft.com/office/drawing/2014/main" id="{0E095DE0-858A-5954-20F1-178C9597C8D2}"/>
-              </a:ext>
-            </a:extLst>
-          </p:cNvPr>
-          <p:cNvPicPr>
-            <a:picLocks noChangeAspect="1" noChangeArrowheads="1"/>
-          </p:cNvPicPr>
-          <p:nvPr/>
-        </p:nvPicPr>
-        <p:blipFill>
-          <a:blip r:embed="rId9">
+                <a16:creationId xmlns:a16="http://schemas.microsoft.com/office/drawing/2014/main" id="{47B35071-7D33-B5FF-D6C3-C456ACFFF262}"/>
+              </a:ext>
+            </a:extLst>
+          </p:cNvPr>
+          <p:cNvPicPr>
+            <a:picLocks noChangeAspect="1" noChangeArrowheads="1"/>
+          </p:cNvPicPr>
+          <p:nvPr/>
+        </p:nvPicPr>
+        <p:blipFill>
+          <a:blip r:embed="rId10">
             <a:extLst>
               <a:ext uri="{28A0092B-C50C-407E-A947-70E740481C1C}">
                 <a14:useLocalDpi xmlns:a14="http://schemas.microsoft.com/office/drawing/2010/main" val="0"/>
@@ -7853,7 +7577,7 @@
     </p:spTree>
     <p:extLst>
       <p:ext uri="{BB962C8B-B14F-4D97-AF65-F5344CB8AC3E}">
-        <p14:creationId xmlns:p14="http://schemas.microsoft.com/office/powerpoint/2010/main" val="398206832"/>
+        <p14:creationId xmlns:p14="http://schemas.microsoft.com/office/powerpoint/2010/main" val="884841526"/>
       </p:ext>
     </p:extLst>
   </p:cSld>
@@ -7871,7 +7595,7 @@
         <p:cNvPr id="1" name="">
           <a:extLst>
             <a:ext uri="{FF2B5EF4-FFF2-40B4-BE49-F238E27FC236}">
-              <a16:creationId xmlns:a16="http://schemas.microsoft.com/office/drawing/2014/main" id="{44D21437-5642-6DDC-1E9C-A4C44C5F0705}"/>
+              <a16:creationId xmlns:a16="http://schemas.microsoft.com/office/drawing/2014/main" id="{8086FB6B-BCC9-36C8-27E5-90CF3E226A52}"/>
             </a:ext>
           </a:extLst>
         </p:cNvPr>
@@ -7891,7 +7615,7 @@
           <p:cNvPr id="4" name="矩形 3">
             <a:extLst>
               <a:ext uri="{FF2B5EF4-FFF2-40B4-BE49-F238E27FC236}">
-                <a16:creationId xmlns:a16="http://schemas.microsoft.com/office/drawing/2014/main" id="{2E34E0D7-45A7-C812-A8DB-48B4852C332E}"/>
+                <a16:creationId xmlns:a16="http://schemas.microsoft.com/office/drawing/2014/main" id="{10CBFA37-6D46-6728-5725-E51A0B398D71}"/>
               </a:ext>
             </a:extLst>
           </p:cNvPr>
@@ -7900,7 +7624,7 @@
         </p:nvSpPr>
         <p:spPr>
           <a:xfrm>
-            <a:off x="659014" y="827979"/>
+            <a:off x="680827" y="1029690"/>
             <a:ext cx="3250800" cy="3251200"/>
           </a:xfrm>
           <a:prstGeom prst="rect">
@@ -7941,7 +7665,7 @@
           <p:cNvPr id="15366" name="Picture 6" descr="稀有廚師帽 岩皮克敏">
             <a:extLst>
               <a:ext uri="{FF2B5EF4-FFF2-40B4-BE49-F238E27FC236}">
-                <a16:creationId xmlns:a16="http://schemas.microsoft.com/office/drawing/2014/main" id="{44E32ACB-1F62-A30E-BBAC-811124A13260}"/>
+                <a16:creationId xmlns:a16="http://schemas.microsoft.com/office/drawing/2014/main" id="{278A5075-C8EA-F262-BBC9-85880113964B}"/>
               </a:ext>
             </a:extLst>
           </p:cNvPr>
@@ -7985,20 +7709,67 @@
       </p:pic>
       <p:pic>
         <p:nvPicPr>
+          <p:cNvPr id="15370" name="Picture 10" descr="稀有廚師帽 翼皮克敏">
+            <a:extLst>
+              <a:ext uri="{FF2B5EF4-FFF2-40B4-BE49-F238E27FC236}">
+                <a16:creationId xmlns:a16="http://schemas.microsoft.com/office/drawing/2014/main" id="{82DBB675-B2B1-E1D9-7DC2-F27B9A6C6331}"/>
+              </a:ext>
+            </a:extLst>
+          </p:cNvPr>
+          <p:cNvPicPr>
+            <a:picLocks noChangeAspect="1" noChangeArrowheads="1"/>
+          </p:cNvPicPr>
+          <p:nvPr/>
+        </p:nvPicPr>
+        <p:blipFill>
+          <a:blip r:embed="rId3">
+            <a:extLst>
+              <a:ext uri="{28A0092B-C50C-407E-A947-70E740481C1C}">
+                <a14:useLocalDpi xmlns:a14="http://schemas.microsoft.com/office/drawing/2010/main" val="0"/>
+              </a:ext>
+            </a:extLst>
+          </a:blip>
+          <a:srcRect/>
+          <a:stretch>
+            <a:fillRect/>
+          </a:stretch>
+        </p:blipFill>
+        <p:spPr bwMode="auto">
+          <a:xfrm>
+            <a:off x="1625316" y="1029890"/>
+            <a:ext cx="1361822" cy="3250800"/>
+          </a:xfrm>
+          <a:prstGeom prst="rect">
+            <a:avLst/>
+          </a:prstGeom>
+          <a:noFill/>
+          <a:extLst>
+            <a:ext uri="{909E8E84-426E-40DD-AFC4-6F175D3DCCD1}">
+              <a14:hiddenFill xmlns:a14="http://schemas.microsoft.com/office/drawing/2010/main">
+                <a:solidFill>
+                  <a:srgbClr val="FFFFFF"/>
+                </a:solidFill>
+              </a14:hiddenFill>
+            </a:ext>
+          </a:extLst>
+        </p:spPr>
+      </p:pic>
+      <p:pic>
+        <p:nvPicPr>
           <p:cNvPr id="13314" name="Picture 2" descr="稀有廚師帽 黃皮克敏">
             <a:extLst>
               <a:ext uri="{FF2B5EF4-FFF2-40B4-BE49-F238E27FC236}">
-                <a16:creationId xmlns:a16="http://schemas.microsoft.com/office/drawing/2014/main" id="{E49CFC81-28C6-D93C-977D-2166B61B3F5D}"/>
-              </a:ext>
-            </a:extLst>
-          </p:cNvPr>
-          <p:cNvPicPr>
-            <a:picLocks noChangeAspect="1" noChangeArrowheads="1"/>
-          </p:cNvPicPr>
-          <p:nvPr/>
-        </p:nvPicPr>
-        <p:blipFill>
-          <a:blip r:embed="rId3">
+                <a16:creationId xmlns:a16="http://schemas.microsoft.com/office/drawing/2014/main" id="{41E9300B-0917-4972-6646-B7DBE5FD5327}"/>
+              </a:ext>
+            </a:extLst>
+          </p:cNvPr>
+          <p:cNvPicPr>
+            <a:picLocks noChangeAspect="1" noChangeArrowheads="1"/>
+          </p:cNvPicPr>
+          <p:nvPr/>
+        </p:nvPicPr>
+        <p:blipFill>
+          <a:blip r:embed="rId4">
             <a:extLst>
               <a:ext uri="{28A0092B-C50C-407E-A947-70E740481C1C}">
                 <a14:useLocalDpi xmlns:a14="http://schemas.microsoft.com/office/drawing/2010/main" val="0"/>
@@ -8035,17 +7806,17 @@
           <p:cNvPr id="13316" name="Picture 4" descr="稀有咖啡杯 黃皮克敏">
             <a:extLst>
               <a:ext uri="{FF2B5EF4-FFF2-40B4-BE49-F238E27FC236}">
-                <a16:creationId xmlns:a16="http://schemas.microsoft.com/office/drawing/2014/main" id="{376069AD-0A66-428B-3742-FB446021065C}"/>
-              </a:ext>
-            </a:extLst>
-          </p:cNvPr>
-          <p:cNvPicPr>
-            <a:picLocks noChangeAspect="1" noChangeArrowheads="1"/>
-          </p:cNvPicPr>
-          <p:nvPr/>
-        </p:nvPicPr>
-        <p:blipFill>
-          <a:blip r:embed="rId4">
+                <a16:creationId xmlns:a16="http://schemas.microsoft.com/office/drawing/2014/main" id="{E3F858A0-8AA7-D9D7-4EC5-B5E88797EFBE}"/>
+              </a:ext>
+            </a:extLst>
+          </p:cNvPr>
+          <p:cNvPicPr>
+            <a:picLocks noChangeAspect="1" noChangeArrowheads="1"/>
+          </p:cNvPicPr>
+          <p:nvPr/>
+        </p:nvPicPr>
+        <p:blipFill>
+          <a:blip r:embed="rId5">
             <a:extLst>
               <a:ext uri="{28A0092B-C50C-407E-A947-70E740481C1C}">
                 <a14:useLocalDpi xmlns:a14="http://schemas.microsoft.com/office/drawing/2010/main" val="0"/>
@@ -8082,17 +7853,17 @@
           <p:cNvPr id="15378" name="Picture 18" descr="稀有咖啡杯 岩皮克敏">
             <a:extLst>
               <a:ext uri="{FF2B5EF4-FFF2-40B4-BE49-F238E27FC236}">
-                <a16:creationId xmlns:a16="http://schemas.microsoft.com/office/drawing/2014/main" id="{6BDEE109-527A-F501-FD6D-CEC8986B266D}"/>
-              </a:ext>
-            </a:extLst>
-          </p:cNvPr>
-          <p:cNvPicPr>
-            <a:picLocks noChangeAspect="1" noChangeArrowheads="1"/>
-          </p:cNvPicPr>
-          <p:nvPr/>
-        </p:nvPicPr>
-        <p:blipFill>
-          <a:blip r:embed="rId5">
+                <a16:creationId xmlns:a16="http://schemas.microsoft.com/office/drawing/2014/main" id="{B79E6A80-0CDC-6379-CE7C-DBDB0B8ABB00}"/>
+              </a:ext>
+            </a:extLst>
+          </p:cNvPr>
+          <p:cNvPicPr>
+            <a:picLocks noChangeAspect="1" noChangeArrowheads="1"/>
+          </p:cNvPicPr>
+          <p:nvPr/>
+        </p:nvPicPr>
+        <p:blipFill>
+          <a:blip r:embed="rId6">
             <a:extLst>
               <a:ext uri="{28A0092B-C50C-407E-A947-70E740481C1C}">
                 <a14:useLocalDpi xmlns:a14="http://schemas.microsoft.com/office/drawing/2010/main" val="0"/>
@@ -8129,31 +7900,31 @@
           <p:cNvPr id="15380" name="Picture 20" descr="稀有咖啡杯 翼皮克敏">
             <a:extLst>
               <a:ext uri="{FF2B5EF4-FFF2-40B4-BE49-F238E27FC236}">
-                <a16:creationId xmlns:a16="http://schemas.microsoft.com/office/drawing/2014/main" id="{166882C6-84CD-B750-AD62-20456EBE1698}"/>
-              </a:ext>
-            </a:extLst>
-          </p:cNvPr>
-          <p:cNvPicPr>
-            <a:picLocks noChangeAspect="1" noChangeArrowheads="1"/>
-          </p:cNvPicPr>
-          <p:nvPr/>
-        </p:nvPicPr>
-        <p:blipFill>
-          <a:blip r:embed="rId6">
-            <a:extLst>
-              <a:ext uri="{28A0092B-C50C-407E-A947-70E740481C1C}">
-                <a14:useLocalDpi xmlns:a14="http://schemas.microsoft.com/office/drawing/2010/main" val="0"/>
-              </a:ext>
-            </a:extLst>
-          </a:blip>
-          <a:srcRect/>
-          <a:stretch>
-            <a:fillRect/>
-          </a:stretch>
-        </p:blipFill>
-        <p:spPr bwMode="auto">
-          <a:xfrm>
-            <a:off x="1062309" y="828179"/>
+                <a16:creationId xmlns:a16="http://schemas.microsoft.com/office/drawing/2014/main" id="{EF2A188A-DC95-31F7-C13E-944C17AEFCE3}"/>
+              </a:ext>
+            </a:extLst>
+          </p:cNvPr>
+          <p:cNvPicPr>
+            <a:picLocks noChangeAspect="1" noChangeArrowheads="1"/>
+          </p:cNvPicPr>
+          <p:nvPr/>
+        </p:nvPicPr>
+        <p:blipFill>
+          <a:blip r:embed="rId7">
+            <a:extLst>
+              <a:ext uri="{28A0092B-C50C-407E-A947-70E740481C1C}">
+                <a14:useLocalDpi xmlns:a14="http://schemas.microsoft.com/office/drawing/2010/main" val="0"/>
+              </a:ext>
+            </a:extLst>
+          </a:blip>
+          <a:srcRect/>
+          <a:stretch>
+            <a:fillRect/>
+          </a:stretch>
+        </p:blipFill>
+        <p:spPr bwMode="auto">
+          <a:xfrm>
+            <a:off x="6960394" y="954880"/>
             <a:ext cx="2444211" cy="3250800"/>
           </a:xfrm>
           <a:prstGeom prst="rect">
@@ -8176,17 +7947,17 @@
           <p:cNvPr id="15382" name="Picture 22" descr="稀有廚師帽 冰皮克敏">
             <a:extLst>
               <a:ext uri="{FF2B5EF4-FFF2-40B4-BE49-F238E27FC236}">
-                <a16:creationId xmlns:a16="http://schemas.microsoft.com/office/drawing/2014/main" id="{DE5CECEB-68E5-1174-7E31-FF8C93D9A923}"/>
-              </a:ext>
-            </a:extLst>
-          </p:cNvPr>
-          <p:cNvPicPr>
-            <a:picLocks noChangeAspect="1" noChangeArrowheads="1"/>
-          </p:cNvPicPr>
-          <p:nvPr/>
-        </p:nvPicPr>
-        <p:blipFill>
-          <a:blip r:embed="rId7">
+                <a16:creationId xmlns:a16="http://schemas.microsoft.com/office/drawing/2014/main" id="{90AD14F1-D8E0-9EA9-92CB-4664643BCE61}"/>
+              </a:ext>
+            </a:extLst>
+          </p:cNvPr>
+          <p:cNvPicPr>
+            <a:picLocks noChangeAspect="1" noChangeArrowheads="1"/>
+          </p:cNvPicPr>
+          <p:nvPr/>
+        </p:nvPicPr>
+        <p:blipFill>
+          <a:blip r:embed="rId8">
             <a:extLst>
               <a:ext uri="{28A0092B-C50C-407E-A947-70E740481C1C}">
                 <a14:useLocalDpi xmlns:a14="http://schemas.microsoft.com/office/drawing/2010/main" val="0"/>
@@ -8223,17 +7994,17 @@
           <p:cNvPr id="15384" name="Picture 24" descr="泡菜 冰皮克敏">
             <a:extLst>
               <a:ext uri="{FF2B5EF4-FFF2-40B4-BE49-F238E27FC236}">
-                <a16:creationId xmlns:a16="http://schemas.microsoft.com/office/drawing/2014/main" id="{7C96AC49-B5DF-6363-F4E5-4F3EA19A8494}"/>
-              </a:ext>
-            </a:extLst>
-          </p:cNvPr>
-          <p:cNvPicPr>
-            <a:picLocks noChangeAspect="1" noChangeArrowheads="1"/>
-          </p:cNvPicPr>
-          <p:nvPr/>
-        </p:nvPicPr>
-        <p:blipFill>
-          <a:blip r:embed="rId8">
+                <a16:creationId xmlns:a16="http://schemas.microsoft.com/office/drawing/2014/main" id="{0E095DE0-858A-5954-20F1-178C9597C8D2}"/>
+              </a:ext>
+            </a:extLst>
+          </p:cNvPr>
+          <p:cNvPicPr>
+            <a:picLocks noChangeAspect="1" noChangeArrowheads="1"/>
+          </p:cNvPicPr>
+          <p:nvPr/>
+        </p:nvPicPr>
+        <p:blipFill>
+          <a:blip r:embed="rId9">
             <a:extLst>
               <a:ext uri="{28A0092B-C50C-407E-A947-70E740481C1C}">
                 <a14:useLocalDpi xmlns:a14="http://schemas.microsoft.com/office/drawing/2010/main" val="0"/>
@@ -8268,7 +8039,7 @@
     </p:spTree>
     <p:extLst>
       <p:ext uri="{BB962C8B-B14F-4D97-AF65-F5344CB8AC3E}">
-        <p14:creationId xmlns:p14="http://schemas.microsoft.com/office/powerpoint/2010/main" val="1918075842"/>
+        <p14:creationId xmlns:p14="http://schemas.microsoft.com/office/powerpoint/2010/main" val="398206832"/>
       </p:ext>
     </p:extLst>
   </p:cSld>
@@ -8286,7 +8057,7 @@
         <p:cNvPr id="1" name="">
           <a:extLst>
             <a:ext uri="{FF2B5EF4-FFF2-40B4-BE49-F238E27FC236}">
-              <a16:creationId xmlns:a16="http://schemas.microsoft.com/office/drawing/2014/main" id="{8EF54D09-E463-C961-AD2F-5D9D5639DBD3}"/>
+              <a16:creationId xmlns:a16="http://schemas.microsoft.com/office/drawing/2014/main" id="{44D21437-5642-6DDC-1E9C-A4C44C5F0705}"/>
             </a:ext>
           </a:extLst>
         </p:cNvPr>
@@ -8306,7 +8077,7 @@
           <p:cNvPr id="4" name="矩形 3">
             <a:extLst>
               <a:ext uri="{FF2B5EF4-FFF2-40B4-BE49-F238E27FC236}">
-                <a16:creationId xmlns:a16="http://schemas.microsoft.com/office/drawing/2014/main" id="{DCC51F11-5EB8-74C1-2841-89411CAD0144}"/>
+                <a16:creationId xmlns:a16="http://schemas.microsoft.com/office/drawing/2014/main" id="{2E34E0D7-45A7-C812-A8DB-48B4852C332E}"/>
               </a:ext>
             </a:extLst>
           </p:cNvPr>
@@ -8315,7 +8086,7 @@
         </p:nvSpPr>
         <p:spPr>
           <a:xfrm>
-            <a:off x="659014" y="1028152"/>
+            <a:off x="659014" y="827979"/>
             <a:ext cx="3250800" cy="3251200"/>
           </a:xfrm>
           <a:prstGeom prst="rect">
@@ -8356,7 +8127,7 @@
           <p:cNvPr id="15366" name="Picture 6" descr="稀有廚師帽 岩皮克敏">
             <a:extLst>
               <a:ext uri="{FF2B5EF4-FFF2-40B4-BE49-F238E27FC236}">
-                <a16:creationId xmlns:a16="http://schemas.microsoft.com/office/drawing/2014/main" id="{9A68BD17-C725-4F51-EAEC-84267DD6F3FC}"/>
+                <a16:creationId xmlns:a16="http://schemas.microsoft.com/office/drawing/2014/main" id="{44E32ACB-1F62-A30E-BBAC-811124A13260}"/>
               </a:ext>
             </a:extLst>
           </p:cNvPr>
@@ -8403,7 +8174,7 @@
           <p:cNvPr id="13314" name="Picture 2" descr="稀有廚師帽 黃皮克敏">
             <a:extLst>
               <a:ext uri="{FF2B5EF4-FFF2-40B4-BE49-F238E27FC236}">
-                <a16:creationId xmlns:a16="http://schemas.microsoft.com/office/drawing/2014/main" id="{93E70E8A-C85B-6A08-F5E5-216AA5716BFE}"/>
+                <a16:creationId xmlns:a16="http://schemas.microsoft.com/office/drawing/2014/main" id="{E49CFC81-28C6-D93C-977D-2166B61B3F5D}"/>
               </a:ext>
             </a:extLst>
           </p:cNvPr>
@@ -8427,7 +8198,7 @@
         </p:blipFill>
         <p:spPr bwMode="auto">
           <a:xfrm>
-            <a:off x="1728069" y="1028352"/>
+            <a:off x="8666333" y="4457701"/>
             <a:ext cx="1112690" cy="3250800"/>
           </a:xfrm>
           <a:prstGeom prst="rect">
@@ -8450,7 +8221,7 @@
           <p:cNvPr id="13316" name="Picture 4" descr="稀有咖啡杯 黃皮克敏">
             <a:extLst>
               <a:ext uri="{FF2B5EF4-FFF2-40B4-BE49-F238E27FC236}">
-                <a16:creationId xmlns:a16="http://schemas.microsoft.com/office/drawing/2014/main" id="{1C1065D3-BFE8-666C-172D-AE8CD3B99A54}"/>
+                <a16:creationId xmlns:a16="http://schemas.microsoft.com/office/drawing/2014/main" id="{376069AD-0A66-428B-3742-FB446021065C}"/>
               </a:ext>
             </a:extLst>
           </p:cNvPr>
@@ -8497,7 +8268,7 @@
           <p:cNvPr id="15378" name="Picture 18" descr="稀有咖啡杯 岩皮克敏">
             <a:extLst>
               <a:ext uri="{FF2B5EF4-FFF2-40B4-BE49-F238E27FC236}">
-                <a16:creationId xmlns:a16="http://schemas.microsoft.com/office/drawing/2014/main" id="{A948E067-8A1D-9818-C9C1-F4AFC64ADB01}"/>
+                <a16:creationId xmlns:a16="http://schemas.microsoft.com/office/drawing/2014/main" id="{6BDEE109-527A-F501-FD6D-CEC8986B266D}"/>
               </a:ext>
             </a:extLst>
           </p:cNvPr>
@@ -8541,20 +8312,67 @@
       </p:pic>
       <p:pic>
         <p:nvPicPr>
+          <p:cNvPr id="15380" name="Picture 20" descr="稀有咖啡杯 翼皮克敏">
+            <a:extLst>
+              <a:ext uri="{FF2B5EF4-FFF2-40B4-BE49-F238E27FC236}">
+                <a16:creationId xmlns:a16="http://schemas.microsoft.com/office/drawing/2014/main" id="{166882C6-84CD-B750-AD62-20456EBE1698}"/>
+              </a:ext>
+            </a:extLst>
+          </p:cNvPr>
+          <p:cNvPicPr>
+            <a:picLocks noChangeAspect="1" noChangeArrowheads="1"/>
+          </p:cNvPicPr>
+          <p:nvPr/>
+        </p:nvPicPr>
+        <p:blipFill>
+          <a:blip r:embed="rId6">
+            <a:extLst>
+              <a:ext uri="{28A0092B-C50C-407E-A947-70E740481C1C}">
+                <a14:useLocalDpi xmlns:a14="http://schemas.microsoft.com/office/drawing/2010/main" val="0"/>
+              </a:ext>
+            </a:extLst>
+          </a:blip>
+          <a:srcRect/>
+          <a:stretch>
+            <a:fillRect/>
+          </a:stretch>
+        </p:blipFill>
+        <p:spPr bwMode="auto">
+          <a:xfrm>
+            <a:off x="1062309" y="828179"/>
+            <a:ext cx="2444211" cy="3250800"/>
+          </a:xfrm>
+          <a:prstGeom prst="rect">
+            <a:avLst/>
+          </a:prstGeom>
+          <a:noFill/>
+          <a:extLst>
+            <a:ext uri="{909E8E84-426E-40DD-AFC4-6F175D3DCCD1}">
+              <a14:hiddenFill xmlns:a14="http://schemas.microsoft.com/office/drawing/2010/main">
+                <a:solidFill>
+                  <a:srgbClr val="FFFFFF"/>
+                </a:solidFill>
+              </a14:hiddenFill>
+            </a:ext>
+          </a:extLst>
+        </p:spPr>
+      </p:pic>
+      <p:pic>
+        <p:nvPicPr>
           <p:cNvPr id="15382" name="Picture 22" descr="稀有廚師帽 冰皮克敏">
             <a:extLst>
               <a:ext uri="{FF2B5EF4-FFF2-40B4-BE49-F238E27FC236}">
-                <a16:creationId xmlns:a16="http://schemas.microsoft.com/office/drawing/2014/main" id="{5005FA66-C4B8-58A5-87B5-3583E994C32C}"/>
-              </a:ext>
-            </a:extLst>
-          </p:cNvPr>
-          <p:cNvPicPr>
-            <a:picLocks noChangeAspect="1" noChangeArrowheads="1"/>
-          </p:cNvPicPr>
-          <p:nvPr/>
-        </p:nvPicPr>
-        <p:blipFill>
-          <a:blip r:embed="rId6">
+                <a16:creationId xmlns:a16="http://schemas.microsoft.com/office/drawing/2014/main" id="{DE5CECEB-68E5-1174-7E31-FF8C93D9A923}"/>
+              </a:ext>
+            </a:extLst>
+          </p:cNvPr>
+          <p:cNvPicPr>
+            <a:picLocks noChangeAspect="1" noChangeArrowheads="1"/>
+          </p:cNvPicPr>
+          <p:nvPr/>
+        </p:nvPicPr>
+        <p:blipFill>
+          <a:blip r:embed="rId7">
             <a:extLst>
               <a:ext uri="{28A0092B-C50C-407E-A947-70E740481C1C}">
                 <a14:useLocalDpi xmlns:a14="http://schemas.microsoft.com/office/drawing/2010/main" val="0"/>
@@ -8591,17 +8409,17 @@
           <p:cNvPr id="15384" name="Picture 24" descr="泡菜 冰皮克敏">
             <a:extLst>
               <a:ext uri="{FF2B5EF4-FFF2-40B4-BE49-F238E27FC236}">
-                <a16:creationId xmlns:a16="http://schemas.microsoft.com/office/drawing/2014/main" id="{CD5F05F0-631B-54D0-7472-17A0083FF324}"/>
-              </a:ext>
-            </a:extLst>
-          </p:cNvPr>
-          <p:cNvPicPr>
-            <a:picLocks noChangeAspect="1" noChangeArrowheads="1"/>
-          </p:cNvPicPr>
-          <p:nvPr/>
-        </p:nvPicPr>
-        <p:blipFill>
-          <a:blip r:embed="rId7">
+                <a16:creationId xmlns:a16="http://schemas.microsoft.com/office/drawing/2014/main" id="{7C96AC49-B5DF-6363-F4E5-4F3EA19A8494}"/>
+              </a:ext>
+            </a:extLst>
+          </p:cNvPr>
+          <p:cNvPicPr>
+            <a:picLocks noChangeAspect="1" noChangeArrowheads="1"/>
+          </p:cNvPicPr>
+          <p:nvPr/>
+        </p:nvPicPr>
+        <p:blipFill>
+          <a:blip r:embed="rId8">
             <a:extLst>
               <a:ext uri="{28A0092B-C50C-407E-A947-70E740481C1C}">
                 <a14:useLocalDpi xmlns:a14="http://schemas.microsoft.com/office/drawing/2010/main" val="0"/>
@@ -8636,7 +8454,7 @@
     </p:spTree>
     <p:extLst>
       <p:ext uri="{BB962C8B-B14F-4D97-AF65-F5344CB8AC3E}">
-        <p14:creationId xmlns:p14="http://schemas.microsoft.com/office/powerpoint/2010/main" val="403995554"/>
+        <p14:creationId xmlns:p14="http://schemas.microsoft.com/office/powerpoint/2010/main" val="1918075842"/>
       </p:ext>
     </p:extLst>
   </p:cSld>
@@ -8654,7 +8472,7 @@
         <p:cNvPr id="1" name="">
           <a:extLst>
             <a:ext uri="{FF2B5EF4-FFF2-40B4-BE49-F238E27FC236}">
-              <a16:creationId xmlns:a16="http://schemas.microsoft.com/office/drawing/2014/main" id="{B43F4390-3F4F-BE66-9762-8011B8494C92}"/>
+              <a16:creationId xmlns:a16="http://schemas.microsoft.com/office/drawing/2014/main" id="{8EF54D09-E463-C961-AD2F-5D9D5639DBD3}"/>
             </a:ext>
           </a:extLst>
         </p:cNvPr>
@@ -8674,7 +8492,7 @@
           <p:cNvPr id="4" name="矩形 3">
             <a:extLst>
               <a:ext uri="{FF2B5EF4-FFF2-40B4-BE49-F238E27FC236}">
-                <a16:creationId xmlns:a16="http://schemas.microsoft.com/office/drawing/2014/main" id="{D913A475-1E3B-3BAD-8E79-4C95883D6116}"/>
+                <a16:creationId xmlns:a16="http://schemas.microsoft.com/office/drawing/2014/main" id="{DCC51F11-5EB8-74C1-2841-89411CAD0144}"/>
               </a:ext>
             </a:extLst>
           </p:cNvPr>
@@ -8683,7 +8501,7 @@
         </p:nvSpPr>
         <p:spPr>
           <a:xfrm>
-            <a:off x="659014" y="972467"/>
+            <a:off x="659014" y="1028152"/>
             <a:ext cx="3250800" cy="3251200"/>
           </a:xfrm>
           <a:prstGeom prst="rect">
@@ -8724,7 +8542,7 @@
           <p:cNvPr id="15366" name="Picture 6" descr="稀有廚師帽 岩皮克敏">
             <a:extLst>
               <a:ext uri="{FF2B5EF4-FFF2-40B4-BE49-F238E27FC236}">
-                <a16:creationId xmlns:a16="http://schemas.microsoft.com/office/drawing/2014/main" id="{4FC66F11-8105-D6A3-6FA3-04DB65EFAF1F}"/>
+                <a16:creationId xmlns:a16="http://schemas.microsoft.com/office/drawing/2014/main" id="{9A68BD17-C725-4F51-EAEC-84267DD6F3FC}"/>
               </a:ext>
             </a:extLst>
           </p:cNvPr>
@@ -8768,34 +8586,81 @@
       </p:pic>
       <p:pic>
         <p:nvPicPr>
+          <p:cNvPr id="13314" name="Picture 2" descr="稀有廚師帽 黃皮克敏">
+            <a:extLst>
+              <a:ext uri="{FF2B5EF4-FFF2-40B4-BE49-F238E27FC236}">
+                <a16:creationId xmlns:a16="http://schemas.microsoft.com/office/drawing/2014/main" id="{93E70E8A-C85B-6A08-F5E5-216AA5716BFE}"/>
+              </a:ext>
+            </a:extLst>
+          </p:cNvPr>
+          <p:cNvPicPr>
+            <a:picLocks noChangeAspect="1" noChangeArrowheads="1"/>
+          </p:cNvPicPr>
+          <p:nvPr/>
+        </p:nvPicPr>
+        <p:blipFill>
+          <a:blip r:embed="rId3">
+            <a:extLst>
+              <a:ext uri="{28A0092B-C50C-407E-A947-70E740481C1C}">
+                <a14:useLocalDpi xmlns:a14="http://schemas.microsoft.com/office/drawing/2010/main" val="0"/>
+              </a:ext>
+            </a:extLst>
+          </a:blip>
+          <a:srcRect/>
+          <a:stretch>
+            <a:fillRect/>
+          </a:stretch>
+        </p:blipFill>
+        <p:spPr bwMode="auto">
+          <a:xfrm>
+            <a:off x="1728069" y="1028352"/>
+            <a:ext cx="1112690" cy="3250800"/>
+          </a:xfrm>
+          <a:prstGeom prst="rect">
+            <a:avLst/>
+          </a:prstGeom>
+          <a:noFill/>
+          <a:extLst>
+            <a:ext uri="{909E8E84-426E-40DD-AFC4-6F175D3DCCD1}">
+              <a14:hiddenFill xmlns:a14="http://schemas.microsoft.com/office/drawing/2010/main">
+                <a:solidFill>
+                  <a:srgbClr val="FFFFFF"/>
+                </a:solidFill>
+              </a14:hiddenFill>
+            </a:ext>
+          </a:extLst>
+        </p:spPr>
+      </p:pic>
+      <p:pic>
+        <p:nvPicPr>
           <p:cNvPr id="13316" name="Picture 4" descr="稀有咖啡杯 黃皮克敏">
             <a:extLst>
               <a:ext uri="{FF2B5EF4-FFF2-40B4-BE49-F238E27FC236}">
-                <a16:creationId xmlns:a16="http://schemas.microsoft.com/office/drawing/2014/main" id="{038EF279-F5D3-6BA6-094B-76559829FD7B}"/>
-              </a:ext>
-            </a:extLst>
-          </p:cNvPr>
-          <p:cNvPicPr>
-            <a:picLocks noChangeAspect="1" noChangeArrowheads="1"/>
-          </p:cNvPicPr>
-          <p:nvPr/>
-        </p:nvPicPr>
-        <p:blipFill>
-          <a:blip r:embed="rId3">
-            <a:extLst>
-              <a:ext uri="{28A0092B-C50C-407E-A947-70E740481C1C}">
-                <a14:useLocalDpi xmlns:a14="http://schemas.microsoft.com/office/drawing/2010/main" val="0"/>
-              </a:ext>
-            </a:extLst>
-          </a:blip>
-          <a:srcRect/>
-          <a:stretch>
-            <a:fillRect/>
-          </a:stretch>
-        </p:blipFill>
-        <p:spPr bwMode="auto">
-          <a:xfrm>
-            <a:off x="871023" y="972667"/>
+                <a16:creationId xmlns:a16="http://schemas.microsoft.com/office/drawing/2014/main" id="{1C1065D3-BFE8-666C-172D-AE8CD3B99A54}"/>
+              </a:ext>
+            </a:extLst>
+          </p:cNvPr>
+          <p:cNvPicPr>
+            <a:picLocks noChangeAspect="1" noChangeArrowheads="1"/>
+          </p:cNvPicPr>
+          <p:nvPr/>
+        </p:nvPicPr>
+        <p:blipFill>
+          <a:blip r:embed="rId4">
+            <a:extLst>
+              <a:ext uri="{28A0092B-C50C-407E-A947-70E740481C1C}">
+                <a14:useLocalDpi xmlns:a14="http://schemas.microsoft.com/office/drawing/2010/main" val="0"/>
+              </a:ext>
+            </a:extLst>
+          </a:blip>
+          <a:srcRect/>
+          <a:stretch>
+            <a:fillRect/>
+          </a:stretch>
+        </p:blipFill>
+        <p:spPr bwMode="auto">
+          <a:xfrm>
+            <a:off x="9439275" y="4781551"/>
             <a:ext cx="2826783" cy="3250800"/>
           </a:xfrm>
           <a:prstGeom prst="rect">
@@ -8818,17 +8683,17 @@
           <p:cNvPr id="15378" name="Picture 18" descr="稀有咖啡杯 岩皮克敏">
             <a:extLst>
               <a:ext uri="{FF2B5EF4-FFF2-40B4-BE49-F238E27FC236}">
-                <a16:creationId xmlns:a16="http://schemas.microsoft.com/office/drawing/2014/main" id="{26CC975D-FBE5-8B83-DD06-32020BA42140}"/>
-              </a:ext>
-            </a:extLst>
-          </p:cNvPr>
-          <p:cNvPicPr>
-            <a:picLocks noChangeAspect="1" noChangeArrowheads="1"/>
-          </p:cNvPicPr>
-          <p:nvPr/>
-        </p:nvPicPr>
-        <p:blipFill>
-          <a:blip r:embed="rId4">
+                <a16:creationId xmlns:a16="http://schemas.microsoft.com/office/drawing/2014/main" id="{A948E067-8A1D-9818-C9C1-F4AFC64ADB01}"/>
+              </a:ext>
+            </a:extLst>
+          </p:cNvPr>
+          <p:cNvPicPr>
+            <a:picLocks noChangeAspect="1" noChangeArrowheads="1"/>
+          </p:cNvPicPr>
+          <p:nvPr/>
+        </p:nvPicPr>
+        <p:blipFill>
+          <a:blip r:embed="rId5">
             <a:extLst>
               <a:ext uri="{28A0092B-C50C-407E-A947-70E740481C1C}">
                 <a14:useLocalDpi xmlns:a14="http://schemas.microsoft.com/office/drawing/2010/main" val="0"/>
@@ -8865,17 +8730,17 @@
           <p:cNvPr id="15382" name="Picture 22" descr="稀有廚師帽 冰皮克敏">
             <a:extLst>
               <a:ext uri="{FF2B5EF4-FFF2-40B4-BE49-F238E27FC236}">
-                <a16:creationId xmlns:a16="http://schemas.microsoft.com/office/drawing/2014/main" id="{2920EE25-F694-84CF-703A-A30C155150B6}"/>
-              </a:ext>
-            </a:extLst>
-          </p:cNvPr>
-          <p:cNvPicPr>
-            <a:picLocks noChangeAspect="1" noChangeArrowheads="1"/>
-          </p:cNvPicPr>
-          <p:nvPr/>
-        </p:nvPicPr>
-        <p:blipFill>
-          <a:blip r:embed="rId5">
+                <a16:creationId xmlns:a16="http://schemas.microsoft.com/office/drawing/2014/main" id="{5005FA66-C4B8-58A5-87B5-3583E994C32C}"/>
+              </a:ext>
+            </a:extLst>
+          </p:cNvPr>
+          <p:cNvPicPr>
+            <a:picLocks noChangeAspect="1" noChangeArrowheads="1"/>
+          </p:cNvPicPr>
+          <p:nvPr/>
+        </p:nvPicPr>
+        <p:blipFill>
+          <a:blip r:embed="rId6">
             <a:extLst>
               <a:ext uri="{28A0092B-C50C-407E-A947-70E740481C1C}">
                 <a14:useLocalDpi xmlns:a14="http://schemas.microsoft.com/office/drawing/2010/main" val="0"/>
@@ -8912,17 +8777,17 @@
           <p:cNvPr id="15384" name="Picture 24" descr="泡菜 冰皮克敏">
             <a:extLst>
               <a:ext uri="{FF2B5EF4-FFF2-40B4-BE49-F238E27FC236}">
-                <a16:creationId xmlns:a16="http://schemas.microsoft.com/office/drawing/2014/main" id="{A3748B00-1457-579C-EFFA-B3211CC708E7}"/>
-              </a:ext>
-            </a:extLst>
-          </p:cNvPr>
-          <p:cNvPicPr>
-            <a:picLocks noChangeAspect="1" noChangeArrowheads="1"/>
-          </p:cNvPicPr>
-          <p:nvPr/>
-        </p:nvPicPr>
-        <p:blipFill>
-          <a:blip r:embed="rId6">
+                <a16:creationId xmlns:a16="http://schemas.microsoft.com/office/drawing/2014/main" id="{CD5F05F0-631B-54D0-7472-17A0083FF324}"/>
+              </a:ext>
+            </a:extLst>
+          </p:cNvPr>
+          <p:cNvPicPr>
+            <a:picLocks noChangeAspect="1" noChangeArrowheads="1"/>
+          </p:cNvPicPr>
+          <p:nvPr/>
+        </p:nvPicPr>
+        <p:blipFill>
+          <a:blip r:embed="rId7">
             <a:extLst>
               <a:ext uri="{28A0092B-C50C-407E-A947-70E740481C1C}">
                 <a14:useLocalDpi xmlns:a14="http://schemas.microsoft.com/office/drawing/2010/main" val="0"/>
@@ -8957,7 +8822,7 @@
     </p:spTree>
     <p:extLst>
       <p:ext uri="{BB962C8B-B14F-4D97-AF65-F5344CB8AC3E}">
-        <p14:creationId xmlns:p14="http://schemas.microsoft.com/office/powerpoint/2010/main" val="3438017008"/>
+        <p14:creationId xmlns:p14="http://schemas.microsoft.com/office/powerpoint/2010/main" val="403995554"/>
       </p:ext>
     </p:extLst>
   </p:cSld>
@@ -8975,7 +8840,7 @@
         <p:cNvPr id="1" name="">
           <a:extLst>
             <a:ext uri="{FF2B5EF4-FFF2-40B4-BE49-F238E27FC236}">
-              <a16:creationId xmlns:a16="http://schemas.microsoft.com/office/drawing/2014/main" id="{C01FFD3B-20C9-45FF-4B80-21889EF94584}"/>
+              <a16:creationId xmlns:a16="http://schemas.microsoft.com/office/drawing/2014/main" id="{B43F4390-3F4F-BE66-9762-8011B8494C92}"/>
             </a:ext>
           </a:extLst>
         </p:cNvPr>
@@ -8995,7 +8860,7 @@
           <p:cNvPr id="4" name="矩形 3">
             <a:extLst>
               <a:ext uri="{FF2B5EF4-FFF2-40B4-BE49-F238E27FC236}">
-                <a16:creationId xmlns:a16="http://schemas.microsoft.com/office/drawing/2014/main" id="{5118D18B-0C2E-5C05-45D8-C0E98B866912}"/>
+                <a16:creationId xmlns:a16="http://schemas.microsoft.com/office/drawing/2014/main" id="{D913A475-1E3B-3BAD-8E79-4C95883D6116}"/>
               </a:ext>
             </a:extLst>
           </p:cNvPr>
@@ -9004,7 +8869,7 @@
         </p:nvSpPr>
         <p:spPr>
           <a:xfrm>
-            <a:off x="659014" y="1191241"/>
+            <a:off x="659014" y="972467"/>
             <a:ext cx="3250800" cy="3251200"/>
           </a:xfrm>
           <a:prstGeom prst="rect">
@@ -9045,7 +8910,7 @@
           <p:cNvPr id="15366" name="Picture 6" descr="稀有廚師帽 岩皮克敏">
             <a:extLst>
               <a:ext uri="{FF2B5EF4-FFF2-40B4-BE49-F238E27FC236}">
-                <a16:creationId xmlns:a16="http://schemas.microsoft.com/office/drawing/2014/main" id="{0ED0D43F-028D-CBD0-75F9-E43AE122B916}"/>
+                <a16:creationId xmlns:a16="http://schemas.microsoft.com/office/drawing/2014/main" id="{4FC66F11-8105-D6A3-6FA3-04DB65EFAF1F}"/>
               </a:ext>
             </a:extLst>
           </p:cNvPr>
@@ -9069,7 +8934,7 @@
         </p:blipFill>
         <p:spPr bwMode="auto">
           <a:xfrm>
-            <a:off x="1439206" y="1191441"/>
+            <a:off x="9439275" y="2032883"/>
             <a:ext cx="1690416" cy="3250800"/>
           </a:xfrm>
           <a:prstGeom prst="rect">
@@ -9089,20 +8954,67 @@
       </p:pic>
       <p:pic>
         <p:nvPicPr>
+          <p:cNvPr id="13316" name="Picture 4" descr="稀有咖啡杯 黃皮克敏">
+            <a:extLst>
+              <a:ext uri="{FF2B5EF4-FFF2-40B4-BE49-F238E27FC236}">
+                <a16:creationId xmlns:a16="http://schemas.microsoft.com/office/drawing/2014/main" id="{038EF279-F5D3-6BA6-094B-76559829FD7B}"/>
+              </a:ext>
+            </a:extLst>
+          </p:cNvPr>
+          <p:cNvPicPr>
+            <a:picLocks noChangeAspect="1" noChangeArrowheads="1"/>
+          </p:cNvPicPr>
+          <p:nvPr/>
+        </p:nvPicPr>
+        <p:blipFill>
+          <a:blip r:embed="rId3">
+            <a:extLst>
+              <a:ext uri="{28A0092B-C50C-407E-A947-70E740481C1C}">
+                <a14:useLocalDpi xmlns:a14="http://schemas.microsoft.com/office/drawing/2010/main" val="0"/>
+              </a:ext>
+            </a:extLst>
+          </a:blip>
+          <a:srcRect/>
+          <a:stretch>
+            <a:fillRect/>
+          </a:stretch>
+        </p:blipFill>
+        <p:spPr bwMode="auto">
+          <a:xfrm>
+            <a:off x="871023" y="972667"/>
+            <a:ext cx="2826783" cy="3250800"/>
+          </a:xfrm>
+          <a:prstGeom prst="rect">
+            <a:avLst/>
+          </a:prstGeom>
+          <a:noFill/>
+          <a:extLst>
+            <a:ext uri="{909E8E84-426E-40DD-AFC4-6F175D3DCCD1}">
+              <a14:hiddenFill xmlns:a14="http://schemas.microsoft.com/office/drawing/2010/main">
+                <a:solidFill>
+                  <a:srgbClr val="FFFFFF"/>
+                </a:solidFill>
+              </a14:hiddenFill>
+            </a:ext>
+          </a:extLst>
+        </p:spPr>
+      </p:pic>
+      <p:pic>
+        <p:nvPicPr>
           <p:cNvPr id="15378" name="Picture 18" descr="稀有咖啡杯 岩皮克敏">
             <a:extLst>
               <a:ext uri="{FF2B5EF4-FFF2-40B4-BE49-F238E27FC236}">
-                <a16:creationId xmlns:a16="http://schemas.microsoft.com/office/drawing/2014/main" id="{58049A15-9705-0864-2645-22B2E3746131}"/>
-              </a:ext>
-            </a:extLst>
-          </p:cNvPr>
-          <p:cNvPicPr>
-            <a:picLocks noChangeAspect="1" noChangeArrowheads="1"/>
-          </p:cNvPicPr>
-          <p:nvPr/>
-        </p:nvPicPr>
-        <p:blipFill>
-          <a:blip r:embed="rId3">
+                <a16:creationId xmlns:a16="http://schemas.microsoft.com/office/drawing/2014/main" id="{26CC975D-FBE5-8B83-DD06-32020BA42140}"/>
+              </a:ext>
+            </a:extLst>
+          </p:cNvPr>
+          <p:cNvPicPr>
+            <a:picLocks noChangeAspect="1" noChangeArrowheads="1"/>
+          </p:cNvPicPr>
+          <p:nvPr/>
+        </p:nvPicPr>
+        <p:blipFill>
+          <a:blip r:embed="rId4">
             <a:extLst>
               <a:ext uri="{28A0092B-C50C-407E-A947-70E740481C1C}">
                 <a14:useLocalDpi xmlns:a14="http://schemas.microsoft.com/office/drawing/2010/main" val="0"/>
@@ -9139,31 +9051,31 @@
           <p:cNvPr id="15382" name="Picture 22" descr="稀有廚師帽 冰皮克敏">
             <a:extLst>
               <a:ext uri="{FF2B5EF4-FFF2-40B4-BE49-F238E27FC236}">
-                <a16:creationId xmlns:a16="http://schemas.microsoft.com/office/drawing/2014/main" id="{7E2D9075-01D3-10FE-1FC0-EBE0A86A6A8B}"/>
-              </a:ext>
-            </a:extLst>
-          </p:cNvPr>
-          <p:cNvPicPr>
-            <a:picLocks noChangeAspect="1" noChangeArrowheads="1"/>
-          </p:cNvPicPr>
-          <p:nvPr/>
-        </p:nvPicPr>
-        <p:blipFill>
-          <a:blip r:embed="rId4">
-            <a:extLst>
-              <a:ext uri="{28A0092B-C50C-407E-A947-70E740481C1C}">
-                <a14:useLocalDpi xmlns:a14="http://schemas.microsoft.com/office/drawing/2010/main" val="0"/>
-              </a:ext>
-            </a:extLst>
-          </a:blip>
-          <a:srcRect/>
-          <a:stretch>
-            <a:fillRect/>
-          </a:stretch>
-        </p:blipFill>
-        <p:spPr bwMode="auto">
-          <a:xfrm>
-            <a:off x="9208095" y="-195264"/>
+                <a16:creationId xmlns:a16="http://schemas.microsoft.com/office/drawing/2014/main" id="{2920EE25-F694-84CF-703A-A30C155150B6}"/>
+              </a:ext>
+            </a:extLst>
+          </p:cNvPr>
+          <p:cNvPicPr>
+            <a:picLocks noChangeAspect="1" noChangeArrowheads="1"/>
+          </p:cNvPicPr>
+          <p:nvPr/>
+        </p:nvPicPr>
+        <p:blipFill>
+          <a:blip r:embed="rId5">
+            <a:extLst>
+              <a:ext uri="{28A0092B-C50C-407E-A947-70E740481C1C}">
+                <a14:useLocalDpi xmlns:a14="http://schemas.microsoft.com/office/drawing/2010/main" val="0"/>
+              </a:ext>
+            </a:extLst>
+          </a:blip>
+          <a:srcRect/>
+          <a:stretch>
+            <a:fillRect/>
+          </a:stretch>
+        </p:blipFill>
+        <p:spPr bwMode="auto">
+          <a:xfrm>
+            <a:off x="8968320" y="-123826"/>
             <a:ext cx="1195361" cy="3250800"/>
           </a:xfrm>
           <a:prstGeom prst="rect">
@@ -9186,17 +9098,17 @@
           <p:cNvPr id="15384" name="Picture 24" descr="泡菜 冰皮克敏">
             <a:extLst>
               <a:ext uri="{FF2B5EF4-FFF2-40B4-BE49-F238E27FC236}">
-                <a16:creationId xmlns:a16="http://schemas.microsoft.com/office/drawing/2014/main" id="{6164AAF5-8BA3-4C6E-0B51-05474E090226}"/>
-              </a:ext>
-            </a:extLst>
-          </p:cNvPr>
-          <p:cNvPicPr>
-            <a:picLocks noChangeAspect="1" noChangeArrowheads="1"/>
-          </p:cNvPicPr>
-          <p:nvPr/>
-        </p:nvPicPr>
-        <p:blipFill>
-          <a:blip r:embed="rId5">
+                <a16:creationId xmlns:a16="http://schemas.microsoft.com/office/drawing/2014/main" id="{A3748B00-1457-579C-EFFA-B3211CC708E7}"/>
+              </a:ext>
+            </a:extLst>
+          </p:cNvPr>
+          <p:cNvPicPr>
+            <a:picLocks noChangeAspect="1" noChangeArrowheads="1"/>
+          </p:cNvPicPr>
+          <p:nvPr/>
+        </p:nvPicPr>
+        <p:blipFill>
+          <a:blip r:embed="rId6">
             <a:extLst>
               <a:ext uri="{28A0092B-C50C-407E-A947-70E740481C1C}">
                 <a14:useLocalDpi xmlns:a14="http://schemas.microsoft.com/office/drawing/2010/main" val="0"/>
@@ -9231,7 +9143,7 @@
     </p:spTree>
     <p:extLst>
       <p:ext uri="{BB962C8B-B14F-4D97-AF65-F5344CB8AC3E}">
-        <p14:creationId xmlns:p14="http://schemas.microsoft.com/office/powerpoint/2010/main" val="382843153"/>
+        <p14:creationId xmlns:p14="http://schemas.microsoft.com/office/powerpoint/2010/main" val="3438017008"/>
       </p:ext>
     </p:extLst>
   </p:cSld>
@@ -9249,7 +9161,7 @@
         <p:cNvPr id="1" name="">
           <a:extLst>
             <a:ext uri="{FF2B5EF4-FFF2-40B4-BE49-F238E27FC236}">
-              <a16:creationId xmlns:a16="http://schemas.microsoft.com/office/drawing/2014/main" id="{ECD1667E-F971-B09A-5F6C-2429D2C1A016}"/>
+              <a16:creationId xmlns:a16="http://schemas.microsoft.com/office/drawing/2014/main" id="{C01FFD3B-20C9-45FF-4B80-21889EF94584}"/>
             </a:ext>
           </a:extLst>
         </p:cNvPr>
@@ -9269,7 +9181,7 @@
           <p:cNvPr id="4" name="矩形 3">
             <a:extLst>
               <a:ext uri="{FF2B5EF4-FFF2-40B4-BE49-F238E27FC236}">
-                <a16:creationId xmlns:a16="http://schemas.microsoft.com/office/drawing/2014/main" id="{12E1CA99-587D-8160-CBF6-F5151D0BFDB4}"/>
+                <a16:creationId xmlns:a16="http://schemas.microsoft.com/office/drawing/2014/main" id="{5118D18B-0C2E-5C05-45D8-C0E98B866912}"/>
               </a:ext>
             </a:extLst>
           </p:cNvPr>
@@ -9278,7 +9190,7 @@
         </p:nvSpPr>
         <p:spPr>
           <a:xfrm>
-            <a:off x="659014" y="981383"/>
+            <a:off x="659014" y="1191241"/>
             <a:ext cx="3250800" cy="3251200"/>
           </a:xfrm>
           <a:prstGeom prst="rect">
@@ -9316,34 +9228,81 @@
       </p:sp>
       <p:pic>
         <p:nvPicPr>
+          <p:cNvPr id="15366" name="Picture 6" descr="稀有廚師帽 岩皮克敏">
+            <a:extLst>
+              <a:ext uri="{FF2B5EF4-FFF2-40B4-BE49-F238E27FC236}">
+                <a16:creationId xmlns:a16="http://schemas.microsoft.com/office/drawing/2014/main" id="{0ED0D43F-028D-CBD0-75F9-E43AE122B916}"/>
+              </a:ext>
+            </a:extLst>
+          </p:cNvPr>
+          <p:cNvPicPr>
+            <a:picLocks noChangeAspect="1" noChangeArrowheads="1"/>
+          </p:cNvPicPr>
+          <p:nvPr/>
+        </p:nvPicPr>
+        <p:blipFill>
+          <a:blip r:embed="rId2">
+            <a:extLst>
+              <a:ext uri="{28A0092B-C50C-407E-A947-70E740481C1C}">
+                <a14:useLocalDpi xmlns:a14="http://schemas.microsoft.com/office/drawing/2010/main" val="0"/>
+              </a:ext>
+            </a:extLst>
+          </a:blip>
+          <a:srcRect/>
+          <a:stretch>
+            <a:fillRect/>
+          </a:stretch>
+        </p:blipFill>
+        <p:spPr bwMode="auto">
+          <a:xfrm>
+            <a:off x="1439206" y="1191441"/>
+            <a:ext cx="1690416" cy="3250800"/>
+          </a:xfrm>
+          <a:prstGeom prst="rect">
+            <a:avLst/>
+          </a:prstGeom>
+          <a:noFill/>
+          <a:extLst>
+            <a:ext uri="{909E8E84-426E-40DD-AFC4-6F175D3DCCD1}">
+              <a14:hiddenFill xmlns:a14="http://schemas.microsoft.com/office/drawing/2010/main">
+                <a:solidFill>
+                  <a:srgbClr val="FFFFFF"/>
+                </a:solidFill>
+              </a14:hiddenFill>
+            </a:ext>
+          </a:extLst>
+        </p:spPr>
+      </p:pic>
+      <p:pic>
+        <p:nvPicPr>
           <p:cNvPr id="15378" name="Picture 18" descr="稀有咖啡杯 岩皮克敏">
             <a:extLst>
               <a:ext uri="{FF2B5EF4-FFF2-40B4-BE49-F238E27FC236}">
-                <a16:creationId xmlns:a16="http://schemas.microsoft.com/office/drawing/2014/main" id="{557C4F17-DF51-7226-E5D8-320ED0B96E76}"/>
-              </a:ext>
-            </a:extLst>
-          </p:cNvPr>
-          <p:cNvPicPr>
-            <a:picLocks noChangeAspect="1" noChangeArrowheads="1"/>
-          </p:cNvPicPr>
-          <p:nvPr/>
-        </p:nvPicPr>
-        <p:blipFill>
-          <a:blip r:embed="rId2">
-            <a:extLst>
-              <a:ext uri="{28A0092B-C50C-407E-A947-70E740481C1C}">
-                <a14:useLocalDpi xmlns:a14="http://schemas.microsoft.com/office/drawing/2010/main" val="0"/>
-              </a:ext>
-            </a:extLst>
-          </a:blip>
-          <a:srcRect/>
-          <a:stretch>
-            <a:fillRect/>
-          </a:stretch>
-        </p:blipFill>
-        <p:spPr bwMode="auto">
-          <a:xfrm>
-            <a:off x="1244158" y="981583"/>
+                <a16:creationId xmlns:a16="http://schemas.microsoft.com/office/drawing/2014/main" id="{58049A15-9705-0864-2645-22B2E3746131}"/>
+              </a:ext>
+            </a:extLst>
+          </p:cNvPr>
+          <p:cNvPicPr>
+            <a:picLocks noChangeAspect="1" noChangeArrowheads="1"/>
+          </p:cNvPicPr>
+          <p:nvPr/>
+        </p:nvPicPr>
+        <p:blipFill>
+          <a:blip r:embed="rId3">
+            <a:extLst>
+              <a:ext uri="{28A0092B-C50C-407E-A947-70E740481C1C}">
+                <a14:useLocalDpi xmlns:a14="http://schemas.microsoft.com/office/drawing/2010/main" val="0"/>
+              </a:ext>
+            </a:extLst>
+          </a:blip>
+          <a:srcRect/>
+          <a:stretch>
+            <a:fillRect/>
+          </a:stretch>
+        </p:blipFill>
+        <p:spPr bwMode="auto">
+          <a:xfrm>
+            <a:off x="10403456" y="2000250"/>
             <a:ext cx="2080512" cy="3250800"/>
           </a:xfrm>
           <a:prstGeom prst="rect">
@@ -9366,17 +9325,17 @@
           <p:cNvPr id="15382" name="Picture 22" descr="稀有廚師帽 冰皮克敏">
             <a:extLst>
               <a:ext uri="{FF2B5EF4-FFF2-40B4-BE49-F238E27FC236}">
-                <a16:creationId xmlns:a16="http://schemas.microsoft.com/office/drawing/2014/main" id="{BEC0375C-E686-9841-F972-E11F35F46D97}"/>
-              </a:ext>
-            </a:extLst>
-          </p:cNvPr>
-          <p:cNvPicPr>
-            <a:picLocks noChangeAspect="1" noChangeArrowheads="1"/>
-          </p:cNvPicPr>
-          <p:nvPr/>
-        </p:nvPicPr>
-        <p:blipFill>
-          <a:blip r:embed="rId3">
+                <a16:creationId xmlns:a16="http://schemas.microsoft.com/office/drawing/2014/main" id="{7E2D9075-01D3-10FE-1FC0-EBE0A86A6A8B}"/>
+              </a:ext>
+            </a:extLst>
+          </p:cNvPr>
+          <p:cNvPicPr>
+            <a:picLocks noChangeAspect="1" noChangeArrowheads="1"/>
+          </p:cNvPicPr>
+          <p:nvPr/>
+        </p:nvPicPr>
+        <p:blipFill>
+          <a:blip r:embed="rId4">
             <a:extLst>
               <a:ext uri="{28A0092B-C50C-407E-A947-70E740481C1C}">
                 <a14:useLocalDpi xmlns:a14="http://schemas.microsoft.com/office/drawing/2010/main" val="0"/>
@@ -9413,17 +9372,17 @@
           <p:cNvPr id="15384" name="Picture 24" descr="泡菜 冰皮克敏">
             <a:extLst>
               <a:ext uri="{FF2B5EF4-FFF2-40B4-BE49-F238E27FC236}">
-                <a16:creationId xmlns:a16="http://schemas.microsoft.com/office/drawing/2014/main" id="{5CD2C490-1518-C86C-0D6B-98924671DEE7}"/>
-              </a:ext>
-            </a:extLst>
-          </p:cNvPr>
-          <p:cNvPicPr>
-            <a:picLocks noChangeAspect="1" noChangeArrowheads="1"/>
-          </p:cNvPicPr>
-          <p:nvPr/>
-        </p:nvPicPr>
-        <p:blipFill>
-          <a:blip r:embed="rId4">
+                <a16:creationId xmlns:a16="http://schemas.microsoft.com/office/drawing/2014/main" id="{6164AAF5-8BA3-4C6E-0B51-05474E090226}"/>
+              </a:ext>
+            </a:extLst>
+          </p:cNvPr>
+          <p:cNvPicPr>
+            <a:picLocks noChangeAspect="1" noChangeArrowheads="1"/>
+          </p:cNvPicPr>
+          <p:nvPr/>
+        </p:nvPicPr>
+        <p:blipFill>
+          <a:blip r:embed="rId5">
             <a:extLst>
               <a:ext uri="{28A0092B-C50C-407E-A947-70E740481C1C}">
                 <a14:useLocalDpi xmlns:a14="http://schemas.microsoft.com/office/drawing/2010/main" val="0"/>
@@ -9458,7 +9417,7 @@
     </p:spTree>
     <p:extLst>
       <p:ext uri="{BB962C8B-B14F-4D97-AF65-F5344CB8AC3E}">
-        <p14:creationId xmlns:p14="http://schemas.microsoft.com/office/powerpoint/2010/main" val="370768799"/>
+        <p14:creationId xmlns:p14="http://schemas.microsoft.com/office/powerpoint/2010/main" val="382843153"/>
       </p:ext>
     </p:extLst>
   </p:cSld>
@@ -9476,7 +9435,7 @@
         <p:cNvPr id="1" name="">
           <a:extLst>
             <a:ext uri="{FF2B5EF4-FFF2-40B4-BE49-F238E27FC236}">
-              <a16:creationId xmlns:a16="http://schemas.microsoft.com/office/drawing/2014/main" id="{BF6038DD-572B-0F04-1BC6-009CFD38B2A6}"/>
+              <a16:creationId xmlns:a16="http://schemas.microsoft.com/office/drawing/2014/main" id="{ECD1667E-F971-B09A-5F6C-2429D2C1A016}"/>
             </a:ext>
           </a:extLst>
         </p:cNvPr>
@@ -9496,7 +9455,7 @@
           <p:cNvPr id="4" name="矩形 3">
             <a:extLst>
               <a:ext uri="{FF2B5EF4-FFF2-40B4-BE49-F238E27FC236}">
-                <a16:creationId xmlns:a16="http://schemas.microsoft.com/office/drawing/2014/main" id="{942796BE-E7AB-B98F-A530-8C938FDA7104}"/>
+                <a16:creationId xmlns:a16="http://schemas.microsoft.com/office/drawing/2014/main" id="{12E1CA99-587D-8160-CBF6-F5151D0BFDB4}"/>
               </a:ext>
             </a:extLst>
           </p:cNvPr>
@@ -9543,34 +9502,81 @@
       </p:sp>
       <p:pic>
         <p:nvPicPr>
+          <p:cNvPr id="15378" name="Picture 18" descr="稀有咖啡杯 岩皮克敏">
+            <a:extLst>
+              <a:ext uri="{FF2B5EF4-FFF2-40B4-BE49-F238E27FC236}">
+                <a16:creationId xmlns:a16="http://schemas.microsoft.com/office/drawing/2014/main" id="{557C4F17-DF51-7226-E5D8-320ED0B96E76}"/>
+              </a:ext>
+            </a:extLst>
+          </p:cNvPr>
+          <p:cNvPicPr>
+            <a:picLocks noChangeAspect="1" noChangeArrowheads="1"/>
+          </p:cNvPicPr>
+          <p:nvPr/>
+        </p:nvPicPr>
+        <p:blipFill>
+          <a:blip r:embed="rId2">
+            <a:extLst>
+              <a:ext uri="{28A0092B-C50C-407E-A947-70E740481C1C}">
+                <a14:useLocalDpi xmlns:a14="http://schemas.microsoft.com/office/drawing/2010/main" val="0"/>
+              </a:ext>
+            </a:extLst>
+          </a:blip>
+          <a:srcRect/>
+          <a:stretch>
+            <a:fillRect/>
+          </a:stretch>
+        </p:blipFill>
+        <p:spPr bwMode="auto">
+          <a:xfrm>
+            <a:off x="1244158" y="981583"/>
+            <a:ext cx="2080512" cy="3250800"/>
+          </a:xfrm>
+          <a:prstGeom prst="rect">
+            <a:avLst/>
+          </a:prstGeom>
+          <a:noFill/>
+          <a:extLst>
+            <a:ext uri="{909E8E84-426E-40DD-AFC4-6F175D3DCCD1}">
+              <a14:hiddenFill xmlns:a14="http://schemas.microsoft.com/office/drawing/2010/main">
+                <a:solidFill>
+                  <a:srgbClr val="FFFFFF"/>
+                </a:solidFill>
+              </a14:hiddenFill>
+            </a:ext>
+          </a:extLst>
+        </p:spPr>
+      </p:pic>
+      <p:pic>
+        <p:nvPicPr>
           <p:cNvPr id="15382" name="Picture 22" descr="稀有廚師帽 冰皮克敏">
             <a:extLst>
               <a:ext uri="{FF2B5EF4-FFF2-40B4-BE49-F238E27FC236}">
-                <a16:creationId xmlns:a16="http://schemas.microsoft.com/office/drawing/2014/main" id="{01CEF5C1-5579-B02F-9D98-86C6035DC2EB}"/>
-              </a:ext>
-            </a:extLst>
-          </p:cNvPr>
-          <p:cNvPicPr>
-            <a:picLocks noChangeAspect="1" noChangeArrowheads="1"/>
-          </p:cNvPicPr>
-          <p:nvPr/>
-        </p:nvPicPr>
-        <p:blipFill>
-          <a:blip r:embed="rId2">
-            <a:extLst>
-              <a:ext uri="{28A0092B-C50C-407E-A947-70E740481C1C}">
-                <a14:useLocalDpi xmlns:a14="http://schemas.microsoft.com/office/drawing/2010/main" val="0"/>
-              </a:ext>
-            </a:extLst>
-          </a:blip>
-          <a:srcRect/>
-          <a:stretch>
-            <a:fillRect/>
-          </a:stretch>
-        </p:blipFill>
-        <p:spPr bwMode="auto">
-          <a:xfrm>
-            <a:off x="1686734" y="981583"/>
+                <a16:creationId xmlns:a16="http://schemas.microsoft.com/office/drawing/2014/main" id="{BEC0375C-E686-9841-F972-E11F35F46D97}"/>
+              </a:ext>
+            </a:extLst>
+          </p:cNvPr>
+          <p:cNvPicPr>
+            <a:picLocks noChangeAspect="1" noChangeArrowheads="1"/>
+          </p:cNvPicPr>
+          <p:nvPr/>
+        </p:nvPicPr>
+        <p:blipFill>
+          <a:blip r:embed="rId3">
+            <a:extLst>
+              <a:ext uri="{28A0092B-C50C-407E-A947-70E740481C1C}">
+                <a14:useLocalDpi xmlns:a14="http://schemas.microsoft.com/office/drawing/2010/main" val="0"/>
+              </a:ext>
+            </a:extLst>
+          </a:blip>
+          <a:srcRect/>
+          <a:stretch>
+            <a:fillRect/>
+          </a:stretch>
+        </p:blipFill>
+        <p:spPr bwMode="auto">
+          <a:xfrm>
+            <a:off x="9208095" y="-195264"/>
             <a:ext cx="1195361" cy="3250800"/>
           </a:xfrm>
           <a:prstGeom prst="rect">
@@ -9593,17 +9599,17 @@
           <p:cNvPr id="15384" name="Picture 24" descr="泡菜 冰皮克敏">
             <a:extLst>
               <a:ext uri="{FF2B5EF4-FFF2-40B4-BE49-F238E27FC236}">
-                <a16:creationId xmlns:a16="http://schemas.microsoft.com/office/drawing/2014/main" id="{49D9D41A-0C86-48AC-BE52-129E9441FECD}"/>
-              </a:ext>
-            </a:extLst>
-          </p:cNvPr>
-          <p:cNvPicPr>
-            <a:picLocks noChangeAspect="1" noChangeArrowheads="1"/>
-          </p:cNvPicPr>
-          <p:nvPr/>
-        </p:nvPicPr>
-        <p:blipFill>
-          <a:blip r:embed="rId3">
+                <a16:creationId xmlns:a16="http://schemas.microsoft.com/office/drawing/2014/main" id="{5CD2C490-1518-C86C-0D6B-98924671DEE7}"/>
+              </a:ext>
+            </a:extLst>
+          </p:cNvPr>
+          <p:cNvPicPr>
+            <a:picLocks noChangeAspect="1" noChangeArrowheads="1"/>
+          </p:cNvPicPr>
+          <p:nvPr/>
+        </p:nvPicPr>
+        <p:blipFill>
+          <a:blip r:embed="rId4">
             <a:extLst>
               <a:ext uri="{28A0092B-C50C-407E-A947-70E740481C1C}">
                 <a14:useLocalDpi xmlns:a14="http://schemas.microsoft.com/office/drawing/2010/main" val="0"/>
@@ -9638,7 +9644,7 @@
     </p:spTree>
     <p:extLst>
       <p:ext uri="{BB962C8B-B14F-4D97-AF65-F5344CB8AC3E}">
-        <p14:creationId xmlns:p14="http://schemas.microsoft.com/office/powerpoint/2010/main" val="1286402610"/>
+        <p14:creationId xmlns:p14="http://schemas.microsoft.com/office/powerpoint/2010/main" val="370768799"/>
       </p:ext>
     </p:extLst>
   </p:cSld>
@@ -9656,7 +9662,7 @@
         <p:cNvPr id="1" name="">
           <a:extLst>
             <a:ext uri="{FF2B5EF4-FFF2-40B4-BE49-F238E27FC236}">
-              <a16:creationId xmlns:a16="http://schemas.microsoft.com/office/drawing/2014/main" id="{29302BD7-5411-A7C5-9AA5-07B5887FDA4E}"/>
+              <a16:creationId xmlns:a16="http://schemas.microsoft.com/office/drawing/2014/main" id="{BF6038DD-572B-0F04-1BC6-009CFD38B2A6}"/>
             </a:ext>
           </a:extLst>
         </p:cNvPr>
@@ -9676,7 +9682,7 @@
           <p:cNvPr id="4" name="矩形 3">
             <a:extLst>
               <a:ext uri="{FF2B5EF4-FFF2-40B4-BE49-F238E27FC236}">
-                <a16:creationId xmlns:a16="http://schemas.microsoft.com/office/drawing/2014/main" id="{6E32F361-ADDD-5CBB-A8C6-5D9A93908AD7}"/>
+                <a16:creationId xmlns:a16="http://schemas.microsoft.com/office/drawing/2014/main" id="{942796BE-E7AB-B98F-A530-8C938FDA7104}"/>
               </a:ext>
             </a:extLst>
           </p:cNvPr>
@@ -9723,34 +9729,81 @@
       </p:sp>
       <p:pic>
         <p:nvPicPr>
+          <p:cNvPr id="15382" name="Picture 22" descr="稀有廚師帽 冰皮克敏">
+            <a:extLst>
+              <a:ext uri="{FF2B5EF4-FFF2-40B4-BE49-F238E27FC236}">
+                <a16:creationId xmlns:a16="http://schemas.microsoft.com/office/drawing/2014/main" id="{01CEF5C1-5579-B02F-9D98-86C6035DC2EB}"/>
+              </a:ext>
+            </a:extLst>
+          </p:cNvPr>
+          <p:cNvPicPr>
+            <a:picLocks noChangeAspect="1" noChangeArrowheads="1"/>
+          </p:cNvPicPr>
+          <p:nvPr/>
+        </p:nvPicPr>
+        <p:blipFill>
+          <a:blip r:embed="rId2">
+            <a:extLst>
+              <a:ext uri="{28A0092B-C50C-407E-A947-70E740481C1C}">
+                <a14:useLocalDpi xmlns:a14="http://schemas.microsoft.com/office/drawing/2010/main" val="0"/>
+              </a:ext>
+            </a:extLst>
+          </a:blip>
+          <a:srcRect/>
+          <a:stretch>
+            <a:fillRect/>
+          </a:stretch>
+        </p:blipFill>
+        <p:spPr bwMode="auto">
+          <a:xfrm>
+            <a:off x="1686734" y="981583"/>
+            <a:ext cx="1195361" cy="3250800"/>
+          </a:xfrm>
+          <a:prstGeom prst="rect">
+            <a:avLst/>
+          </a:prstGeom>
+          <a:noFill/>
+          <a:extLst>
+            <a:ext uri="{909E8E84-426E-40DD-AFC4-6F175D3DCCD1}">
+              <a14:hiddenFill xmlns:a14="http://schemas.microsoft.com/office/drawing/2010/main">
+                <a:solidFill>
+                  <a:srgbClr val="FFFFFF"/>
+                </a:solidFill>
+              </a14:hiddenFill>
+            </a:ext>
+          </a:extLst>
+        </p:spPr>
+      </p:pic>
+      <p:pic>
+        <p:nvPicPr>
           <p:cNvPr id="15384" name="Picture 24" descr="泡菜 冰皮克敏">
             <a:extLst>
               <a:ext uri="{FF2B5EF4-FFF2-40B4-BE49-F238E27FC236}">
-                <a16:creationId xmlns:a16="http://schemas.microsoft.com/office/drawing/2014/main" id="{EBED9051-1509-BF6C-E118-FDD5E6CECECB}"/>
-              </a:ext>
-            </a:extLst>
-          </p:cNvPr>
-          <p:cNvPicPr>
-            <a:picLocks noChangeAspect="1" noChangeArrowheads="1"/>
-          </p:cNvPicPr>
-          <p:nvPr/>
-        </p:nvPicPr>
-        <p:blipFill>
-          <a:blip r:embed="rId2">
-            <a:extLst>
-              <a:ext uri="{28A0092B-C50C-407E-A947-70E740481C1C}">
-                <a14:useLocalDpi xmlns:a14="http://schemas.microsoft.com/office/drawing/2010/main" val="0"/>
-              </a:ext>
-            </a:extLst>
-          </a:blip>
-          <a:srcRect/>
-          <a:stretch>
-            <a:fillRect/>
-          </a:stretch>
-        </p:blipFill>
-        <p:spPr bwMode="auto">
-          <a:xfrm>
-            <a:off x="1261283" y="981383"/>
+                <a16:creationId xmlns:a16="http://schemas.microsoft.com/office/drawing/2014/main" id="{49D9D41A-0C86-48AC-BE52-129E9441FECD}"/>
+              </a:ext>
+            </a:extLst>
+          </p:cNvPr>
+          <p:cNvPicPr>
+            <a:picLocks noChangeAspect="1" noChangeArrowheads="1"/>
+          </p:cNvPicPr>
+          <p:nvPr/>
+        </p:nvPicPr>
+        <p:blipFill>
+          <a:blip r:embed="rId3">
+            <a:extLst>
+              <a:ext uri="{28A0092B-C50C-407E-A947-70E740481C1C}">
+                <a14:useLocalDpi xmlns:a14="http://schemas.microsoft.com/office/drawing/2010/main" val="0"/>
+              </a:ext>
+            </a:extLst>
+          </a:blip>
+          <a:srcRect/>
+          <a:stretch>
+            <a:fillRect/>
+          </a:stretch>
+        </p:blipFill>
+        <p:spPr bwMode="auto">
+          <a:xfrm>
+            <a:off x="10061189" y="250031"/>
             <a:ext cx="2046262" cy="3250800"/>
           </a:xfrm>
           <a:prstGeom prst="rect">
@@ -9771,7 +9824,7 @@
     </p:spTree>
     <p:extLst>
       <p:ext uri="{BB962C8B-B14F-4D97-AF65-F5344CB8AC3E}">
-        <p14:creationId xmlns:p14="http://schemas.microsoft.com/office/powerpoint/2010/main" val="75184664"/>
+        <p14:creationId xmlns:p14="http://schemas.microsoft.com/office/powerpoint/2010/main" val="1286402610"/>
       </p:ext>
     </p:extLst>
   </p:cSld>
@@ -9789,7 +9842,7 @@
         <p:cNvPr id="1" name="">
           <a:extLst>
             <a:ext uri="{FF2B5EF4-FFF2-40B4-BE49-F238E27FC236}">
-              <a16:creationId xmlns:a16="http://schemas.microsoft.com/office/drawing/2014/main" id="{CE335F19-2548-6016-6F93-24151CF0B8E9}"/>
+              <a16:creationId xmlns:a16="http://schemas.microsoft.com/office/drawing/2014/main" id="{29302BD7-5411-A7C5-9AA5-07B5887FDA4E}"/>
             </a:ext>
           </a:extLst>
         </p:cNvPr>
@@ -9809,7 +9862,7 @@
           <p:cNvPr id="4" name="矩形 3">
             <a:extLst>
               <a:ext uri="{FF2B5EF4-FFF2-40B4-BE49-F238E27FC236}">
-                <a16:creationId xmlns:a16="http://schemas.microsoft.com/office/drawing/2014/main" id="{BAEAD8DD-F6C9-5000-36E9-09138429CD6B}"/>
+                <a16:creationId xmlns:a16="http://schemas.microsoft.com/office/drawing/2014/main" id="{6E32F361-ADDD-5CBB-A8C6-5D9A93908AD7}"/>
               </a:ext>
             </a:extLst>
           </p:cNvPr>
@@ -9818,7 +9871,7 @@
         </p:nvSpPr>
         <p:spPr>
           <a:xfrm>
-            <a:off x="659014" y="826448"/>
+            <a:off x="659014" y="981383"/>
             <a:ext cx="3250800" cy="3251200"/>
           </a:xfrm>
           <a:prstGeom prst="rect">
@@ -9856,10 +9909,10 @@
       </p:sp>
       <p:pic>
         <p:nvPicPr>
-          <p:cNvPr id="16386" name="Picture 2" descr="稀有廚師帽 白皮克敏">
-            <a:extLst>
-              <a:ext uri="{FF2B5EF4-FFF2-40B4-BE49-F238E27FC236}">
-                <a16:creationId xmlns:a16="http://schemas.microsoft.com/office/drawing/2014/main" id="{0B9D3561-2730-3B39-E338-E66D1E1F68C7}"/>
+          <p:cNvPr id="15384" name="Picture 24" descr="泡菜 冰皮克敏">
+            <a:extLst>
+              <a:ext uri="{FF2B5EF4-FFF2-40B4-BE49-F238E27FC236}">
+                <a16:creationId xmlns:a16="http://schemas.microsoft.com/office/drawing/2014/main" id="{EBED9051-1509-BF6C-E118-FDD5E6CECECB}"/>
               </a:ext>
             </a:extLst>
           </p:cNvPr>
@@ -9883,55 +9936,8 @@
         </p:blipFill>
         <p:spPr bwMode="auto">
           <a:xfrm>
-            <a:off x="1558402" y="826648"/>
-            <a:ext cx="1452024" cy="3250800"/>
-          </a:xfrm>
-          <a:prstGeom prst="rect">
-            <a:avLst/>
-          </a:prstGeom>
-          <a:noFill/>
-          <a:extLst>
-            <a:ext uri="{909E8E84-426E-40DD-AFC4-6F175D3DCCD1}">
-              <a14:hiddenFill xmlns:a14="http://schemas.microsoft.com/office/drawing/2010/main">
-                <a:solidFill>
-                  <a:srgbClr val="FFFFFF"/>
-                </a:solidFill>
-              </a14:hiddenFill>
-            </a:ext>
-          </a:extLst>
-        </p:spPr>
-      </p:pic>
-      <p:pic>
-        <p:nvPicPr>
-          <p:cNvPr id="16388" name="Picture 4" descr="稀有咖啡杯 白皮克敏">
-            <a:extLst>
-              <a:ext uri="{FF2B5EF4-FFF2-40B4-BE49-F238E27FC236}">
-                <a16:creationId xmlns:a16="http://schemas.microsoft.com/office/drawing/2014/main" id="{CBCC2AC1-8106-14FD-5441-BFDD318B31DA}"/>
-              </a:ext>
-            </a:extLst>
-          </p:cNvPr>
-          <p:cNvPicPr>
-            <a:picLocks noChangeAspect="1" noChangeArrowheads="1"/>
-          </p:cNvPicPr>
-          <p:nvPr/>
-        </p:nvPicPr>
-        <p:blipFill>
-          <a:blip r:embed="rId3">
-            <a:extLst>
-              <a:ext uri="{28A0092B-C50C-407E-A947-70E740481C1C}">
-                <a14:useLocalDpi xmlns:a14="http://schemas.microsoft.com/office/drawing/2010/main" val="0"/>
-              </a:ext>
-            </a:extLst>
-          </a:blip>
-          <a:srcRect/>
-          <a:stretch>
-            <a:fillRect/>
-          </a:stretch>
-        </p:blipFill>
-        <p:spPr bwMode="auto">
-          <a:xfrm>
-            <a:off x="8120063" y="3038475"/>
-            <a:ext cx="2802414" cy="3250800"/>
+            <a:off x="1261283" y="981383"/>
+            <a:ext cx="2046262" cy="3250800"/>
           </a:xfrm>
           <a:prstGeom prst="rect">
             <a:avLst/>
@@ -9951,7 +9957,7 @@
     </p:spTree>
     <p:extLst>
       <p:ext uri="{BB962C8B-B14F-4D97-AF65-F5344CB8AC3E}">
-        <p14:creationId xmlns:p14="http://schemas.microsoft.com/office/powerpoint/2010/main" val="3849308465"/>
+        <p14:creationId xmlns:p14="http://schemas.microsoft.com/office/powerpoint/2010/main" val="75184664"/>
       </p:ext>
     </p:extLst>
   </p:cSld>
@@ -9969,7 +9975,7 @@
         <p:cNvPr id="1" name="">
           <a:extLst>
             <a:ext uri="{FF2B5EF4-FFF2-40B4-BE49-F238E27FC236}">
-              <a16:creationId xmlns:a16="http://schemas.microsoft.com/office/drawing/2014/main" id="{8CFEF7EF-75F1-C2B5-294E-CB8ECF7B93AB}"/>
+              <a16:creationId xmlns:a16="http://schemas.microsoft.com/office/drawing/2014/main" id="{CE335F19-2548-6016-6F93-24151CF0B8E9}"/>
             </a:ext>
           </a:extLst>
         </p:cNvPr>
@@ -9989,7 +9995,7 @@
           <p:cNvPr id="4" name="矩形 3">
             <a:extLst>
               <a:ext uri="{FF2B5EF4-FFF2-40B4-BE49-F238E27FC236}">
-                <a16:creationId xmlns:a16="http://schemas.microsoft.com/office/drawing/2014/main" id="{7F0C10EF-D73A-4F85-445B-11229AD5C127}"/>
+                <a16:creationId xmlns:a16="http://schemas.microsoft.com/office/drawing/2014/main" id="{BAEAD8DD-F6C9-5000-36E9-09138429CD6B}"/>
               </a:ext>
             </a:extLst>
           </p:cNvPr>
@@ -9998,7 +10004,7 @@
         </p:nvSpPr>
         <p:spPr>
           <a:xfrm>
-            <a:off x="3039259" y="1642720"/>
+            <a:off x="659014" y="826448"/>
             <a:ext cx="3250800" cy="3251200"/>
           </a:xfrm>
           <a:prstGeom prst="rect">
@@ -10036,38 +10042,102 @@
       </p:sp>
       <p:pic>
         <p:nvPicPr>
-          <p:cNvPr id="5" name="圖片 4">
-            <a:extLst>
-              <a:ext uri="{FF2B5EF4-FFF2-40B4-BE49-F238E27FC236}">
-                <a16:creationId xmlns:a16="http://schemas.microsoft.com/office/drawing/2014/main" id="{DA02B93C-710D-99B0-6498-D1C89D1D3CF0}"/>
-              </a:ext>
-            </a:extLst>
-          </p:cNvPr>
-          <p:cNvPicPr>
-            <a:picLocks noChangeAspect="1"/>
-          </p:cNvPicPr>
-          <p:nvPr/>
-        </p:nvPicPr>
-        <p:blipFill>
-          <a:blip r:embed="rId2"/>
-          <a:stretch>
-            <a:fillRect/>
-          </a:stretch>
-        </p:blipFill>
-        <p:spPr>
-          <a:xfrm>
-            <a:off x="3039259" y="1642920"/>
-            <a:ext cx="3250800" cy="3250800"/>
-          </a:xfrm>
-          <a:prstGeom prst="rect">
-            <a:avLst/>
-          </a:prstGeom>
+          <p:cNvPr id="16386" name="Picture 2" descr="稀有廚師帽 白皮克敏">
+            <a:extLst>
+              <a:ext uri="{FF2B5EF4-FFF2-40B4-BE49-F238E27FC236}">
+                <a16:creationId xmlns:a16="http://schemas.microsoft.com/office/drawing/2014/main" id="{0B9D3561-2730-3B39-E338-E66D1E1F68C7}"/>
+              </a:ext>
+            </a:extLst>
+          </p:cNvPr>
+          <p:cNvPicPr>
+            <a:picLocks noChangeAspect="1" noChangeArrowheads="1"/>
+          </p:cNvPicPr>
+          <p:nvPr/>
+        </p:nvPicPr>
+        <p:blipFill>
+          <a:blip r:embed="rId2">
+            <a:extLst>
+              <a:ext uri="{28A0092B-C50C-407E-A947-70E740481C1C}">
+                <a14:useLocalDpi xmlns:a14="http://schemas.microsoft.com/office/drawing/2010/main" val="0"/>
+              </a:ext>
+            </a:extLst>
+          </a:blip>
+          <a:srcRect/>
+          <a:stretch>
+            <a:fillRect/>
+          </a:stretch>
+        </p:blipFill>
+        <p:spPr bwMode="auto">
+          <a:xfrm>
+            <a:off x="1558402" y="826648"/>
+            <a:ext cx="1452024" cy="3250800"/>
+          </a:xfrm>
+          <a:prstGeom prst="rect">
+            <a:avLst/>
+          </a:prstGeom>
+          <a:noFill/>
+          <a:extLst>
+            <a:ext uri="{909E8E84-426E-40DD-AFC4-6F175D3DCCD1}">
+              <a14:hiddenFill xmlns:a14="http://schemas.microsoft.com/office/drawing/2010/main">
+                <a:solidFill>
+                  <a:srgbClr val="FFFFFF"/>
+                </a:solidFill>
+              </a14:hiddenFill>
+            </a:ext>
+          </a:extLst>
+        </p:spPr>
+      </p:pic>
+      <p:pic>
+        <p:nvPicPr>
+          <p:cNvPr id="16388" name="Picture 4" descr="稀有咖啡杯 白皮克敏">
+            <a:extLst>
+              <a:ext uri="{FF2B5EF4-FFF2-40B4-BE49-F238E27FC236}">
+                <a16:creationId xmlns:a16="http://schemas.microsoft.com/office/drawing/2014/main" id="{CBCC2AC1-8106-14FD-5441-BFDD318B31DA}"/>
+              </a:ext>
+            </a:extLst>
+          </p:cNvPr>
+          <p:cNvPicPr>
+            <a:picLocks noChangeAspect="1" noChangeArrowheads="1"/>
+          </p:cNvPicPr>
+          <p:nvPr/>
+        </p:nvPicPr>
+        <p:blipFill>
+          <a:blip r:embed="rId3">
+            <a:extLst>
+              <a:ext uri="{28A0092B-C50C-407E-A947-70E740481C1C}">
+                <a14:useLocalDpi xmlns:a14="http://schemas.microsoft.com/office/drawing/2010/main" val="0"/>
+              </a:ext>
+            </a:extLst>
+          </a:blip>
+          <a:srcRect/>
+          <a:stretch>
+            <a:fillRect/>
+          </a:stretch>
+        </p:blipFill>
+        <p:spPr bwMode="auto">
+          <a:xfrm>
+            <a:off x="8120063" y="3038475"/>
+            <a:ext cx="2802414" cy="3250800"/>
+          </a:xfrm>
+          <a:prstGeom prst="rect">
+            <a:avLst/>
+          </a:prstGeom>
+          <a:noFill/>
+          <a:extLst>
+            <a:ext uri="{909E8E84-426E-40DD-AFC4-6F175D3DCCD1}">
+              <a14:hiddenFill xmlns:a14="http://schemas.microsoft.com/office/drawing/2010/main">
+                <a:solidFill>
+                  <a:srgbClr val="FFFFFF"/>
+                </a:solidFill>
+              </a14:hiddenFill>
+            </a:ext>
+          </a:extLst>
         </p:spPr>
       </p:pic>
     </p:spTree>
     <p:extLst>
       <p:ext uri="{BB962C8B-B14F-4D97-AF65-F5344CB8AC3E}">
-        <p14:creationId xmlns:p14="http://schemas.microsoft.com/office/powerpoint/2010/main" val="1086435890"/>
+        <p14:creationId xmlns:p14="http://schemas.microsoft.com/office/powerpoint/2010/main" val="3849308465"/>
       </p:ext>
     </p:extLst>
   </p:cSld>
@@ -10254,6 +10324,122 @@
     <p:extLst>
       <p:ext uri="{BB962C8B-B14F-4D97-AF65-F5344CB8AC3E}">
         <p14:creationId xmlns:p14="http://schemas.microsoft.com/office/powerpoint/2010/main" val="1563337132"/>
+      </p:ext>
+    </p:extLst>
+  </p:cSld>
+  <p:clrMapOvr>
+    <a:masterClrMapping/>
+  </p:clrMapOvr>
+</p:sld>
+</file>
+
+<file path=ppt/slides/slide30.xml><?xml version="1.0" encoding="utf-8"?>
+<p:sld xmlns:a="http://schemas.openxmlformats.org/drawingml/2006/main" xmlns:r="http://schemas.openxmlformats.org/officeDocument/2006/relationships" xmlns:p="http://schemas.openxmlformats.org/presentationml/2006/main">
+  <p:cSld>
+    <p:spTree>
+      <p:nvGrpSpPr>
+        <p:cNvPr id="1" name="">
+          <a:extLst>
+            <a:ext uri="{FF2B5EF4-FFF2-40B4-BE49-F238E27FC236}">
+              <a16:creationId xmlns:a16="http://schemas.microsoft.com/office/drawing/2014/main" id="{8CFEF7EF-75F1-C2B5-294E-CB8ECF7B93AB}"/>
+            </a:ext>
+          </a:extLst>
+        </p:cNvPr>
+        <p:cNvGrpSpPr/>
+        <p:nvPr/>
+      </p:nvGrpSpPr>
+      <p:grpSpPr>
+        <a:xfrm>
+          <a:off x="0" y="0"/>
+          <a:ext cx="0" cy="0"/>
+          <a:chOff x="0" y="0"/>
+          <a:chExt cx="0" cy="0"/>
+        </a:xfrm>
+      </p:grpSpPr>
+      <p:sp>
+        <p:nvSpPr>
+          <p:cNvPr id="4" name="矩形 3">
+            <a:extLst>
+              <a:ext uri="{FF2B5EF4-FFF2-40B4-BE49-F238E27FC236}">
+                <a16:creationId xmlns:a16="http://schemas.microsoft.com/office/drawing/2014/main" id="{7F0C10EF-D73A-4F85-445B-11229AD5C127}"/>
+              </a:ext>
+            </a:extLst>
+          </p:cNvPr>
+          <p:cNvSpPr/>
+          <p:nvPr/>
+        </p:nvSpPr>
+        <p:spPr>
+          <a:xfrm>
+            <a:off x="3039259" y="1642720"/>
+            <a:ext cx="3250800" cy="3251200"/>
+          </a:xfrm>
+          <a:prstGeom prst="rect">
+            <a:avLst/>
+          </a:prstGeom>
+          <a:noFill/>
+          <a:ln>
+            <a:noFill/>
+          </a:ln>
+        </p:spPr>
+        <p:style>
+          <a:lnRef idx="2">
+            <a:schemeClr val="accent1">
+              <a:shade val="15000"/>
+            </a:schemeClr>
+          </a:lnRef>
+          <a:fillRef idx="1">
+            <a:schemeClr val="accent1"/>
+          </a:fillRef>
+          <a:effectRef idx="0">
+            <a:schemeClr val="accent1"/>
+          </a:effectRef>
+          <a:fontRef idx="minor">
+            <a:schemeClr val="lt1"/>
+          </a:fontRef>
+        </p:style>
+        <p:txBody>
+          <a:bodyPr rtlCol="0" anchor="ctr"/>
+          <a:lstStyle/>
+          <a:p>
+            <a:pPr algn="ctr"/>
+            <a:endParaRPr lang="zh-TW" altLang="en-US"/>
+          </a:p>
+        </p:txBody>
+      </p:sp>
+      <p:pic>
+        <p:nvPicPr>
+          <p:cNvPr id="5" name="圖片 4">
+            <a:extLst>
+              <a:ext uri="{FF2B5EF4-FFF2-40B4-BE49-F238E27FC236}">
+                <a16:creationId xmlns:a16="http://schemas.microsoft.com/office/drawing/2014/main" id="{DA02B93C-710D-99B0-6498-D1C89D1D3CF0}"/>
+              </a:ext>
+            </a:extLst>
+          </p:cNvPr>
+          <p:cNvPicPr>
+            <a:picLocks noChangeAspect="1"/>
+          </p:cNvPicPr>
+          <p:nvPr/>
+        </p:nvPicPr>
+        <p:blipFill>
+          <a:blip r:embed="rId2"/>
+          <a:stretch>
+            <a:fillRect/>
+          </a:stretch>
+        </p:blipFill>
+        <p:spPr>
+          <a:xfrm>
+            <a:off x="3039259" y="1642920"/>
+            <a:ext cx="3250800" cy="3250800"/>
+          </a:xfrm>
+          <a:prstGeom prst="rect">
+            <a:avLst/>
+          </a:prstGeom>
+        </p:spPr>
+      </p:pic>
+    </p:spTree>
+    <p:extLst>
+      <p:ext uri="{BB962C8B-B14F-4D97-AF65-F5344CB8AC3E}">
+        <p14:creationId xmlns:p14="http://schemas.microsoft.com/office/powerpoint/2010/main" val="1086435890"/>
       </p:ext>
     </p:extLst>
   </p:cSld>
